--- a/BankMarketing_Presentation.pptx
+++ b/BankMarketing_Presentation.pptx
@@ -20,6 +20,10 @@
     <p:sldId id="268" r:id="rId19"/>
     <p:sldId id="269" r:id="rId20"/>
     <p:sldId id="270" r:id="rId21"/>
+    <p:sldId id="274" r:id="rId25"/>
+    <p:sldId id="275" r:id="rId26"/>
+    <p:sldId id="276" r:id="rId27"/>
+    <p:sldId id="277" r:id="rId28"/>
     <p:sldId id="271" r:id="rId22"/>
     <p:sldId id="272" r:id="rId23"/>
     <p:sldId id="273" r:id="rId24"/>
@@ -3888,7 +3892,7 @@
                   <a:srgbClr val="666666"/>
                 </a:solidFill>
               </a:rPr>
-              <a:t>10 / 18</a:t>
+              <a:t>10 / 22</a:t>
             </a:r>
           </a:p>
         </p:txBody>
@@ -4640,7 +4644,7 @@
                   <a:srgbClr val="666666"/>
                 </a:solidFill>
               </a:rPr>
-              <a:t>11 / 18</a:t>
+              <a:t>11 / 22</a:t>
             </a:r>
           </a:p>
         </p:txBody>
@@ -5044,7 +5048,7 @@
                   <a:srgbClr val="666666"/>
                 </a:solidFill>
               </a:rPr>
-              <a:t>12 / 18</a:t>
+              <a:t>12 / 22</a:t>
             </a:r>
           </a:p>
         </p:txBody>
@@ -5459,7 +5463,7 @@
                   <a:srgbClr val="666666"/>
                 </a:solidFill>
               </a:rPr>
-              <a:t>13 / 18</a:t>
+              <a:t>13 / 22</a:t>
             </a:r>
           </a:p>
         </p:txBody>
@@ -5974,7 +5978,7 @@
                   <a:srgbClr val="666666"/>
                 </a:solidFill>
               </a:rPr>
-              <a:t>14 / 18</a:t>
+              <a:t>14 / 22</a:t>
             </a:r>
           </a:p>
         </p:txBody>
@@ -6273,7 +6277,7 @@
                   <a:srgbClr val="666666"/>
                 </a:solidFill>
               </a:rPr>
-              <a:t>15 / 18</a:t>
+              <a:t>15 / 22</a:t>
             </a:r>
           </a:p>
         </p:txBody>
@@ -6617,7 +6621,7 @@
                   <a:srgbClr val="666666"/>
                 </a:solidFill>
               </a:rPr>
-              <a:t>16 / 18</a:t>
+              <a:t>20 / 22</a:t>
             </a:r>
           </a:p>
         </p:txBody>
@@ -7038,7 +7042,7 @@
                   <a:srgbClr val="666666"/>
                 </a:solidFill>
               </a:rPr>
-              <a:t>17 / 18</a:t>
+              <a:t>21 / 22</a:t>
             </a:r>
           </a:p>
         </p:txBody>
@@ -7214,6 +7218,908 @@
 </p:sld>
 </file>
 
+<file path=ppt/slides/slide19.xml><?xml version="1.0" encoding="utf-8"?>
+<p:sld xmlns:a="http://schemas.openxmlformats.org/drawingml/2006/main" xmlns:p="http://schemas.openxmlformats.org/presentationml/2006/main" xmlns:r="http://schemas.openxmlformats.org/officeDocument/2006/relationships">
+  <p:cSld>
+    <p:spTree>
+      <p:nvGrpSpPr>
+        <p:cNvPr id="1" name=""/>
+        <p:cNvGrpSpPr/>
+        <p:nvPr/>
+      </p:nvGrpSpPr>
+      <p:grpSpPr/>
+      <p:sp>
+        <p:nvSpPr>
+          <p:cNvPr id="2" name="Rectangle 1"/>
+          <p:cNvSpPr/>
+          <p:nvPr/>
+        </p:nvSpPr>
+        <p:spPr>
+          <a:xfrm>
+            <a:off x="0" y="0"/>
+            <a:ext cx="12191695" cy="6858000"/>
+          </a:xfrm>
+          <a:prstGeom prst="rect">
+            <a:avLst/>
+          </a:prstGeom>
+          <a:solidFill>
+            <a:srgbClr val="FFFFFF"/>
+          </a:solidFill>
+          <a:ln>
+            <a:noFill/>
+          </a:ln>
+          <a:effectLst/>
+        </p:spPr>
+        <p:style>
+          <a:lnRef idx="1">
+            <a:schemeClr val="accent1"/>
+          </a:lnRef>
+          <a:fillRef idx="3">
+            <a:schemeClr val="accent1"/>
+          </a:fillRef>
+          <a:effectRef idx="2">
+            <a:schemeClr val="accent1"/>
+          </a:effectRef>
+          <a:fontRef idx="minor">
+            <a:schemeClr val="lt1"/>
+          </a:fontRef>
+        </p:style>
+        <p:txBody>
+          <a:bodyPr rtlCol="0" anchor="ctr"/>
+          <a:lstStyle/>
+          <a:p>
+            <a:pPr algn="ctr"/>
+          </a:p>
+        </p:txBody>
+      </p:sp>
+      <p:sp>
+        <p:nvSpPr>
+          <p:cNvPr id="3" name="TextBox 2"/>
+          <p:cNvSpPr txBox="1"/>
+          <p:nvPr/>
+        </p:nvSpPr>
+        <p:spPr>
+          <a:xfrm>
+            <a:off x="548640" y="137160"/>
+            <a:ext cx="7315200" cy="320040"/>
+          </a:xfrm>
+          <a:prstGeom prst="rect">
+            <a:avLst/>
+          </a:prstGeom>
+          <a:noFill/>
+        </p:spPr>
+        <p:txBody>
+          <a:bodyPr wrap="none">
+            <a:spAutoFit/>
+          </a:bodyPr>
+          <a:lstStyle/>
+          <a:p>
+            <a:r>
+              <a:rPr sz="1300" b="1">
+                <a:solidFill>
+                  <a:srgbClr val="009E73"/>
+                </a:solidFill>
+                <a:latin typeface="Tahoma"/>
+              </a:rPr>
+              <a:t>APPENDIX C — PREPROCESSING</a:t>
+            </a:r>
+          </a:p>
+        </p:txBody>
+      </p:sp>
+      <p:sp>
+        <p:nvSpPr>
+          <p:cNvPr id="4" name="TextBox 3"/>
+          <p:cNvSpPr txBox="1"/>
+          <p:nvPr/>
+        </p:nvSpPr>
+        <p:spPr>
+          <a:xfrm>
+            <a:off x="548640" y="411480"/>
+            <a:ext cx="11094415" cy="822960"/>
+          </a:xfrm>
+          <a:prstGeom prst="rect">
+            <a:avLst/>
+          </a:prstGeom>
+          <a:noFill/>
+        </p:spPr>
+        <p:txBody>
+          <a:bodyPr wrap="square">
+            <a:spAutoFit/>
+          </a:bodyPr>
+          <a:lstStyle/>
+          <a:p>
+            <a:r>
+              <a:rPr sz="3200" b="1">
+                <a:solidFill>
+                  <a:srgbClr val="333333"/>
+                </a:solidFill>
+                <a:latin typeface="Tahoma"/>
+              </a:rPr>
+              <a:t>Scaler: ปรับสเกลฟีเจอร์ตัวเลข เลือกแบบไหนดี</a:t>
+            </a:r>
+          </a:p>
+        </p:txBody>
+      </p:sp>
+      <p:sp>
+        <p:nvSpPr>
+          <p:cNvPr id="5" name="Rectangle 4"/>
+          <p:cNvSpPr/>
+          <p:nvPr/>
+        </p:nvSpPr>
+        <p:spPr>
+          <a:xfrm>
+            <a:off x="548640" y="1143000"/>
+            <a:ext cx="1828800" cy="50800"/>
+          </a:xfrm>
+          <a:prstGeom prst="rect">
+            <a:avLst/>
+          </a:prstGeom>
+          <a:solidFill>
+            <a:srgbClr val="009E73"/>
+          </a:solidFill>
+          <a:ln>
+            <a:noFill/>
+          </a:ln>
+          <a:effectLst/>
+        </p:spPr>
+        <p:style>
+          <a:lnRef idx="1">
+            <a:schemeClr val="accent1"/>
+          </a:lnRef>
+          <a:fillRef idx="3">
+            <a:schemeClr val="accent1"/>
+          </a:fillRef>
+          <a:effectRef idx="2">
+            <a:schemeClr val="accent1"/>
+          </a:effectRef>
+          <a:fontRef idx="minor">
+            <a:schemeClr val="lt1"/>
+          </a:fontRef>
+        </p:style>
+        <p:txBody>
+          <a:bodyPr rtlCol="0" anchor="ctr"/>
+          <a:lstStyle/>
+          <a:p>
+            <a:pPr algn="ctr"/>
+          </a:p>
+        </p:txBody>
+      </p:sp>
+      <p:sp>
+        <p:nvSpPr>
+          <p:cNvPr id="6" name="TextBox 5"/>
+          <p:cNvSpPr txBox="1"/>
+          <p:nvPr/>
+        </p:nvSpPr>
+        <p:spPr>
+          <a:xfrm>
+            <a:off x="11002975" y="6446520"/>
+            <a:ext cx="914400" cy="274320"/>
+          </a:xfrm>
+          <a:prstGeom prst="rect">
+            <a:avLst/>
+          </a:prstGeom>
+          <a:noFill/>
+        </p:spPr>
+        <p:txBody>
+          <a:bodyPr wrap="none">
+            <a:spAutoFit/>
+          </a:bodyPr>
+          <a:lstStyle/>
+          <a:p>
+            <a:pPr algn="r"/>
+            <a:r>
+              <a:rPr sz="1100" b="0">
+                <a:solidFill>
+                  <a:srgbClr val="666666"/>
+                </a:solidFill>
+              </a:rPr>
+              <a:t>16 / 22</a:t>
+            </a:r>
+          </a:p>
+        </p:txBody>
+      </p:sp>
+      <p:sp>
+        <p:nvSpPr>
+          <p:cNvPr id="7" name="TextBox 6"/>
+          <p:cNvSpPr txBox="1"/>
+          <p:nvPr/>
+        </p:nvSpPr>
+        <p:spPr>
+          <a:xfrm>
+            <a:off x="548640" y="6446520"/>
+            <a:ext cx="4572000" cy="274320"/>
+          </a:xfrm>
+          <a:prstGeom prst="rect">
+            <a:avLst/>
+          </a:prstGeom>
+          <a:noFill/>
+        </p:spPr>
+        <p:txBody>
+          <a:bodyPr wrap="none">
+            <a:spAutoFit/>
+          </a:bodyPr>
+          <a:lstStyle/>
+          <a:p>
+            <a:r>
+              <a:rPr sz="1100" b="0">
+                <a:solidFill>
+                  <a:srgbClr val="666666"/>
+                </a:solidFill>
+              </a:rPr>
+              <a:t>Bank Marketing — Term Deposit Prediction</a:t>
+            </a:r>
+          </a:p>
+        </p:txBody>
+      </p:sp>
+      <p:graphicFrame>
+        <p:nvGraphicFramePr>
+          <p:cNvPr id="8" name="Table 7"/>
+          <p:cNvGraphicFramePr>
+            <a:graphicFrameLocks noGrp="1"/>
+          </p:cNvGraphicFramePr>
+          <p:nvPr/>
+        </p:nvGraphicFramePr>
+        <p:xfrm>
+          <a:off x="548640" y="1417320"/>
+          <a:ext cx="11064238" cy="2520000"/>
+        </p:xfrm>
+        <a:graphic>
+          <a:graphicData uri="http://schemas.openxmlformats.org/drawingml/2006/table">
+            <a:tbl>
+              <a:tblPr firstRow="1" bandRow="1">
+                <a:tableStyleId>{5C22544A-7EE6-4342-B048-85BDC9FD1C3A}</a:tableStyleId>
+              </a:tblPr>
+              <a:tblGrid>
+                <a:gridCol w="2253826"/>
+                <a:gridCol w="2458720"/>
+                <a:gridCol w="3688079"/>
+                <a:gridCol w="2663613"/>
+              </a:tblGrid>
+              <a:tr h="420000">
+                <a:tc>
+                  <a:txBody>
+                    <a:bodyPr/>
+                    <a:lstStyle/>
+                    <a:p>
+                      <a:pPr algn="ctr"/>
+                      <a:r>
+                        <a:rPr sz="1300" b="1">
+                          <a:solidFill>
+                            <a:srgbClr val="FFFFFF"/>
+                          </a:solidFill>
+                          <a:latin typeface="Tahoma"/>
+                        </a:rPr>
+                        <a:t>Scaler</a:t>
+                      </a:r>
+                    </a:p>
+                  </a:txBody>
+                  <a:tcPr marT="45720" marB="45720" anchor="ctr">
+                    <a:solidFill>
+                      <a:srgbClr val="009E73"/>
+                    </a:solidFill>
+                  </a:tcPr>
+                </a:tc>
+                <a:tc>
+                  <a:txBody>
+                    <a:bodyPr/>
+                    <a:lstStyle/>
+                    <a:p>
+                      <a:pPr algn="ctr"/>
+                      <a:r>
+                        <a:rPr sz="1300" b="1">
+                          <a:solidFill>
+                            <a:srgbClr val="FFFFFF"/>
+                          </a:solidFill>
+                          <a:latin typeface="Tahoma"/>
+                        </a:rPr>
+                        <a:t>วิธีทำ</a:t>
+                      </a:r>
+                    </a:p>
+                  </a:txBody>
+                  <a:tcPr marT="45720" marB="45720" anchor="ctr">
+                    <a:solidFill>
+                      <a:srgbClr val="009E73"/>
+                    </a:solidFill>
+                  </a:tcPr>
+                </a:tc>
+                <a:tc>
+                  <a:txBody>
+                    <a:bodyPr/>
+                    <a:lstStyle/>
+                    <a:p>
+                      <a:pPr algn="ctr"/>
+                      <a:r>
+                        <a:rPr sz="1300" b="1">
+                          <a:solidFill>
+                            <a:srgbClr val="FFFFFF"/>
+                          </a:solidFill>
+                          <a:latin typeface="Tahoma"/>
+                        </a:rPr>
+                        <a:t>เหมาะกับข้อมูลแบบ</a:t>
+                      </a:r>
+                    </a:p>
+                  </a:txBody>
+                  <a:tcPr marT="45720" marB="45720" anchor="ctr">
+                    <a:solidFill>
+                      <a:srgbClr val="009E73"/>
+                    </a:solidFill>
+                  </a:tcPr>
+                </a:tc>
+                <a:tc>
+                  <a:txBody>
+                    <a:bodyPr/>
+                    <a:lstStyle/>
+                    <a:p>
+                      <a:pPr algn="ctr"/>
+                      <a:r>
+                        <a:rPr sz="1300" b="1">
+                          <a:solidFill>
+                            <a:srgbClr val="FFFFFF"/>
+                          </a:solidFill>
+                          <a:latin typeface="Tahoma"/>
+                        </a:rPr>
+                        <a:t>ข้อควรระวัง</a:t>
+                      </a:r>
+                    </a:p>
+                  </a:txBody>
+                  <a:tcPr marT="45720" marB="45720" anchor="ctr">
+                    <a:solidFill>
+                      <a:srgbClr val="009E73"/>
+                    </a:solidFill>
+                  </a:tcPr>
+                </a:tc>
+              </a:tr>
+              <a:tr h="420000">
+                <a:tc>
+                  <a:txBody>
+                    <a:bodyPr/>
+                    <a:lstStyle/>
+                    <a:p>
+                      <a:r>
+                        <a:rPr sz="1300" b="1">
+                          <a:solidFill>
+                            <a:srgbClr val="333333"/>
+                          </a:solidFill>
+                          <a:latin typeface="Tahoma"/>
+                        </a:rPr>
+                        <a:t>StandardScaler</a:t>
+                      </a:r>
+                    </a:p>
+                  </a:txBody>
+                  <a:tcPr marT="45720" marB="45720" anchor="ctr">
+                    <a:solidFill>
+                      <a:srgbClr val="FFFFFF"/>
+                    </a:solidFill>
+                  </a:tcPr>
+                </a:tc>
+                <a:tc>
+                  <a:txBody>
+                    <a:bodyPr/>
+                    <a:lstStyle/>
+                    <a:p>
+                      <a:r>
+                        <a:rPr sz="1300" b="0">
+                          <a:solidFill>
+                            <a:srgbClr val="333333"/>
+                          </a:solidFill>
+                          <a:latin typeface="Tahoma"/>
+                        </a:rPr>
+                        <a:t>(x − mean) / std</a:t>
+                      </a:r>
+                    </a:p>
+                  </a:txBody>
+                  <a:tcPr marT="45720" marB="45720" anchor="ctr">
+                    <a:solidFill>
+                      <a:srgbClr val="FFFFFF"/>
+                    </a:solidFill>
+                  </a:tcPr>
+                </a:tc>
+                <a:tc>
+                  <a:txBody>
+                    <a:bodyPr/>
+                    <a:lstStyle/>
+                    <a:p>
+                      <a:r>
+                        <a:rPr sz="1300" b="0">
+                          <a:solidFill>
+                            <a:srgbClr val="333333"/>
+                          </a:solidFill>
+                          <a:latin typeface="Tahoma"/>
+                        </a:rPr>
+                        <a:t>กระจายใกล้ปกติ — ค่าเริ่มต้นที่ใช้บ่อยสุด</a:t>
+                      </a:r>
+                    </a:p>
+                  </a:txBody>
+                  <a:tcPr marT="45720" marB="45720" anchor="ctr">
+                    <a:solidFill>
+                      <a:srgbClr val="FFFFFF"/>
+                    </a:solidFill>
+                  </a:tcPr>
+                </a:tc>
+                <a:tc>
+                  <a:txBody>
+                    <a:bodyPr/>
+                    <a:lstStyle/>
+                    <a:p>
+                      <a:r>
+                        <a:rPr sz="1300" b="0">
+                          <a:solidFill>
+                            <a:srgbClr val="333333"/>
+                          </a:solidFill>
+                          <a:latin typeface="Tahoma"/>
+                        </a:rPr>
+                        <a:t>outlier ดึง mean/std เพี้ยน</a:t>
+                      </a:r>
+                    </a:p>
+                  </a:txBody>
+                  <a:tcPr marT="45720" marB="45720" anchor="ctr">
+                    <a:solidFill>
+                      <a:srgbClr val="FFFFFF"/>
+                    </a:solidFill>
+                  </a:tcPr>
+                </a:tc>
+              </a:tr>
+              <a:tr h="420000">
+                <a:tc>
+                  <a:txBody>
+                    <a:bodyPr/>
+                    <a:lstStyle/>
+                    <a:p>
+                      <a:r>
+                        <a:rPr sz="1300" b="1">
+                          <a:solidFill>
+                            <a:srgbClr val="333333"/>
+                          </a:solidFill>
+                          <a:latin typeface="Tahoma"/>
+                        </a:rPr>
+                        <a:t>MinMaxScaler</a:t>
+                      </a:r>
+                    </a:p>
+                  </a:txBody>
+                  <a:tcPr marT="45720" marB="45720" anchor="ctr">
+                    <a:solidFill>
+                      <a:srgbClr val="F7F9F9"/>
+                    </a:solidFill>
+                  </a:tcPr>
+                </a:tc>
+                <a:tc>
+                  <a:txBody>
+                    <a:bodyPr/>
+                    <a:lstStyle/>
+                    <a:p>
+                      <a:r>
+                        <a:rPr sz="1300" b="0">
+                          <a:solidFill>
+                            <a:srgbClr val="333333"/>
+                          </a:solidFill>
+                          <a:latin typeface="Tahoma"/>
+                        </a:rPr>
+                        <a:t>บีบเข้าช่วง [0, 1]</a:t>
+                      </a:r>
+                    </a:p>
+                  </a:txBody>
+                  <a:tcPr marT="45720" marB="45720" anchor="ctr">
+                    <a:solidFill>
+                      <a:srgbClr val="F7F9F9"/>
+                    </a:solidFill>
+                  </a:tcPr>
+                </a:tc>
+                <a:tc>
+                  <a:txBody>
+                    <a:bodyPr/>
+                    <a:lstStyle/>
+                    <a:p>
+                      <a:r>
+                        <a:rPr sz="1300" b="0">
+                          <a:solidFill>
+                            <a:srgbClr val="333333"/>
+                          </a:solidFill>
+                          <a:latin typeface="Tahoma"/>
+                        </a:rPr>
+                        <a:t>มีขอบเขตชัด เช่น %, pixel, Neural Net</a:t>
+                      </a:r>
+                    </a:p>
+                  </a:txBody>
+                  <a:tcPr marT="45720" marB="45720" anchor="ctr">
+                    <a:solidFill>
+                      <a:srgbClr val="F7F9F9"/>
+                    </a:solidFill>
+                  </a:tcPr>
+                </a:tc>
+                <a:tc>
+                  <a:txBody>
+                    <a:bodyPr/>
+                    <a:lstStyle/>
+                    <a:p>
+                      <a:r>
+                        <a:rPr sz="1300" b="0">
+                          <a:solidFill>
+                            <a:srgbClr val="333333"/>
+                          </a:solidFill>
+                          <a:latin typeface="Tahoma"/>
+                        </a:rPr>
+                        <a:t>ไวต่อ outlier มาก</a:t>
+                      </a:r>
+                    </a:p>
+                  </a:txBody>
+                  <a:tcPr marT="45720" marB="45720" anchor="ctr">
+                    <a:solidFill>
+                      <a:srgbClr val="F7F9F9"/>
+                    </a:solidFill>
+                  </a:tcPr>
+                </a:tc>
+              </a:tr>
+              <a:tr h="420000">
+                <a:tc>
+                  <a:txBody>
+                    <a:bodyPr/>
+                    <a:lstStyle/>
+                    <a:p>
+                      <a:r>
+                        <a:rPr sz="1300" b="1">
+                          <a:solidFill>
+                            <a:srgbClr val="333333"/>
+                          </a:solidFill>
+                          <a:latin typeface="Tahoma"/>
+                        </a:rPr>
+                        <a:t>RobustScaler</a:t>
+                      </a:r>
+                    </a:p>
+                  </a:txBody>
+                  <a:tcPr marT="45720" marB="45720" anchor="ctr">
+                    <a:solidFill>
+                      <a:srgbClr val="FFFFFF"/>
+                    </a:solidFill>
+                  </a:tcPr>
+                </a:tc>
+                <a:tc>
+                  <a:txBody>
+                    <a:bodyPr/>
+                    <a:lstStyle/>
+                    <a:p>
+                      <a:r>
+                        <a:rPr sz="1300" b="0">
+                          <a:solidFill>
+                            <a:srgbClr val="333333"/>
+                          </a:solidFill>
+                          <a:latin typeface="Tahoma"/>
+                        </a:rPr>
+                        <a:t>(x − median) / IQR</a:t>
+                      </a:r>
+                    </a:p>
+                  </a:txBody>
+                  <a:tcPr marT="45720" marB="45720" anchor="ctr">
+                    <a:solidFill>
+                      <a:srgbClr val="FFFFFF"/>
+                    </a:solidFill>
+                  </a:tcPr>
+                </a:tc>
+                <a:tc>
+                  <a:txBody>
+                    <a:bodyPr/>
+                    <a:lstStyle/>
+                    <a:p>
+                      <a:r>
+                        <a:rPr sz="1300" b="0">
+                          <a:solidFill>
+                            <a:srgbClr val="333333"/>
+                          </a:solidFill>
+                          <a:latin typeface="Tahoma"/>
+                        </a:rPr>
+                        <a:t>มี outlier เยอะ เช่น balance, campaign</a:t>
+                      </a:r>
+                    </a:p>
+                  </a:txBody>
+                  <a:tcPr marT="45720" marB="45720" anchor="ctr">
+                    <a:solidFill>
+                      <a:srgbClr val="FFFFFF"/>
+                    </a:solidFill>
+                  </a:tcPr>
+                </a:tc>
+                <a:tc>
+                  <a:txBody>
+                    <a:bodyPr/>
+                    <a:lstStyle/>
+                    <a:p>
+                      <a:r>
+                        <a:rPr sz="1300" b="0">
+                          <a:solidFill>
+                            <a:srgbClr val="333333"/>
+                          </a:solidFill>
+                          <a:latin typeface="Tahoma"/>
+                        </a:rPr>
+                        <a:t>ไม่บีบเข้าช่วงตายตัว</a:t>
+                      </a:r>
+                    </a:p>
+                  </a:txBody>
+                  <a:tcPr marT="45720" marB="45720" anchor="ctr">
+                    <a:solidFill>
+                      <a:srgbClr val="FFFFFF"/>
+                    </a:solidFill>
+                  </a:tcPr>
+                </a:tc>
+              </a:tr>
+              <a:tr h="420000">
+                <a:tc>
+                  <a:txBody>
+                    <a:bodyPr/>
+                    <a:lstStyle/>
+                    <a:p>
+                      <a:r>
+                        <a:rPr sz="1300" b="1">
+                          <a:solidFill>
+                            <a:srgbClr val="333333"/>
+                          </a:solidFill>
+                          <a:latin typeface="Tahoma"/>
+                        </a:rPr>
+                        <a:t>PowerTransformer</a:t>
+                      </a:r>
+                    </a:p>
+                  </a:txBody>
+                  <a:tcPr marT="45720" marB="45720" anchor="ctr">
+                    <a:solidFill>
+                      <a:srgbClr val="F7F9F9"/>
+                    </a:solidFill>
+                  </a:tcPr>
+                </a:tc>
+                <a:tc>
+                  <a:txBody>
+                    <a:bodyPr/>
+                    <a:lstStyle/>
+                    <a:p>
+                      <a:r>
+                        <a:rPr sz="1300" b="0">
+                          <a:solidFill>
+                            <a:srgbClr val="333333"/>
+                          </a:solidFill>
+                          <a:latin typeface="Tahoma"/>
+                        </a:rPr>
+                        <a:t>Yeo-Johnson / Box-Cox</a:t>
+                      </a:r>
+                    </a:p>
+                  </a:txBody>
+                  <a:tcPr marT="45720" marB="45720" anchor="ctr">
+                    <a:solidFill>
+                      <a:srgbClr val="F7F9F9"/>
+                    </a:solidFill>
+                  </a:tcPr>
+                </a:tc>
+                <a:tc>
+                  <a:txBody>
+                    <a:bodyPr/>
+                    <a:lstStyle/>
+                    <a:p>
+                      <a:r>
+                        <a:rPr sz="1300" b="0">
+                          <a:solidFill>
+                            <a:srgbClr val="333333"/>
+                          </a:solidFill>
+                          <a:latin typeface="Tahoma"/>
+                        </a:rPr>
+                        <a:t>ข้อมูลเบ้มาก (หางยาวข้างเดียว)</a:t>
+                      </a:r>
+                    </a:p>
+                  </a:txBody>
+                  <a:tcPr marT="45720" marB="45720" anchor="ctr">
+                    <a:solidFill>
+                      <a:srgbClr val="F7F9F9"/>
+                    </a:solidFill>
+                  </a:tcPr>
+                </a:tc>
+                <a:tc>
+                  <a:txBody>
+                    <a:bodyPr/>
+                    <a:lstStyle/>
+                    <a:p>
+                      <a:r>
+                        <a:rPr sz="1300" b="0">
+                          <a:solidFill>
+                            <a:srgbClr val="333333"/>
+                          </a:solidFill>
+                          <a:latin typeface="Tahoma"/>
+                        </a:rPr>
+                        <a:t>ตีความค่าหลังแปลงยากขึ้น</a:t>
+                      </a:r>
+                    </a:p>
+                  </a:txBody>
+                  <a:tcPr marT="45720" marB="45720" anchor="ctr">
+                    <a:solidFill>
+                      <a:srgbClr val="F7F9F9"/>
+                    </a:solidFill>
+                  </a:tcPr>
+                </a:tc>
+              </a:tr>
+              <a:tr h="420000">
+                <a:tc>
+                  <a:txBody>
+                    <a:bodyPr/>
+                    <a:lstStyle/>
+                    <a:p>
+                      <a:r>
+                        <a:rPr sz="1300" b="1">
+                          <a:solidFill>
+                            <a:srgbClr val="333333"/>
+                          </a:solidFill>
+                          <a:latin typeface="Tahoma"/>
+                        </a:rPr>
+                        <a:t>MaxAbsScaler</a:t>
+                      </a:r>
+                    </a:p>
+                  </a:txBody>
+                  <a:tcPr marT="45720" marB="45720" anchor="ctr">
+                    <a:solidFill>
+                      <a:srgbClr val="FFFFFF"/>
+                    </a:solidFill>
+                  </a:tcPr>
+                </a:tc>
+                <a:tc>
+                  <a:txBody>
+                    <a:bodyPr/>
+                    <a:lstStyle/>
+                    <a:p>
+                      <a:r>
+                        <a:rPr sz="1300" b="0">
+                          <a:solidFill>
+                            <a:srgbClr val="333333"/>
+                          </a:solidFill>
+                          <a:latin typeface="Tahoma"/>
+                        </a:rPr>
+                        <a:t>x / |x|max → [-1, 1]</a:t>
+                      </a:r>
+                    </a:p>
+                  </a:txBody>
+                  <a:tcPr marT="45720" marB="45720" anchor="ctr">
+                    <a:solidFill>
+                      <a:srgbClr val="FFFFFF"/>
+                    </a:solidFill>
+                  </a:tcPr>
+                </a:tc>
+                <a:tc>
+                  <a:txBody>
+                    <a:bodyPr/>
+                    <a:lstStyle/>
+                    <a:p>
+                      <a:r>
+                        <a:rPr sz="1300" b="0">
+                          <a:solidFill>
+                            <a:srgbClr val="333333"/>
+                          </a:solidFill>
+                          <a:latin typeface="Tahoma"/>
+                        </a:rPr>
+                        <a:t>sparse data (one-hot, TF-IDF)</a:t>
+                      </a:r>
+                    </a:p>
+                  </a:txBody>
+                  <a:tcPr marT="45720" marB="45720" anchor="ctr">
+                    <a:solidFill>
+                      <a:srgbClr val="FFFFFF"/>
+                    </a:solidFill>
+                  </a:tcPr>
+                </a:tc>
+                <a:tc>
+                  <a:txBody>
+                    <a:bodyPr/>
+                    <a:lstStyle/>
+                    <a:p>
+                      <a:r>
+                        <a:rPr sz="1300" b="0">
+                          <a:solidFill>
+                            <a:srgbClr val="333333"/>
+                          </a:solidFill>
+                          <a:latin typeface="Tahoma"/>
+                        </a:rPr>
+                        <a:t>ไวต่อ outlier</a:t>
+                      </a:r>
+                    </a:p>
+                  </a:txBody>
+                  <a:tcPr marT="45720" marB="45720" anchor="ctr">
+                    <a:solidFill>
+                      <a:srgbClr val="FFFFFF"/>
+                    </a:solidFill>
+                  </a:tcPr>
+                </a:tc>
+              </a:tr>
+            </a:tbl>
+          </a:graphicData>
+        </a:graphic>
+      </p:graphicFrame>
+      <p:sp>
+        <p:nvSpPr>
+          <p:cNvPr id="9" name="Rounded Rectangle 8"/>
+          <p:cNvSpPr/>
+          <p:nvPr/>
+        </p:nvSpPr>
+        <p:spPr>
+          <a:xfrm>
+            <a:off x="548640" y="4297680"/>
+            <a:ext cx="11064240" cy="1508760"/>
+          </a:xfrm>
+          <a:prstGeom prst="roundRect">
+            <a:avLst>
+              <a:gd name="adj" fmla="val 8000"/>
+            </a:avLst>
+          </a:prstGeom>
+          <a:solidFill>
+            <a:srgbClr val="F7F9F9"/>
+          </a:solidFill>
+          <a:ln w="12700">
+            <a:solidFill>
+              <a:srgbClr val="009E73"/>
+            </a:solidFill>
+          </a:ln>
+          <a:effectLst/>
+        </p:spPr>
+        <p:style>
+          <a:lnRef idx="1">
+            <a:schemeClr val="accent1"/>
+          </a:lnRef>
+          <a:fillRef idx="3">
+            <a:schemeClr val="accent1"/>
+          </a:fillRef>
+          <a:effectRef idx="2">
+            <a:schemeClr val="accent1"/>
+          </a:effectRef>
+          <a:fontRef idx="minor">
+            <a:schemeClr val="lt1"/>
+          </a:fontRef>
+        </p:style>
+        <p:txBody>
+          <a:bodyPr rtlCol="0" anchor="ctr" wrap="square" lIns="228600" rIns="228600"/>
+          <a:lstStyle/>
+          <a:p>
+            <a:pPr algn="ctr"/>
+            <a:r>
+              <a:rPr sz="1400" b="1">
+                <a:solidFill>
+                  <a:srgbClr val="333333"/>
+                </a:solidFill>
+                <a:latin typeface="Tahoma"/>
+              </a:rPr>
+              <a:t>ใครต้อง scale: Logistic, SVM, KNN, Neural Net, PCA — โมเดลต้นไม้ (RF, GBM) ไม่จำเป็น</a:t>
+            </a:r>
+          </a:p>
+          <a:p>
+            <a:pPr>
+              <a:spcBef>
+                <a:spcPts val="300"/>
+              </a:spcBef>
+            </a:pPr>
+            <a:r>
+              <a:rPr sz="1300" b="0">
+                <a:solidFill>
+                  <a:srgbClr val="333333"/>
+                </a:solidFill>
+                <a:latin typeface="Tahoma"/>
+              </a:rPr>
+              <a:t>▸ fit scaler บน train เท่านั้น แล้วค่อย transform test — ใส่ใน Pipeline เพื่อกัน data leakage ทุก fold</a:t>
+            </a:r>
+          </a:p>
+          <a:p>
+            <a:pPr>
+              <a:spcBef>
+                <a:spcPts val="300"/>
+              </a:spcBef>
+            </a:pPr>
+            <a:r>
+              <a:rPr sz="1300" b="0">
+                <a:solidFill>
+                  <a:srgbClr val="333333"/>
+                </a:solidFill>
+                <a:latin typeface="Tahoma"/>
+              </a:rPr>
+              <a:t>▸ โปรเจกต์นี้ใช้ StandardScaler; balance/campaign เบ้และมี outlier → ลอง RobustScaler หรือ PowerTransformer เพื่อช่วย Logistic</a:t>
+            </a:r>
+          </a:p>
+        </p:txBody>
+      </p:sp>
+    </p:spTree>
+  </p:cSld>
+  <p:clrMapOvr>
+    <a:masterClrMapping/>
+  </p:clrMapOvr>
+</p:sld>
+</file>
+
 <file path=ppt/slides/slide2.xml><?xml version="1.0" encoding="utf-8"?>
 <p:sld xmlns:a="http://schemas.openxmlformats.org/drawingml/2006/main" xmlns:p="http://schemas.openxmlformats.org/presentationml/2006/main" xmlns:r="http://schemas.openxmlformats.org/officeDocument/2006/relationships">
   <p:cSld>
@@ -7589,7 +8495,7 @@
                   <a:srgbClr val="666666"/>
                 </a:solidFill>
               </a:rPr>
-              <a:t>2 / 18</a:t>
+              <a:t>2 / 22</a:t>
             </a:r>
           </a:p>
         </p:txBody>
@@ -7623,6 +8529,3036 @@
                 </a:solidFill>
               </a:rPr>
               <a:t>Bank Marketing — Term Deposit Prediction</a:t>
+            </a:r>
+          </a:p>
+        </p:txBody>
+      </p:sp>
+    </p:spTree>
+  </p:cSld>
+  <p:clrMapOvr>
+    <a:masterClrMapping/>
+  </p:clrMapOvr>
+</p:sld>
+</file>
+
+<file path=ppt/slides/slide20.xml><?xml version="1.0" encoding="utf-8"?>
+<p:sld xmlns:a="http://schemas.openxmlformats.org/drawingml/2006/main" xmlns:p="http://schemas.openxmlformats.org/presentationml/2006/main" xmlns:r="http://schemas.openxmlformats.org/officeDocument/2006/relationships">
+  <p:cSld>
+    <p:spTree>
+      <p:nvGrpSpPr>
+        <p:cNvPr id="1" name=""/>
+        <p:cNvGrpSpPr/>
+        <p:nvPr/>
+      </p:nvGrpSpPr>
+      <p:grpSpPr/>
+      <p:sp>
+        <p:nvSpPr>
+          <p:cNvPr id="2" name="Rectangle 1"/>
+          <p:cNvSpPr/>
+          <p:nvPr/>
+        </p:nvSpPr>
+        <p:spPr>
+          <a:xfrm>
+            <a:off x="0" y="0"/>
+            <a:ext cx="12191695" cy="6858000"/>
+          </a:xfrm>
+          <a:prstGeom prst="rect">
+            <a:avLst/>
+          </a:prstGeom>
+          <a:solidFill>
+            <a:srgbClr val="FFFFFF"/>
+          </a:solidFill>
+          <a:ln>
+            <a:noFill/>
+          </a:ln>
+          <a:effectLst/>
+        </p:spPr>
+        <p:style>
+          <a:lnRef idx="1">
+            <a:schemeClr val="accent1"/>
+          </a:lnRef>
+          <a:fillRef idx="3">
+            <a:schemeClr val="accent1"/>
+          </a:fillRef>
+          <a:effectRef idx="2">
+            <a:schemeClr val="accent1"/>
+          </a:effectRef>
+          <a:fontRef idx="minor">
+            <a:schemeClr val="lt1"/>
+          </a:fontRef>
+        </p:style>
+        <p:txBody>
+          <a:bodyPr rtlCol="0" anchor="ctr"/>
+          <a:lstStyle/>
+          <a:p>
+            <a:pPr algn="ctr"/>
+          </a:p>
+        </p:txBody>
+      </p:sp>
+      <p:sp>
+        <p:nvSpPr>
+          <p:cNvPr id="3" name="TextBox 2"/>
+          <p:cNvSpPr txBox="1"/>
+          <p:nvPr/>
+        </p:nvSpPr>
+        <p:spPr>
+          <a:xfrm>
+            <a:off x="548640" y="137160"/>
+            <a:ext cx="7315200" cy="320040"/>
+          </a:xfrm>
+          <a:prstGeom prst="rect">
+            <a:avLst/>
+          </a:prstGeom>
+          <a:noFill/>
+        </p:spPr>
+        <p:txBody>
+          <a:bodyPr wrap="none">
+            <a:spAutoFit/>
+          </a:bodyPr>
+          <a:lstStyle/>
+          <a:p>
+            <a:r>
+              <a:rPr sz="1300" b="1">
+                <a:solidFill>
+                  <a:srgbClr val="009E73"/>
+                </a:solidFill>
+                <a:latin typeface="Tahoma"/>
+              </a:rPr>
+              <a:t>APPENDIX D — PREPROCESSING</a:t>
+            </a:r>
+          </a:p>
+        </p:txBody>
+      </p:sp>
+      <p:sp>
+        <p:nvSpPr>
+          <p:cNvPr id="4" name="TextBox 3"/>
+          <p:cNvSpPr txBox="1"/>
+          <p:nvPr/>
+        </p:nvSpPr>
+        <p:spPr>
+          <a:xfrm>
+            <a:off x="548640" y="411480"/>
+            <a:ext cx="11094415" cy="822960"/>
+          </a:xfrm>
+          <a:prstGeom prst="rect">
+            <a:avLst/>
+          </a:prstGeom>
+          <a:noFill/>
+        </p:spPr>
+        <p:txBody>
+          <a:bodyPr wrap="square">
+            <a:spAutoFit/>
+          </a:bodyPr>
+          <a:lstStyle/>
+          <a:p>
+            <a:r>
+              <a:rPr sz="3200" b="1">
+                <a:solidFill>
+                  <a:srgbClr val="333333"/>
+                </a:solidFill>
+                <a:latin typeface="Tahoma"/>
+              </a:rPr>
+              <a:t>Encoding: แปลงข้อมูลประเภท (categorical) เป็นตัวเลข</a:t>
+            </a:r>
+          </a:p>
+        </p:txBody>
+      </p:sp>
+      <p:sp>
+        <p:nvSpPr>
+          <p:cNvPr id="5" name="Rectangle 4"/>
+          <p:cNvSpPr/>
+          <p:nvPr/>
+        </p:nvSpPr>
+        <p:spPr>
+          <a:xfrm>
+            <a:off x="548640" y="1143000"/>
+            <a:ext cx="1828800" cy="50800"/>
+          </a:xfrm>
+          <a:prstGeom prst="rect">
+            <a:avLst/>
+          </a:prstGeom>
+          <a:solidFill>
+            <a:srgbClr val="009E73"/>
+          </a:solidFill>
+          <a:ln>
+            <a:noFill/>
+          </a:ln>
+          <a:effectLst/>
+        </p:spPr>
+        <p:style>
+          <a:lnRef idx="1">
+            <a:schemeClr val="accent1"/>
+          </a:lnRef>
+          <a:fillRef idx="3">
+            <a:schemeClr val="accent1"/>
+          </a:fillRef>
+          <a:effectRef idx="2">
+            <a:schemeClr val="accent1"/>
+          </a:effectRef>
+          <a:fontRef idx="minor">
+            <a:schemeClr val="lt1"/>
+          </a:fontRef>
+        </p:style>
+        <p:txBody>
+          <a:bodyPr rtlCol="0" anchor="ctr"/>
+          <a:lstStyle/>
+          <a:p>
+            <a:pPr algn="ctr"/>
+          </a:p>
+        </p:txBody>
+      </p:sp>
+      <p:sp>
+        <p:nvSpPr>
+          <p:cNvPr id="6" name="TextBox 5"/>
+          <p:cNvSpPr txBox="1"/>
+          <p:nvPr/>
+        </p:nvSpPr>
+        <p:spPr>
+          <a:xfrm>
+            <a:off x="11002975" y="6446520"/>
+            <a:ext cx="914400" cy="274320"/>
+          </a:xfrm>
+          <a:prstGeom prst="rect">
+            <a:avLst/>
+          </a:prstGeom>
+          <a:noFill/>
+        </p:spPr>
+        <p:txBody>
+          <a:bodyPr wrap="none">
+            <a:spAutoFit/>
+          </a:bodyPr>
+          <a:lstStyle/>
+          <a:p>
+            <a:pPr algn="r"/>
+            <a:r>
+              <a:rPr sz="1100" b="0">
+                <a:solidFill>
+                  <a:srgbClr val="666666"/>
+                </a:solidFill>
+              </a:rPr>
+              <a:t>17 / 22</a:t>
+            </a:r>
+          </a:p>
+        </p:txBody>
+      </p:sp>
+      <p:sp>
+        <p:nvSpPr>
+          <p:cNvPr id="7" name="TextBox 6"/>
+          <p:cNvSpPr txBox="1"/>
+          <p:nvPr/>
+        </p:nvSpPr>
+        <p:spPr>
+          <a:xfrm>
+            <a:off x="548640" y="6446520"/>
+            <a:ext cx="4572000" cy="274320"/>
+          </a:xfrm>
+          <a:prstGeom prst="rect">
+            <a:avLst/>
+          </a:prstGeom>
+          <a:noFill/>
+        </p:spPr>
+        <p:txBody>
+          <a:bodyPr wrap="none">
+            <a:spAutoFit/>
+          </a:bodyPr>
+          <a:lstStyle/>
+          <a:p>
+            <a:r>
+              <a:rPr sz="1100" b="0">
+                <a:solidFill>
+                  <a:srgbClr val="666666"/>
+                </a:solidFill>
+              </a:rPr>
+              <a:t>Bank Marketing — Term Deposit Prediction</a:t>
+            </a:r>
+          </a:p>
+        </p:txBody>
+      </p:sp>
+      <p:graphicFrame>
+        <p:nvGraphicFramePr>
+          <p:cNvPr id="8" name="Table 7"/>
+          <p:cNvGraphicFramePr>
+            <a:graphicFrameLocks noGrp="1"/>
+          </p:cNvGraphicFramePr>
+          <p:nvPr/>
+        </p:nvGraphicFramePr>
+        <p:xfrm>
+          <a:off x="548640" y="1417320"/>
+          <a:ext cx="11064238" cy="2800000"/>
+        </p:xfrm>
+        <a:graphic>
+          <a:graphicData uri="http://schemas.openxmlformats.org/drawingml/2006/table">
+            <a:tbl>
+              <a:tblPr firstRow="1" bandRow="1">
+                <a:tableStyleId>{5C22544A-7EE6-4342-B048-85BDC9FD1C3A}</a:tableStyleId>
+              </a:tblPr>
+              <a:tblGrid>
+                <a:gridCol w="2212848"/>
+                <a:gridCol w="2816351"/>
+                <a:gridCol w="3218688"/>
+                <a:gridCol w="2816351"/>
+              </a:tblGrid>
+              <a:tr h="400000">
+                <a:tc>
+                  <a:txBody>
+                    <a:bodyPr/>
+                    <a:lstStyle/>
+                    <a:p>
+                      <a:pPr algn="ctr"/>
+                      <a:r>
+                        <a:rPr sz="1300" b="1">
+                          <a:solidFill>
+                            <a:srgbClr val="FFFFFF"/>
+                          </a:solidFill>
+                          <a:latin typeface="Tahoma"/>
+                        </a:rPr>
+                        <a:t>วิธี</a:t>
+                      </a:r>
+                    </a:p>
+                  </a:txBody>
+                  <a:tcPr marT="45720" marB="45720" anchor="ctr">
+                    <a:solidFill>
+                      <a:srgbClr val="009E73"/>
+                    </a:solidFill>
+                  </a:tcPr>
+                </a:tc>
+                <a:tc>
+                  <a:txBody>
+                    <a:bodyPr/>
+                    <a:lstStyle/>
+                    <a:p>
+                      <a:pPr algn="ctr"/>
+                      <a:r>
+                        <a:rPr sz="1300" b="1">
+                          <a:solidFill>
+                            <a:srgbClr val="FFFFFF"/>
+                          </a:solidFill>
+                          <a:latin typeface="Tahoma"/>
+                        </a:rPr>
+                        <a:t>ทำอะไร</a:t>
+                      </a:r>
+                    </a:p>
+                  </a:txBody>
+                  <a:tcPr marT="45720" marB="45720" anchor="ctr">
+                    <a:solidFill>
+                      <a:srgbClr val="009E73"/>
+                    </a:solidFill>
+                  </a:tcPr>
+                </a:tc>
+                <a:tc>
+                  <a:txBody>
+                    <a:bodyPr/>
+                    <a:lstStyle/>
+                    <a:p>
+                      <a:pPr algn="ctr"/>
+                      <a:r>
+                        <a:rPr sz="1300" b="1">
+                          <a:solidFill>
+                            <a:srgbClr val="FFFFFF"/>
+                          </a:solidFill>
+                          <a:latin typeface="Tahoma"/>
+                        </a:rPr>
+                        <a:t>เหมาะกับ</a:t>
+                      </a:r>
+                    </a:p>
+                  </a:txBody>
+                  <a:tcPr marT="45720" marB="45720" anchor="ctr">
+                    <a:solidFill>
+                      <a:srgbClr val="009E73"/>
+                    </a:solidFill>
+                  </a:tcPr>
+                </a:tc>
+                <a:tc>
+                  <a:txBody>
+                    <a:bodyPr/>
+                    <a:lstStyle/>
+                    <a:p>
+                      <a:pPr algn="ctr"/>
+                      <a:r>
+                        <a:rPr sz="1300" b="1">
+                          <a:solidFill>
+                            <a:srgbClr val="FFFFFF"/>
+                          </a:solidFill>
+                          <a:latin typeface="Tahoma"/>
+                        </a:rPr>
+                        <a:t>ข้อควรระวัง</a:t>
+                      </a:r>
+                    </a:p>
+                  </a:txBody>
+                  <a:tcPr marT="45720" marB="45720" anchor="ctr">
+                    <a:solidFill>
+                      <a:srgbClr val="009E73"/>
+                    </a:solidFill>
+                  </a:tcPr>
+                </a:tc>
+              </a:tr>
+              <a:tr h="400000">
+                <a:tc>
+                  <a:txBody>
+                    <a:bodyPr/>
+                    <a:lstStyle/>
+                    <a:p>
+                      <a:r>
+                        <a:rPr sz="1300" b="1">
+                          <a:solidFill>
+                            <a:srgbClr val="333333"/>
+                          </a:solidFill>
+                          <a:latin typeface="Tahoma"/>
+                        </a:rPr>
+                        <a:t>Label Encoding</a:t>
+                      </a:r>
+                    </a:p>
+                  </a:txBody>
+                  <a:tcPr marT="45720" marB="45720" anchor="ctr">
+                    <a:solidFill>
+                      <a:srgbClr val="FFFFFF"/>
+                    </a:solidFill>
+                  </a:tcPr>
+                </a:tc>
+                <a:tc>
+                  <a:txBody>
+                    <a:bodyPr/>
+                    <a:lstStyle/>
+                    <a:p>
+                      <a:r>
+                        <a:rPr sz="1300" b="0">
+                          <a:solidFill>
+                            <a:srgbClr val="333333"/>
+                          </a:solidFill>
+                          <a:latin typeface="Tahoma"/>
+                        </a:rPr>
+                        <a:t>แทนค่าด้วย 0, 1, 2, …</a:t>
+                      </a:r>
+                    </a:p>
+                  </a:txBody>
+                  <a:tcPr marT="45720" marB="45720" anchor="ctr">
+                    <a:solidFill>
+                      <a:srgbClr val="FFFFFF"/>
+                    </a:solidFill>
+                  </a:tcPr>
+                </a:tc>
+                <a:tc>
+                  <a:txBody>
+                    <a:bodyPr/>
+                    <a:lstStyle/>
+                    <a:p>
+                      <a:r>
+                        <a:rPr sz="1300" b="0">
+                          <a:solidFill>
+                            <a:srgbClr val="333333"/>
+                          </a:solidFill>
+                          <a:latin typeface="Tahoma"/>
+                        </a:rPr>
+                        <a:t>ตัว target (y) เช่น no→0, yes→1</a:t>
+                      </a:r>
+                    </a:p>
+                  </a:txBody>
+                  <a:tcPr marT="45720" marB="45720" anchor="ctr">
+                    <a:solidFill>
+                      <a:srgbClr val="FFFFFF"/>
+                    </a:solidFill>
+                  </a:tcPr>
+                </a:tc>
+                <a:tc>
+                  <a:txBody>
+                    <a:bodyPr/>
+                    <a:lstStyle/>
+                    <a:p>
+                      <a:r>
+                        <a:rPr sz="1300" b="0">
+                          <a:solidFill>
+                            <a:srgbClr val="333333"/>
+                          </a:solidFill>
+                          <a:latin typeface="Tahoma"/>
+                        </a:rPr>
+                        <a:t>ใช้กับฟีเจอร์ = ลำดับปลอม</a:t>
+                      </a:r>
+                    </a:p>
+                  </a:txBody>
+                  <a:tcPr marT="45720" marB="45720" anchor="ctr">
+                    <a:solidFill>
+                      <a:srgbClr val="FFFFFF"/>
+                    </a:solidFill>
+                  </a:tcPr>
+                </a:tc>
+              </a:tr>
+              <a:tr h="400000">
+                <a:tc>
+                  <a:txBody>
+                    <a:bodyPr/>
+                    <a:lstStyle/>
+                    <a:p>
+                      <a:r>
+                        <a:rPr sz="1300" b="1">
+                          <a:solidFill>
+                            <a:srgbClr val="333333"/>
+                          </a:solidFill>
+                          <a:latin typeface="Tahoma"/>
+                        </a:rPr>
+                        <a:t>Ordinal Encoding</a:t>
+                      </a:r>
+                    </a:p>
+                  </a:txBody>
+                  <a:tcPr marT="45720" marB="45720" anchor="ctr">
+                    <a:solidFill>
+                      <a:srgbClr val="F7F9F9"/>
+                    </a:solidFill>
+                  </a:tcPr>
+                </a:tc>
+                <a:tc>
+                  <a:txBody>
+                    <a:bodyPr/>
+                    <a:lstStyle/>
+                    <a:p>
+                      <a:r>
+                        <a:rPr sz="1300" b="0">
+                          <a:solidFill>
+                            <a:srgbClr val="333333"/>
+                          </a:solidFill>
+                          <a:latin typeface="Tahoma"/>
+                        </a:rPr>
+                        <a:t>เลขตามลำดับที่กำหนดเอง</a:t>
+                      </a:r>
+                    </a:p>
+                  </a:txBody>
+                  <a:tcPr marT="45720" marB="45720" anchor="ctr">
+                    <a:solidFill>
+                      <a:srgbClr val="F7F9F9"/>
+                    </a:solidFill>
+                  </a:tcPr>
+                </a:tc>
+                <a:tc>
+                  <a:txBody>
+                    <a:bodyPr/>
+                    <a:lstStyle/>
+                    <a:p>
+                      <a:r>
+                        <a:rPr sz="1300" b="0">
+                          <a:solidFill>
+                            <a:srgbClr val="333333"/>
+                          </a:solidFill>
+                          <a:latin typeface="Tahoma"/>
+                        </a:rPr>
+                        <a:t>หมวดที่มีลำดับจริง เช่น education</a:t>
+                      </a:r>
+                    </a:p>
+                  </a:txBody>
+                  <a:tcPr marT="45720" marB="45720" anchor="ctr">
+                    <a:solidFill>
+                      <a:srgbClr val="F7F9F9"/>
+                    </a:solidFill>
+                  </a:tcPr>
+                </a:tc>
+                <a:tc>
+                  <a:txBody>
+                    <a:bodyPr/>
+                    <a:lstStyle/>
+                    <a:p>
+                      <a:r>
+                        <a:rPr sz="1300" b="0">
+                          <a:solidFill>
+                            <a:srgbClr val="333333"/>
+                          </a:solidFill>
+                          <a:latin typeface="Tahoma"/>
+                        </a:rPr>
+                        <a:t>ต้องระบุลำดับเอง</a:t>
+                      </a:r>
+                    </a:p>
+                  </a:txBody>
+                  <a:tcPr marT="45720" marB="45720" anchor="ctr">
+                    <a:solidFill>
+                      <a:srgbClr val="F7F9F9"/>
+                    </a:solidFill>
+                  </a:tcPr>
+                </a:tc>
+              </a:tr>
+              <a:tr h="400000">
+                <a:tc>
+                  <a:txBody>
+                    <a:bodyPr/>
+                    <a:lstStyle/>
+                    <a:p>
+                      <a:r>
+                        <a:rPr sz="1300" b="1">
+                          <a:solidFill>
+                            <a:srgbClr val="333333"/>
+                          </a:solidFill>
+                          <a:latin typeface="Tahoma"/>
+                        </a:rPr>
+                        <a:t>One-Hot Encoding</a:t>
+                      </a:r>
+                    </a:p>
+                  </a:txBody>
+                  <a:tcPr marT="45720" marB="45720" anchor="ctr">
+                    <a:solidFill>
+                      <a:srgbClr val="FFFFFF"/>
+                    </a:solidFill>
+                  </a:tcPr>
+                </a:tc>
+                <a:tc>
+                  <a:txBody>
+                    <a:bodyPr/>
+                    <a:lstStyle/>
+                    <a:p>
+                      <a:r>
+                        <a:rPr sz="1300" b="0">
+                          <a:solidFill>
+                            <a:srgbClr val="333333"/>
+                          </a:solidFill>
+                          <a:latin typeface="Tahoma"/>
+                        </a:rPr>
+                        <a:t>1 คอลัมน์ 0/1 ต่อ 1 ค่า</a:t>
+                      </a:r>
+                    </a:p>
+                  </a:txBody>
+                  <a:tcPr marT="45720" marB="45720" anchor="ctr">
+                    <a:solidFill>
+                      <a:srgbClr val="FFFFFF"/>
+                    </a:solidFill>
+                  </a:tcPr>
+                </a:tc>
+                <a:tc>
+                  <a:txBody>
+                    <a:bodyPr/>
+                    <a:lstStyle/>
+                    <a:p>
+                      <a:r>
+                        <a:rPr sz="1300" b="0">
+                          <a:solidFill>
+                            <a:srgbClr val="333333"/>
+                          </a:solidFill>
+                          <a:latin typeface="Tahoma"/>
+                        </a:rPr>
+                        <a:t>nominal ค่าไม่มาก เช่น job, marital</a:t>
+                      </a:r>
+                    </a:p>
+                  </a:txBody>
+                  <a:tcPr marT="45720" marB="45720" anchor="ctr">
+                    <a:solidFill>
+                      <a:srgbClr val="FFFFFF"/>
+                    </a:solidFill>
+                  </a:tcPr>
+                </a:tc>
+                <a:tc>
+                  <a:txBody>
+                    <a:bodyPr/>
+                    <a:lstStyle/>
+                    <a:p>
+                      <a:r>
+                        <a:rPr sz="1300" b="0">
+                          <a:solidFill>
+                            <a:srgbClr val="333333"/>
+                          </a:solidFill>
+                          <a:latin typeface="Tahoma"/>
+                        </a:rPr>
+                        <a:t>ค่าเยอะ → คอลัมน์ระเบิด</a:t>
+                      </a:r>
+                    </a:p>
+                  </a:txBody>
+                  <a:tcPr marT="45720" marB="45720" anchor="ctr">
+                    <a:solidFill>
+                      <a:srgbClr val="FFFFFF"/>
+                    </a:solidFill>
+                  </a:tcPr>
+                </a:tc>
+              </a:tr>
+              <a:tr h="400000">
+                <a:tc>
+                  <a:txBody>
+                    <a:bodyPr/>
+                    <a:lstStyle/>
+                    <a:p>
+                      <a:r>
+                        <a:rPr sz="1300" b="1">
+                          <a:solidFill>
+                            <a:srgbClr val="333333"/>
+                          </a:solidFill>
+                          <a:latin typeface="Tahoma"/>
+                        </a:rPr>
+                        <a:t>Target Encoding</a:t>
+                      </a:r>
+                    </a:p>
+                  </a:txBody>
+                  <a:tcPr marT="45720" marB="45720" anchor="ctr">
+                    <a:solidFill>
+                      <a:srgbClr val="F7F9F9"/>
+                    </a:solidFill>
+                  </a:tcPr>
+                </a:tc>
+                <a:tc>
+                  <a:txBody>
+                    <a:bodyPr/>
+                    <a:lstStyle/>
+                    <a:p>
+                      <a:r>
+                        <a:rPr sz="1300" b="0">
+                          <a:solidFill>
+                            <a:srgbClr val="333333"/>
+                          </a:solidFill>
+                          <a:latin typeface="Tahoma"/>
+                        </a:rPr>
+                        <a:t>แทนด้วยค่าเฉลี่ย target ของหมวด</a:t>
+                      </a:r>
+                    </a:p>
+                  </a:txBody>
+                  <a:tcPr marT="45720" marB="45720" anchor="ctr">
+                    <a:solidFill>
+                      <a:srgbClr val="F7F9F9"/>
+                    </a:solidFill>
+                  </a:tcPr>
+                </a:tc>
+                <a:tc>
+                  <a:txBody>
+                    <a:bodyPr/>
+                    <a:lstStyle/>
+                    <a:p>
+                      <a:r>
+                        <a:rPr sz="1300" b="0">
+                          <a:solidFill>
+                            <a:srgbClr val="333333"/>
+                          </a:solidFill>
+                          <a:latin typeface="Tahoma"/>
+                        </a:rPr>
+                        <a:t>nominal ค่าเยอะมาก (หลักร้อย–พัน)</a:t>
+                      </a:r>
+                    </a:p>
+                  </a:txBody>
+                  <a:tcPr marT="45720" marB="45720" anchor="ctr">
+                    <a:solidFill>
+                      <a:srgbClr val="F7F9F9"/>
+                    </a:solidFill>
+                  </a:tcPr>
+                </a:tc>
+                <a:tc>
+                  <a:txBody>
+                    <a:bodyPr/>
+                    <a:lstStyle/>
+                    <a:p>
+                      <a:r>
+                        <a:rPr sz="1300" b="0">
+                          <a:solidFill>
+                            <a:srgbClr val="333333"/>
+                          </a:solidFill>
+                          <a:latin typeface="Tahoma"/>
+                        </a:rPr>
+                        <a:t>เสี่ยง leakage ต้อง cross-fit</a:t>
+                      </a:r>
+                    </a:p>
+                  </a:txBody>
+                  <a:tcPr marT="45720" marB="45720" anchor="ctr">
+                    <a:solidFill>
+                      <a:srgbClr val="F7F9F9"/>
+                    </a:solidFill>
+                  </a:tcPr>
+                </a:tc>
+              </a:tr>
+              <a:tr h="400000">
+                <a:tc>
+                  <a:txBody>
+                    <a:bodyPr/>
+                    <a:lstStyle/>
+                    <a:p>
+                      <a:r>
+                        <a:rPr sz="1300" b="1">
+                          <a:solidFill>
+                            <a:srgbClr val="333333"/>
+                          </a:solidFill>
+                          <a:latin typeface="Tahoma"/>
+                        </a:rPr>
+                        <a:t>Frequency / Hashing</a:t>
+                      </a:r>
+                    </a:p>
+                  </a:txBody>
+                  <a:tcPr marT="45720" marB="45720" anchor="ctr">
+                    <a:solidFill>
+                      <a:srgbClr val="FFFFFF"/>
+                    </a:solidFill>
+                  </a:tcPr>
+                </a:tc>
+                <a:tc>
+                  <a:txBody>
+                    <a:bodyPr/>
+                    <a:lstStyle/>
+                    <a:p>
+                      <a:r>
+                        <a:rPr sz="1300" b="0">
+                          <a:solidFill>
+                            <a:srgbClr val="333333"/>
+                          </a:solidFill>
+                          <a:latin typeface="Tahoma"/>
+                        </a:rPr>
+                        <a:t>แทนด้วยความถี่ / hash</a:t>
+                      </a:r>
+                    </a:p>
+                  </a:txBody>
+                  <a:tcPr marT="45720" marB="45720" anchor="ctr">
+                    <a:solidFill>
+                      <a:srgbClr val="FFFFFF"/>
+                    </a:solidFill>
+                  </a:tcPr>
+                </a:tc>
+                <a:tc>
+                  <a:txBody>
+                    <a:bodyPr/>
+                    <a:lstStyle/>
+                    <a:p>
+                      <a:r>
+                        <a:rPr sz="1300" b="0">
+                          <a:solidFill>
+                            <a:srgbClr val="333333"/>
+                          </a:solidFill>
+                          <a:latin typeface="Tahoma"/>
+                        </a:rPr>
+                        <a:t>ค่าเยอะมาก, มีค่าใหม่ตลอด</a:t>
+                      </a:r>
+                    </a:p>
+                  </a:txBody>
+                  <a:tcPr marT="45720" marB="45720" anchor="ctr">
+                    <a:solidFill>
+                      <a:srgbClr val="FFFFFF"/>
+                    </a:solidFill>
+                  </a:tcPr>
+                </a:tc>
+                <a:tc>
+                  <a:txBody>
+                    <a:bodyPr/>
+                    <a:lstStyle/>
+                    <a:p>
+                      <a:r>
+                        <a:rPr sz="1300" b="0">
+                          <a:solidFill>
+                            <a:srgbClr val="333333"/>
+                          </a:solidFill>
+                          <a:latin typeface="Tahoma"/>
+                        </a:rPr>
+                        <a:t>ค่าชนกัน ตีความยาก</a:t>
+                      </a:r>
+                    </a:p>
+                  </a:txBody>
+                  <a:tcPr marT="45720" marB="45720" anchor="ctr">
+                    <a:solidFill>
+                      <a:srgbClr val="FFFFFF"/>
+                    </a:solidFill>
+                  </a:tcPr>
+                </a:tc>
+              </a:tr>
+              <a:tr h="400000">
+                <a:tc>
+                  <a:txBody>
+                    <a:bodyPr/>
+                    <a:lstStyle/>
+                    <a:p>
+                      <a:r>
+                        <a:rPr sz="1300" b="1">
+                          <a:solidFill>
+                            <a:srgbClr val="333333"/>
+                          </a:solidFill>
+                          <a:latin typeface="Tahoma"/>
+                        </a:rPr>
+                        <a:t>Cyclical (sin/cos)</a:t>
+                      </a:r>
+                    </a:p>
+                  </a:txBody>
+                  <a:tcPr marT="45720" marB="45720" anchor="ctr">
+                    <a:solidFill>
+                      <a:srgbClr val="F7F9F9"/>
+                    </a:solidFill>
+                  </a:tcPr>
+                </a:tc>
+                <a:tc>
+                  <a:txBody>
+                    <a:bodyPr/>
+                    <a:lstStyle/>
+                    <a:p>
+                      <a:r>
+                        <a:rPr sz="1300" b="0">
+                          <a:solidFill>
+                            <a:srgbClr val="333333"/>
+                          </a:solidFill>
+                          <a:latin typeface="Tahoma"/>
+                        </a:rPr>
+                        <a:t>แปลงค่าวนรอบเป็นวงกลม</a:t>
+                      </a:r>
+                    </a:p>
+                  </a:txBody>
+                  <a:tcPr marT="45720" marB="45720" anchor="ctr">
+                    <a:solidFill>
+                      <a:srgbClr val="F7F9F9"/>
+                    </a:solidFill>
+                  </a:tcPr>
+                </a:tc>
+                <a:tc>
+                  <a:txBody>
+                    <a:bodyPr/>
+                    <a:lstStyle/>
+                    <a:p>
+                      <a:r>
+                        <a:rPr sz="1300" b="0">
+                          <a:solidFill>
+                            <a:srgbClr val="333333"/>
+                          </a:solidFill>
+                          <a:latin typeface="Tahoma"/>
+                        </a:rPr>
+                        <a:t>เดือน, วันในสัปดาห์, ชั่วโมง</a:t>
+                      </a:r>
+                    </a:p>
+                  </a:txBody>
+                  <a:tcPr marT="45720" marB="45720" anchor="ctr">
+                    <a:solidFill>
+                      <a:srgbClr val="F7F9F9"/>
+                    </a:solidFill>
+                  </a:tcPr>
+                </a:tc>
+                <a:tc>
+                  <a:txBody>
+                    <a:bodyPr/>
+                    <a:lstStyle/>
+                    <a:p>
+                      <a:r>
+                        <a:rPr sz="1300" b="0">
+                          <a:solidFill>
+                            <a:srgbClr val="333333"/>
+                          </a:solidFill>
+                          <a:latin typeface="Tahoma"/>
+                        </a:rPr>
+                        <a:t>ใช้กับค่าวนรอบเท่านั้น</a:t>
+                      </a:r>
+                    </a:p>
+                  </a:txBody>
+                  <a:tcPr marT="45720" marB="45720" anchor="ctr">
+                    <a:solidFill>
+                      <a:srgbClr val="F7F9F9"/>
+                    </a:solidFill>
+                  </a:tcPr>
+                </a:tc>
+              </a:tr>
+            </a:tbl>
+          </a:graphicData>
+        </a:graphic>
+      </p:graphicFrame>
+      <p:sp>
+        <p:nvSpPr>
+          <p:cNvPr id="9" name="Rounded Rectangle 8"/>
+          <p:cNvSpPr/>
+          <p:nvPr/>
+        </p:nvSpPr>
+        <p:spPr>
+          <a:xfrm>
+            <a:off x="548640" y="4480560"/>
+            <a:ext cx="11064240" cy="1508760"/>
+          </a:xfrm>
+          <a:prstGeom prst="roundRect">
+            <a:avLst>
+              <a:gd name="adj" fmla="val 8000"/>
+            </a:avLst>
+          </a:prstGeom>
+          <a:solidFill>
+            <a:srgbClr val="F7F9F9"/>
+          </a:solidFill>
+          <a:ln w="12700">
+            <a:solidFill>
+              <a:srgbClr val="009E73"/>
+            </a:solidFill>
+          </a:ln>
+          <a:effectLst/>
+        </p:spPr>
+        <p:style>
+          <a:lnRef idx="1">
+            <a:schemeClr val="accent1"/>
+          </a:lnRef>
+          <a:fillRef idx="3">
+            <a:schemeClr val="accent1"/>
+          </a:fillRef>
+          <a:effectRef idx="2">
+            <a:schemeClr val="accent1"/>
+          </a:effectRef>
+          <a:fontRef idx="minor">
+            <a:schemeClr val="lt1"/>
+          </a:fontRef>
+        </p:style>
+        <p:txBody>
+          <a:bodyPr rtlCol="0" anchor="ctr" wrap="square" lIns="228600" rIns="228600"/>
+          <a:lstStyle/>
+          <a:p>
+            <a:pPr algn="ctr"/>
+            <a:r>
+              <a:rPr sz="1400" b="1">
+                <a:solidFill>
+                  <a:srgbClr val="333333"/>
+                </a:solidFill>
+                <a:latin typeface="Tahoma"/>
+              </a:rPr>
+              <a:t>ถาม 2 ข้อก่อนเลือก: หมวดมีลำดับไหม (ordinal / nominal) และมีกี่ค่า (cardinality)</a:t>
+            </a:r>
+          </a:p>
+          <a:p>
+            <a:pPr>
+              <a:spcBef>
+                <a:spcPts val="300"/>
+              </a:spcBef>
+            </a:pPr>
+            <a:r>
+              <a:rPr sz="1300" b="0">
+                <a:solidFill>
+                  <a:srgbClr val="333333"/>
+                </a:solidFill>
+                <a:latin typeface="Tahoma"/>
+              </a:rPr>
+              <a:t>▸ โมเดลเชิงเส้น/KNN/SVM: nominal ใช้ One-Hot  ·  โมเดลต้นไม้: Ordinal ก็มักพอ</a:t>
+            </a:r>
+          </a:p>
+          <a:p>
+            <a:pPr>
+              <a:spcBef>
+                <a:spcPts val="300"/>
+              </a:spcBef>
+            </a:pPr>
+            <a:r>
+              <a:rPr sz="1300" b="0">
+                <a:solidFill>
+                  <a:srgbClr val="333333"/>
+                </a:solidFill>
+                <a:latin typeface="Tahoma"/>
+              </a:rPr>
+              <a:t>▸ โปรเจกต์นี้: categorical 9 ตัวมีค่าไม่มาก → One-Hot ทั้งหมด (handle_unknown="ignore"), เก็บ "unknown" เป็นหมวดหนึ่ง</a:t>
+            </a:r>
+          </a:p>
+        </p:txBody>
+      </p:sp>
+    </p:spTree>
+  </p:cSld>
+  <p:clrMapOvr>
+    <a:masterClrMapping/>
+  </p:clrMapOvr>
+</p:sld>
+</file>
+
+<file path=ppt/slides/slide21.xml><?xml version="1.0" encoding="utf-8"?>
+<p:sld xmlns:a="http://schemas.openxmlformats.org/drawingml/2006/main" xmlns:p="http://schemas.openxmlformats.org/presentationml/2006/main" xmlns:r="http://schemas.openxmlformats.org/officeDocument/2006/relationships">
+  <p:cSld>
+    <p:spTree>
+      <p:nvGrpSpPr>
+        <p:cNvPr id="1" name=""/>
+        <p:cNvGrpSpPr/>
+        <p:nvPr/>
+      </p:nvGrpSpPr>
+      <p:grpSpPr/>
+      <p:sp>
+        <p:nvSpPr>
+          <p:cNvPr id="2" name="Rectangle 1"/>
+          <p:cNvSpPr/>
+          <p:nvPr/>
+        </p:nvSpPr>
+        <p:spPr>
+          <a:xfrm>
+            <a:off x="0" y="0"/>
+            <a:ext cx="12191695" cy="6858000"/>
+          </a:xfrm>
+          <a:prstGeom prst="rect">
+            <a:avLst/>
+          </a:prstGeom>
+          <a:solidFill>
+            <a:srgbClr val="FFFFFF"/>
+          </a:solidFill>
+          <a:ln>
+            <a:noFill/>
+          </a:ln>
+          <a:effectLst/>
+        </p:spPr>
+        <p:style>
+          <a:lnRef idx="1">
+            <a:schemeClr val="accent1"/>
+          </a:lnRef>
+          <a:fillRef idx="3">
+            <a:schemeClr val="accent1"/>
+          </a:fillRef>
+          <a:effectRef idx="2">
+            <a:schemeClr val="accent1"/>
+          </a:effectRef>
+          <a:fontRef idx="minor">
+            <a:schemeClr val="lt1"/>
+          </a:fontRef>
+        </p:style>
+        <p:txBody>
+          <a:bodyPr rtlCol="0" anchor="ctr"/>
+          <a:lstStyle/>
+          <a:p>
+            <a:pPr algn="ctr"/>
+          </a:p>
+        </p:txBody>
+      </p:sp>
+      <p:sp>
+        <p:nvSpPr>
+          <p:cNvPr id="3" name="TextBox 2"/>
+          <p:cNvSpPr txBox="1"/>
+          <p:nvPr/>
+        </p:nvSpPr>
+        <p:spPr>
+          <a:xfrm>
+            <a:off x="548640" y="137160"/>
+            <a:ext cx="7315200" cy="320040"/>
+          </a:xfrm>
+          <a:prstGeom prst="rect">
+            <a:avLst/>
+          </a:prstGeom>
+          <a:noFill/>
+        </p:spPr>
+        <p:txBody>
+          <a:bodyPr wrap="none">
+            <a:spAutoFit/>
+          </a:bodyPr>
+          <a:lstStyle/>
+          <a:p>
+            <a:r>
+              <a:rPr sz="1300" b="1">
+                <a:solidFill>
+                  <a:srgbClr val="009E73"/>
+                </a:solidFill>
+                <a:latin typeface="Tahoma"/>
+              </a:rPr>
+              <a:t>APPENDIX E — EVALUATION</a:t>
+            </a:r>
+          </a:p>
+        </p:txBody>
+      </p:sp>
+      <p:sp>
+        <p:nvSpPr>
+          <p:cNvPr id="4" name="TextBox 3"/>
+          <p:cNvSpPr txBox="1"/>
+          <p:nvPr/>
+        </p:nvSpPr>
+        <p:spPr>
+          <a:xfrm>
+            <a:off x="548640" y="411480"/>
+            <a:ext cx="11094415" cy="822960"/>
+          </a:xfrm>
+          <a:prstGeom prst="rect">
+            <a:avLst/>
+          </a:prstGeom>
+          <a:noFill/>
+        </p:spPr>
+        <p:txBody>
+          <a:bodyPr wrap="square">
+            <a:spAutoFit/>
+          </a:bodyPr>
+          <a:lstStyle/>
+          <a:p>
+            <a:r>
+              <a:rPr sz="3200" b="1">
+                <a:solidFill>
+                  <a:srgbClr val="333333"/>
+                </a:solidFill>
+                <a:latin typeface="Tahoma"/>
+              </a:rPr>
+              <a:t>Confusion Matrix → Precision / Recall / F1</a:t>
+            </a:r>
+          </a:p>
+        </p:txBody>
+      </p:sp>
+      <p:sp>
+        <p:nvSpPr>
+          <p:cNvPr id="5" name="Rectangle 4"/>
+          <p:cNvSpPr/>
+          <p:nvPr/>
+        </p:nvSpPr>
+        <p:spPr>
+          <a:xfrm>
+            <a:off x="548640" y="1143000"/>
+            <a:ext cx="1828800" cy="50800"/>
+          </a:xfrm>
+          <a:prstGeom prst="rect">
+            <a:avLst/>
+          </a:prstGeom>
+          <a:solidFill>
+            <a:srgbClr val="009E73"/>
+          </a:solidFill>
+          <a:ln>
+            <a:noFill/>
+          </a:ln>
+          <a:effectLst/>
+        </p:spPr>
+        <p:style>
+          <a:lnRef idx="1">
+            <a:schemeClr val="accent1"/>
+          </a:lnRef>
+          <a:fillRef idx="3">
+            <a:schemeClr val="accent1"/>
+          </a:fillRef>
+          <a:effectRef idx="2">
+            <a:schemeClr val="accent1"/>
+          </a:effectRef>
+          <a:fontRef idx="minor">
+            <a:schemeClr val="lt1"/>
+          </a:fontRef>
+        </p:style>
+        <p:txBody>
+          <a:bodyPr rtlCol="0" anchor="ctr"/>
+          <a:lstStyle/>
+          <a:p>
+            <a:pPr algn="ctr"/>
+          </a:p>
+        </p:txBody>
+      </p:sp>
+      <p:sp>
+        <p:nvSpPr>
+          <p:cNvPr id="6" name="TextBox 5"/>
+          <p:cNvSpPr txBox="1"/>
+          <p:nvPr/>
+        </p:nvSpPr>
+        <p:spPr>
+          <a:xfrm>
+            <a:off x="11002975" y="6446520"/>
+            <a:ext cx="914400" cy="274320"/>
+          </a:xfrm>
+          <a:prstGeom prst="rect">
+            <a:avLst/>
+          </a:prstGeom>
+          <a:noFill/>
+        </p:spPr>
+        <p:txBody>
+          <a:bodyPr wrap="none">
+            <a:spAutoFit/>
+          </a:bodyPr>
+          <a:lstStyle/>
+          <a:p>
+            <a:pPr algn="r"/>
+            <a:r>
+              <a:rPr sz="1100" b="0">
+                <a:solidFill>
+                  <a:srgbClr val="666666"/>
+                </a:solidFill>
+              </a:rPr>
+              <a:t>18 / 22</a:t>
+            </a:r>
+          </a:p>
+        </p:txBody>
+      </p:sp>
+      <p:sp>
+        <p:nvSpPr>
+          <p:cNvPr id="7" name="TextBox 6"/>
+          <p:cNvSpPr txBox="1"/>
+          <p:nvPr/>
+        </p:nvSpPr>
+        <p:spPr>
+          <a:xfrm>
+            <a:off x="548640" y="6446520"/>
+            <a:ext cx="4572000" cy="274320"/>
+          </a:xfrm>
+          <a:prstGeom prst="rect">
+            <a:avLst/>
+          </a:prstGeom>
+          <a:noFill/>
+        </p:spPr>
+        <p:txBody>
+          <a:bodyPr wrap="none">
+            <a:spAutoFit/>
+          </a:bodyPr>
+          <a:lstStyle/>
+          <a:p>
+            <a:r>
+              <a:rPr sz="1100" b="0">
+                <a:solidFill>
+                  <a:srgbClr val="666666"/>
+                </a:solidFill>
+              </a:rPr>
+              <a:t>Bank Marketing — Term Deposit Prediction</a:t>
+            </a:r>
+          </a:p>
+        </p:txBody>
+      </p:sp>
+      <p:sp>
+        <p:nvSpPr>
+          <p:cNvPr id="8" name="Rounded Rectangle 7"/>
+          <p:cNvSpPr/>
+          <p:nvPr/>
+        </p:nvSpPr>
+        <p:spPr>
+          <a:xfrm>
+            <a:off x="1737360" y="1783080"/>
+            <a:ext cx="1554480" cy="1005840"/>
+          </a:xfrm>
+          <a:prstGeom prst="roundRect">
+            <a:avLst/>
+          </a:prstGeom>
+          <a:solidFill>
+            <a:srgbClr val="009E73"/>
+          </a:solidFill>
+          <a:ln>
+            <a:noFill/>
+          </a:ln>
+          <a:effectLst/>
+        </p:spPr>
+        <p:style>
+          <a:lnRef idx="1">
+            <a:schemeClr val="accent1"/>
+          </a:lnRef>
+          <a:fillRef idx="3">
+            <a:schemeClr val="accent1"/>
+          </a:fillRef>
+          <a:effectRef idx="2">
+            <a:schemeClr val="accent1"/>
+          </a:effectRef>
+          <a:fontRef idx="minor">
+            <a:schemeClr val="lt1"/>
+          </a:fontRef>
+        </p:style>
+        <p:txBody>
+          <a:bodyPr rtlCol="0" anchor="ctr"/>
+          <a:lstStyle/>
+          <a:p>
+            <a:pPr algn="ctr"/>
+            <a:r>
+              <a:rPr sz="2400" b="1">
+                <a:solidFill>
+                  <a:srgbClr val="FFFFFF"/>
+                </a:solidFill>
+                <a:latin typeface="Tahoma"/>
+              </a:rPr>
+              <a:t>TN</a:t>
+            </a:r>
+          </a:p>
+          <a:p>
+            <a:pPr algn="ctr"/>
+            <a:r>
+              <a:rPr sz="1200" b="0">
+                <a:solidFill>
+                  <a:srgbClr val="FFFFFF"/>
+                </a:solidFill>
+                <a:latin typeface="Tahoma"/>
+              </a:rPr>
+              <a:t>ทายถูกว่าไม่ฝาก</a:t>
+            </a:r>
+          </a:p>
+        </p:txBody>
+      </p:sp>
+      <p:sp>
+        <p:nvSpPr>
+          <p:cNvPr id="9" name="Rounded Rectangle 8"/>
+          <p:cNvSpPr/>
+          <p:nvPr/>
+        </p:nvSpPr>
+        <p:spPr>
+          <a:xfrm>
+            <a:off x="3383280" y="1783080"/>
+            <a:ext cx="1554480" cy="1005840"/>
+          </a:xfrm>
+          <a:prstGeom prst="roundRect">
+            <a:avLst/>
+          </a:prstGeom>
+          <a:solidFill>
+            <a:srgbClr val="D55E00"/>
+          </a:solidFill>
+          <a:ln>
+            <a:noFill/>
+          </a:ln>
+          <a:effectLst/>
+        </p:spPr>
+        <p:style>
+          <a:lnRef idx="1">
+            <a:schemeClr val="accent1"/>
+          </a:lnRef>
+          <a:fillRef idx="3">
+            <a:schemeClr val="accent1"/>
+          </a:fillRef>
+          <a:effectRef idx="2">
+            <a:schemeClr val="accent1"/>
+          </a:effectRef>
+          <a:fontRef idx="minor">
+            <a:schemeClr val="lt1"/>
+          </a:fontRef>
+        </p:style>
+        <p:txBody>
+          <a:bodyPr rtlCol="0" anchor="ctr"/>
+          <a:lstStyle/>
+          <a:p>
+            <a:pPr algn="ctr"/>
+            <a:r>
+              <a:rPr sz="2400" b="1">
+                <a:solidFill>
+                  <a:srgbClr val="FFFFFF"/>
+                </a:solidFill>
+                <a:latin typeface="Tahoma"/>
+              </a:rPr>
+              <a:t>FP</a:t>
+            </a:r>
+          </a:p>
+          <a:p>
+            <a:pPr algn="ctr"/>
+            <a:r>
+              <a:rPr sz="1200" b="0">
+                <a:solidFill>
+                  <a:srgbClr val="FFFFFF"/>
+                </a:solidFill>
+                <a:latin typeface="Tahoma"/>
+              </a:rPr>
+              <a:t>โทรเสียเปล่า</a:t>
+            </a:r>
+          </a:p>
+        </p:txBody>
+      </p:sp>
+      <p:sp>
+        <p:nvSpPr>
+          <p:cNvPr id="10" name="Rounded Rectangle 9"/>
+          <p:cNvSpPr/>
+          <p:nvPr/>
+        </p:nvSpPr>
+        <p:spPr>
+          <a:xfrm>
+            <a:off x="1737360" y="2880360"/>
+            <a:ext cx="1554480" cy="1005840"/>
+          </a:xfrm>
+          <a:prstGeom prst="roundRect">
+            <a:avLst/>
+          </a:prstGeom>
+          <a:solidFill>
+            <a:srgbClr val="D55E00"/>
+          </a:solidFill>
+          <a:ln>
+            <a:noFill/>
+          </a:ln>
+          <a:effectLst/>
+        </p:spPr>
+        <p:style>
+          <a:lnRef idx="1">
+            <a:schemeClr val="accent1"/>
+          </a:lnRef>
+          <a:fillRef idx="3">
+            <a:schemeClr val="accent1"/>
+          </a:fillRef>
+          <a:effectRef idx="2">
+            <a:schemeClr val="accent1"/>
+          </a:effectRef>
+          <a:fontRef idx="minor">
+            <a:schemeClr val="lt1"/>
+          </a:fontRef>
+        </p:style>
+        <p:txBody>
+          <a:bodyPr rtlCol="0" anchor="ctr"/>
+          <a:lstStyle/>
+          <a:p>
+            <a:pPr algn="ctr"/>
+            <a:r>
+              <a:rPr sz="2400" b="1">
+                <a:solidFill>
+                  <a:srgbClr val="FFFFFF"/>
+                </a:solidFill>
+                <a:latin typeface="Tahoma"/>
+              </a:rPr>
+              <a:t>FN</a:t>
+            </a:r>
+          </a:p>
+          <a:p>
+            <a:pPr algn="ctr"/>
+            <a:r>
+              <a:rPr sz="1200" b="0">
+                <a:solidFill>
+                  <a:srgbClr val="FFFFFF"/>
+                </a:solidFill>
+                <a:latin typeface="Tahoma"/>
+              </a:rPr>
+              <a:t>พลาดลูกค้า</a:t>
+            </a:r>
+          </a:p>
+        </p:txBody>
+      </p:sp>
+      <p:sp>
+        <p:nvSpPr>
+          <p:cNvPr id="11" name="Rounded Rectangle 10"/>
+          <p:cNvSpPr/>
+          <p:nvPr/>
+        </p:nvSpPr>
+        <p:spPr>
+          <a:xfrm>
+            <a:off x="3383280" y="2880360"/>
+            <a:ext cx="1554480" cy="1005840"/>
+          </a:xfrm>
+          <a:prstGeom prst="roundRect">
+            <a:avLst/>
+          </a:prstGeom>
+          <a:solidFill>
+            <a:srgbClr val="009E73"/>
+          </a:solidFill>
+          <a:ln>
+            <a:noFill/>
+          </a:ln>
+          <a:effectLst/>
+        </p:spPr>
+        <p:style>
+          <a:lnRef idx="1">
+            <a:schemeClr val="accent1"/>
+          </a:lnRef>
+          <a:fillRef idx="3">
+            <a:schemeClr val="accent1"/>
+          </a:fillRef>
+          <a:effectRef idx="2">
+            <a:schemeClr val="accent1"/>
+          </a:effectRef>
+          <a:fontRef idx="minor">
+            <a:schemeClr val="lt1"/>
+          </a:fontRef>
+        </p:style>
+        <p:txBody>
+          <a:bodyPr rtlCol="0" anchor="ctr"/>
+          <a:lstStyle/>
+          <a:p>
+            <a:pPr algn="ctr"/>
+            <a:r>
+              <a:rPr sz="2400" b="1">
+                <a:solidFill>
+                  <a:srgbClr val="FFFFFF"/>
+                </a:solidFill>
+                <a:latin typeface="Tahoma"/>
+              </a:rPr>
+              <a:t>TP</a:t>
+            </a:r>
+          </a:p>
+          <a:p>
+            <a:pPr algn="ctr"/>
+            <a:r>
+              <a:rPr sz="1200" b="0">
+                <a:solidFill>
+                  <a:srgbClr val="FFFFFF"/>
+                </a:solidFill>
+                <a:latin typeface="Tahoma"/>
+              </a:rPr>
+              <a:t>ทายถูกว่าฝาก</a:t>
+            </a:r>
+          </a:p>
+        </p:txBody>
+      </p:sp>
+      <p:sp>
+        <p:nvSpPr>
+          <p:cNvPr id="12" name="TextBox 11"/>
+          <p:cNvSpPr txBox="1"/>
+          <p:nvPr/>
+        </p:nvSpPr>
+        <p:spPr>
+          <a:xfrm>
+            <a:off x="1737360" y="1417320"/>
+            <a:ext cx="1554480" cy="320040"/>
+          </a:xfrm>
+          <a:prstGeom prst="rect">
+            <a:avLst/>
+          </a:prstGeom>
+          <a:noFill/>
+        </p:spPr>
+        <p:txBody>
+          <a:bodyPr wrap="square">
+            <a:spAutoFit/>
+          </a:bodyPr>
+          <a:lstStyle/>
+          <a:p>
+            <a:pPr algn="ctr"/>
+            <a:r>
+              <a:rPr sz="1300" b="1">
+                <a:solidFill>
+                  <a:srgbClr val="666666"/>
+                </a:solidFill>
+                <a:latin typeface="Tahoma"/>
+              </a:rPr>
+              <a:t>ทาย no</a:t>
+            </a:r>
+          </a:p>
+        </p:txBody>
+      </p:sp>
+      <p:sp>
+        <p:nvSpPr>
+          <p:cNvPr id="13" name="TextBox 12"/>
+          <p:cNvSpPr txBox="1"/>
+          <p:nvPr/>
+        </p:nvSpPr>
+        <p:spPr>
+          <a:xfrm>
+            <a:off x="3383280" y="1417320"/>
+            <a:ext cx="1554480" cy="320040"/>
+          </a:xfrm>
+          <a:prstGeom prst="rect">
+            <a:avLst/>
+          </a:prstGeom>
+          <a:noFill/>
+        </p:spPr>
+        <p:txBody>
+          <a:bodyPr wrap="square">
+            <a:spAutoFit/>
+          </a:bodyPr>
+          <a:lstStyle/>
+          <a:p>
+            <a:pPr algn="ctr"/>
+            <a:r>
+              <a:rPr sz="1300" b="1">
+                <a:solidFill>
+                  <a:srgbClr val="666666"/>
+                </a:solidFill>
+                <a:latin typeface="Tahoma"/>
+              </a:rPr>
+              <a:t>ทาย yes</a:t>
+            </a:r>
+          </a:p>
+        </p:txBody>
+      </p:sp>
+      <p:sp>
+        <p:nvSpPr>
+          <p:cNvPr id="14" name="TextBox 13"/>
+          <p:cNvSpPr txBox="1"/>
+          <p:nvPr/>
+        </p:nvSpPr>
+        <p:spPr>
+          <a:xfrm>
+            <a:off x="548640" y="2103120"/>
+            <a:ext cx="1143000" cy="365760"/>
+          </a:xfrm>
+          <a:prstGeom prst="rect">
+            <a:avLst/>
+          </a:prstGeom>
+          <a:noFill/>
+        </p:spPr>
+        <p:txBody>
+          <a:bodyPr wrap="square">
+            <a:spAutoFit/>
+          </a:bodyPr>
+          <a:lstStyle/>
+          <a:p>
+            <a:pPr algn="r"/>
+            <a:r>
+              <a:rPr sz="1300" b="1">
+                <a:solidFill>
+                  <a:srgbClr val="666666"/>
+                </a:solidFill>
+                <a:latin typeface="Tahoma"/>
+              </a:rPr>
+              <a:t>จริง no</a:t>
+            </a:r>
+          </a:p>
+        </p:txBody>
+      </p:sp>
+      <p:sp>
+        <p:nvSpPr>
+          <p:cNvPr id="15" name="TextBox 14"/>
+          <p:cNvSpPr txBox="1"/>
+          <p:nvPr/>
+        </p:nvSpPr>
+        <p:spPr>
+          <a:xfrm>
+            <a:off x="548640" y="3200400"/>
+            <a:ext cx="1143000" cy="365760"/>
+          </a:xfrm>
+          <a:prstGeom prst="rect">
+            <a:avLst/>
+          </a:prstGeom>
+          <a:noFill/>
+        </p:spPr>
+        <p:txBody>
+          <a:bodyPr wrap="square">
+            <a:spAutoFit/>
+          </a:bodyPr>
+          <a:lstStyle/>
+          <a:p>
+            <a:pPr algn="r"/>
+            <a:r>
+              <a:rPr sz="1300" b="1">
+                <a:solidFill>
+                  <a:srgbClr val="666666"/>
+                </a:solidFill>
+                <a:latin typeface="Tahoma"/>
+              </a:rPr>
+              <a:t>จริง yes</a:t>
+            </a:r>
+          </a:p>
+        </p:txBody>
+      </p:sp>
+      <p:sp>
+        <p:nvSpPr>
+          <p:cNvPr id="16" name="TextBox 15"/>
+          <p:cNvSpPr txBox="1"/>
+          <p:nvPr/>
+        </p:nvSpPr>
+        <p:spPr>
+          <a:xfrm>
+            <a:off x="548640" y="4114800"/>
+            <a:ext cx="4480560" cy="548640"/>
+          </a:xfrm>
+          <a:prstGeom prst="rect">
+            <a:avLst/>
+          </a:prstGeom>
+          <a:noFill/>
+        </p:spPr>
+        <p:txBody>
+          <a:bodyPr wrap="square">
+            <a:spAutoFit/>
+          </a:bodyPr>
+          <a:lstStyle/>
+          <a:p>
+            <a:r>
+              <a:rPr sz="1200" b="0">
+                <a:solidFill>
+                  <a:srgbClr val="333333"/>
+                </a:solidFill>
+                <a:latin typeface="Tahoma"/>
+              </a:rPr>
+              <a:t>Test set @ threshold 0.5: FN ≈ 2,600 จาก 2,856 คนที่ฝากจริง → recall (yes) แค่ 8%</a:t>
+            </a:r>
+          </a:p>
+        </p:txBody>
+      </p:sp>
+      <p:graphicFrame>
+        <p:nvGraphicFramePr>
+          <p:cNvPr id="17" name="Table 16"/>
+          <p:cNvGraphicFramePr>
+            <a:graphicFrameLocks noGrp="1"/>
+          </p:cNvGraphicFramePr>
+          <p:nvPr/>
+        </p:nvGraphicFramePr>
+        <p:xfrm>
+          <a:off x="5577840" y="1417320"/>
+          <a:ext cx="6035039" cy="2800000"/>
+        </p:xfrm>
+        <a:graphic>
+          <a:graphicData uri="http://schemas.openxmlformats.org/drawingml/2006/table">
+            <a:tbl>
+              <a:tblPr firstRow="1" bandRow="1">
+                <a:tableStyleId>{5C22544A-7EE6-4342-B048-85BDC9FD1C3A}</a:tableStyleId>
+              </a:tblPr>
+              <a:tblGrid>
+                <a:gridCol w="1609344"/>
+                <a:gridCol w="2112264"/>
+                <a:gridCol w="2313431"/>
+              </a:tblGrid>
+              <a:tr h="400000">
+                <a:tc>
+                  <a:txBody>
+                    <a:bodyPr/>
+                    <a:lstStyle/>
+                    <a:p>
+                      <a:pPr algn="ctr"/>
+                      <a:r>
+                        <a:rPr sz="1200" b="1">
+                          <a:solidFill>
+                            <a:srgbClr val="FFFFFF"/>
+                          </a:solidFill>
+                          <a:latin typeface="Tahoma"/>
+                        </a:rPr>
+                        <a:t>ตัวชี้วัด</a:t>
+                      </a:r>
+                    </a:p>
+                  </a:txBody>
+                  <a:tcPr marT="45720" marB="45720" anchor="ctr">
+                    <a:solidFill>
+                      <a:srgbClr val="009E73"/>
+                    </a:solidFill>
+                  </a:tcPr>
+                </a:tc>
+                <a:tc>
+                  <a:txBody>
+                    <a:bodyPr/>
+                    <a:lstStyle/>
+                    <a:p>
+                      <a:pPr algn="ctr"/>
+                      <a:r>
+                        <a:rPr sz="1200" b="1">
+                          <a:solidFill>
+                            <a:srgbClr val="FFFFFF"/>
+                          </a:solidFill>
+                          <a:latin typeface="Tahoma"/>
+                        </a:rPr>
+                        <a:t>ตอบคำถาม</a:t>
+                      </a:r>
+                    </a:p>
+                  </a:txBody>
+                  <a:tcPr marT="45720" marB="45720" anchor="ctr">
+                    <a:solidFill>
+                      <a:srgbClr val="009E73"/>
+                    </a:solidFill>
+                  </a:tcPr>
+                </a:tc>
+                <a:tc>
+                  <a:txBody>
+                    <a:bodyPr/>
+                    <a:lstStyle/>
+                    <a:p>
+                      <a:pPr algn="ctr"/>
+                      <a:r>
+                        <a:rPr sz="1200" b="1">
+                          <a:solidFill>
+                            <a:srgbClr val="FFFFFF"/>
+                          </a:solidFill>
+                          <a:latin typeface="Tahoma"/>
+                        </a:rPr>
+                        <a:t>เน้นเมื่อ</a:t>
+                      </a:r>
+                    </a:p>
+                  </a:txBody>
+                  <a:tcPr marT="45720" marB="45720" anchor="ctr">
+                    <a:solidFill>
+                      <a:srgbClr val="009E73"/>
+                    </a:solidFill>
+                  </a:tcPr>
+                </a:tc>
+              </a:tr>
+              <a:tr h="400000">
+                <a:tc>
+                  <a:txBody>
+                    <a:bodyPr/>
+                    <a:lstStyle/>
+                    <a:p>
+                      <a:r>
+                        <a:rPr sz="1200" b="1">
+                          <a:solidFill>
+                            <a:srgbClr val="333333"/>
+                          </a:solidFill>
+                          <a:latin typeface="Tahoma"/>
+                        </a:rPr>
+                        <a:t>Precision</a:t>
+                      </a:r>
+                    </a:p>
+                  </a:txBody>
+                  <a:tcPr marT="45720" marB="45720" anchor="ctr">
+                    <a:solidFill>
+                      <a:srgbClr val="FFFFFF"/>
+                    </a:solidFill>
+                  </a:tcPr>
+                </a:tc>
+                <a:tc>
+                  <a:txBody>
+                    <a:bodyPr/>
+                    <a:lstStyle/>
+                    <a:p>
+                      <a:r>
+                        <a:rPr sz="1200" b="0">
+                          <a:solidFill>
+                            <a:srgbClr val="333333"/>
+                          </a:solidFill>
+                          <a:latin typeface="Tahoma"/>
+                        </a:rPr>
+                        <a:t>ทาย yes ถูกกี่ %</a:t>
+                      </a:r>
+                    </a:p>
+                  </a:txBody>
+                  <a:tcPr marT="45720" marB="45720" anchor="ctr">
+                    <a:solidFill>
+                      <a:srgbClr val="FFFFFF"/>
+                    </a:solidFill>
+                  </a:tcPr>
+                </a:tc>
+                <a:tc>
+                  <a:txBody>
+                    <a:bodyPr/>
+                    <a:lstStyle/>
+                    <a:p>
+                      <a:r>
+                        <a:rPr sz="1200" b="0">
+                          <a:solidFill>
+                            <a:srgbClr val="333333"/>
+                          </a:solidFill>
+                          <a:latin typeface="Tahoma"/>
+                        </a:rPr>
+                        <a:t>FP แพง (spam, โทรแพง)</a:t>
+                      </a:r>
+                    </a:p>
+                  </a:txBody>
+                  <a:tcPr marT="45720" marB="45720" anchor="ctr">
+                    <a:solidFill>
+                      <a:srgbClr val="FFFFFF"/>
+                    </a:solidFill>
+                  </a:tcPr>
+                </a:tc>
+              </a:tr>
+              <a:tr h="400000">
+                <a:tc>
+                  <a:txBody>
+                    <a:bodyPr/>
+                    <a:lstStyle/>
+                    <a:p>
+                      <a:r>
+                        <a:rPr sz="1200" b="1">
+                          <a:solidFill>
+                            <a:srgbClr val="333333"/>
+                          </a:solidFill>
+                          <a:latin typeface="Tahoma"/>
+                        </a:rPr>
+                        <a:t>Recall</a:t>
+                      </a:r>
+                    </a:p>
+                  </a:txBody>
+                  <a:tcPr marT="45720" marB="45720" anchor="ctr">
+                    <a:solidFill>
+                      <a:srgbClr val="F7F9F9"/>
+                    </a:solidFill>
+                  </a:tcPr>
+                </a:tc>
+                <a:tc>
+                  <a:txBody>
+                    <a:bodyPr/>
+                    <a:lstStyle/>
+                    <a:p>
+                      <a:r>
+                        <a:rPr sz="1200" b="0">
+                          <a:solidFill>
+                            <a:srgbClr val="333333"/>
+                          </a:solidFill>
+                          <a:latin typeface="Tahoma"/>
+                        </a:rPr>
+                        <a:t>yes จริงจับได้กี่ %</a:t>
+                      </a:r>
+                    </a:p>
+                  </a:txBody>
+                  <a:tcPr marT="45720" marB="45720" anchor="ctr">
+                    <a:solidFill>
+                      <a:srgbClr val="F7F9F9"/>
+                    </a:solidFill>
+                  </a:tcPr>
+                </a:tc>
+                <a:tc>
+                  <a:txBody>
+                    <a:bodyPr/>
+                    <a:lstStyle/>
+                    <a:p>
+                      <a:r>
+                        <a:rPr sz="1200" b="0">
+                          <a:solidFill>
+                            <a:srgbClr val="333333"/>
+                          </a:solidFill>
+                          <a:latin typeface="Tahoma"/>
+                        </a:rPr>
+                        <a:t>FN แพง (มะเร็ง, fraud)</a:t>
+                      </a:r>
+                    </a:p>
+                  </a:txBody>
+                  <a:tcPr marT="45720" marB="45720" anchor="ctr">
+                    <a:solidFill>
+                      <a:srgbClr val="F7F9F9"/>
+                    </a:solidFill>
+                  </a:tcPr>
+                </a:tc>
+              </a:tr>
+              <a:tr h="400000">
+                <a:tc>
+                  <a:txBody>
+                    <a:bodyPr/>
+                    <a:lstStyle/>
+                    <a:p>
+                      <a:r>
+                        <a:rPr sz="1200" b="1">
+                          <a:solidFill>
+                            <a:srgbClr val="333333"/>
+                          </a:solidFill>
+                          <a:latin typeface="Tahoma"/>
+                        </a:rPr>
+                        <a:t>F1</a:t>
+                      </a:r>
+                    </a:p>
+                  </a:txBody>
+                  <a:tcPr marT="45720" marB="45720" anchor="ctr">
+                    <a:solidFill>
+                      <a:srgbClr val="FFFFFF"/>
+                    </a:solidFill>
+                  </a:tcPr>
+                </a:tc>
+                <a:tc>
+                  <a:txBody>
+                    <a:bodyPr/>
+                    <a:lstStyle/>
+                    <a:p>
+                      <a:r>
+                        <a:rPr sz="1200" b="0">
+                          <a:solidFill>
+                            <a:srgbClr val="333333"/>
+                          </a:solidFill>
+                          <a:latin typeface="Tahoma"/>
+                        </a:rPr>
+                        <a:t>สมดุล P กับ R</a:t>
+                      </a:r>
+                    </a:p>
+                  </a:txBody>
+                  <a:tcPr marT="45720" marB="45720" anchor="ctr">
+                    <a:solidFill>
+                      <a:srgbClr val="FFFFFF"/>
+                    </a:solidFill>
+                  </a:tcPr>
+                </a:tc>
+                <a:tc>
+                  <a:txBody>
+                    <a:bodyPr/>
+                    <a:lstStyle/>
+                    <a:p>
+                      <a:r>
+                        <a:rPr sz="1200" b="0">
+                          <a:solidFill>
+                            <a:srgbClr val="333333"/>
+                          </a:solidFill>
+                          <a:latin typeface="Tahoma"/>
+                        </a:rPr>
+                        <a:t>ไม่สมดุล + สำคัญพอกัน</a:t>
+                      </a:r>
+                    </a:p>
+                  </a:txBody>
+                  <a:tcPr marT="45720" marB="45720" anchor="ctr">
+                    <a:solidFill>
+                      <a:srgbClr val="FFFFFF"/>
+                    </a:solidFill>
+                  </a:tcPr>
+                </a:tc>
+              </a:tr>
+              <a:tr h="400000">
+                <a:tc>
+                  <a:txBody>
+                    <a:bodyPr/>
+                    <a:lstStyle/>
+                    <a:p>
+                      <a:r>
+                        <a:rPr sz="1200" b="1">
+                          <a:solidFill>
+                            <a:srgbClr val="333333"/>
+                          </a:solidFill>
+                          <a:latin typeface="Tahoma"/>
+                        </a:rPr>
+                        <a:t>Accuracy</a:t>
+                      </a:r>
+                    </a:p>
+                  </a:txBody>
+                  <a:tcPr marT="45720" marB="45720" anchor="ctr">
+                    <a:solidFill>
+                      <a:srgbClr val="F7F9F9"/>
+                    </a:solidFill>
+                  </a:tcPr>
+                </a:tc>
+                <a:tc>
+                  <a:txBody>
+                    <a:bodyPr/>
+                    <a:lstStyle/>
+                    <a:p>
+                      <a:r>
+                        <a:rPr sz="1200" b="0">
+                          <a:solidFill>
+                            <a:srgbClr val="333333"/>
+                          </a:solidFill>
+                          <a:latin typeface="Tahoma"/>
+                        </a:rPr>
+                        <a:t>ทายถูกรวมกี่ %</a:t>
+                      </a:r>
+                    </a:p>
+                  </a:txBody>
+                  <a:tcPr marT="45720" marB="45720" anchor="ctr">
+                    <a:solidFill>
+                      <a:srgbClr val="F7F9F9"/>
+                    </a:solidFill>
+                  </a:tcPr>
+                </a:tc>
+                <a:tc>
+                  <a:txBody>
+                    <a:bodyPr/>
+                    <a:lstStyle/>
+                    <a:p>
+                      <a:r>
+                        <a:rPr sz="1200" b="0">
+                          <a:solidFill>
+                            <a:srgbClr val="333333"/>
+                          </a:solidFill>
+                          <a:latin typeface="Tahoma"/>
+                        </a:rPr>
+                        <a:t>ข้อมูลสมดุลเท่านั้น</a:t>
+                      </a:r>
+                    </a:p>
+                  </a:txBody>
+                  <a:tcPr marT="45720" marB="45720" anchor="ctr">
+                    <a:solidFill>
+                      <a:srgbClr val="F7F9F9"/>
+                    </a:solidFill>
+                  </a:tcPr>
+                </a:tc>
+              </a:tr>
+              <a:tr h="400000">
+                <a:tc>
+                  <a:txBody>
+                    <a:bodyPr/>
+                    <a:lstStyle/>
+                    <a:p>
+                      <a:r>
+                        <a:rPr sz="1200" b="1">
+                          <a:solidFill>
+                            <a:srgbClr val="333333"/>
+                          </a:solidFill>
+                          <a:latin typeface="Tahoma"/>
+                        </a:rPr>
+                        <a:t>Macro avg</a:t>
+                      </a:r>
+                    </a:p>
+                  </a:txBody>
+                  <a:tcPr marT="45720" marB="45720" anchor="ctr">
+                    <a:solidFill>
+                      <a:srgbClr val="FFFFFF"/>
+                    </a:solidFill>
+                  </a:tcPr>
+                </a:tc>
+                <a:tc>
+                  <a:txBody>
+                    <a:bodyPr/>
+                    <a:lstStyle/>
+                    <a:p>
+                      <a:r>
+                        <a:rPr sz="1200" b="0">
+                          <a:solidFill>
+                            <a:srgbClr val="333333"/>
+                          </a:solidFill>
+                          <a:latin typeface="Tahoma"/>
+                        </a:rPr>
+                        <a:t>เฉลี่ยทุกคลาสเท่ากัน</a:t>
+                      </a:r>
+                    </a:p>
+                  </a:txBody>
+                  <a:tcPr marT="45720" marB="45720" anchor="ctr">
+                    <a:solidFill>
+                      <a:srgbClr val="FFFFFF"/>
+                    </a:solidFill>
+                  </a:tcPr>
+                </a:tc>
+                <a:tc>
+                  <a:txBody>
+                    <a:bodyPr/>
+                    <a:lstStyle/>
+                    <a:p>
+                      <a:r>
+                        <a:rPr sz="1200" b="0">
+                          <a:solidFill>
+                            <a:srgbClr val="333333"/>
+                          </a:solidFill>
+                          <a:latin typeface="Tahoma"/>
+                        </a:rPr>
+                        <a:t>สนใจคลาสส่วนน้อย</a:t>
+                      </a:r>
+                    </a:p>
+                  </a:txBody>
+                  <a:tcPr marT="45720" marB="45720" anchor="ctr">
+                    <a:solidFill>
+                      <a:srgbClr val="FFFFFF"/>
+                    </a:solidFill>
+                  </a:tcPr>
+                </a:tc>
+              </a:tr>
+              <a:tr h="400000">
+                <a:tc>
+                  <a:txBody>
+                    <a:bodyPr/>
+                    <a:lstStyle/>
+                    <a:p>
+                      <a:r>
+                        <a:rPr sz="1200" b="1">
+                          <a:solidFill>
+                            <a:srgbClr val="333333"/>
+                          </a:solidFill>
+                          <a:latin typeface="Tahoma"/>
+                        </a:rPr>
+                        <a:t>Weighted avg</a:t>
+                      </a:r>
+                    </a:p>
+                  </a:txBody>
+                  <a:tcPr marT="45720" marB="45720" anchor="ctr">
+                    <a:solidFill>
+                      <a:srgbClr val="F7F9F9"/>
+                    </a:solidFill>
+                  </a:tcPr>
+                </a:tc>
+                <a:tc>
+                  <a:txBody>
+                    <a:bodyPr/>
+                    <a:lstStyle/>
+                    <a:p>
+                      <a:r>
+                        <a:rPr sz="1200" b="0">
+                          <a:solidFill>
+                            <a:srgbClr val="333333"/>
+                          </a:solidFill>
+                          <a:latin typeface="Tahoma"/>
+                        </a:rPr>
+                        <a:t>เฉลี่ยถ่วงตาม support</a:t>
+                      </a:r>
+                    </a:p>
+                  </a:txBody>
+                  <a:tcPr marT="45720" marB="45720" anchor="ctr">
+                    <a:solidFill>
+                      <a:srgbClr val="F7F9F9"/>
+                    </a:solidFill>
+                  </a:tcPr>
+                </a:tc>
+                <a:tc>
+                  <a:txBody>
+                    <a:bodyPr/>
+                    <a:lstStyle/>
+                    <a:p>
+                      <a:r>
+                        <a:rPr sz="1200" b="0">
+                          <a:solidFill>
+                            <a:srgbClr val="333333"/>
+                          </a:solidFill>
+                          <a:latin typeface="Tahoma"/>
+                        </a:rPr>
+                        <a:t>ภาพรวมตามสัดส่วนจริง</a:t>
+                      </a:r>
+                    </a:p>
+                  </a:txBody>
+                  <a:tcPr marT="45720" marB="45720" anchor="ctr">
+                    <a:solidFill>
+                      <a:srgbClr val="F7F9F9"/>
+                    </a:solidFill>
+                  </a:tcPr>
+                </a:tc>
+              </a:tr>
+            </a:tbl>
+          </a:graphicData>
+        </a:graphic>
+      </p:graphicFrame>
+      <p:sp>
+        <p:nvSpPr>
+          <p:cNvPr id="18" name="Rounded Rectangle 17"/>
+          <p:cNvSpPr/>
+          <p:nvPr/>
+        </p:nvSpPr>
+        <p:spPr>
+          <a:xfrm>
+            <a:off x="548640" y="4846320"/>
+            <a:ext cx="11064240" cy="1143000"/>
+          </a:xfrm>
+          <a:prstGeom prst="roundRect">
+            <a:avLst>
+              <a:gd name="adj" fmla="val 8000"/>
+            </a:avLst>
+          </a:prstGeom>
+          <a:solidFill>
+            <a:srgbClr val="F7F9F9"/>
+          </a:solidFill>
+          <a:ln w="12700">
+            <a:solidFill>
+              <a:srgbClr val="009E73"/>
+            </a:solidFill>
+          </a:ln>
+          <a:effectLst/>
+        </p:spPr>
+        <p:style>
+          <a:lnRef idx="1">
+            <a:schemeClr val="accent1"/>
+          </a:lnRef>
+          <a:fillRef idx="3">
+            <a:schemeClr val="accent1"/>
+          </a:fillRef>
+          <a:effectRef idx="2">
+            <a:schemeClr val="accent1"/>
+          </a:effectRef>
+          <a:fontRef idx="minor">
+            <a:schemeClr val="lt1"/>
+          </a:fontRef>
+        </p:style>
+        <p:txBody>
+          <a:bodyPr rtlCol="0" anchor="ctr" wrap="square" lIns="228600" rIns="228600"/>
+          <a:lstStyle/>
+          <a:p>
+            <a:pPr algn="ctr"/>
+            <a:r>
+              <a:rPr sz="1400" b="1">
+                <a:solidFill>
+                  <a:srgbClr val="333333"/>
+                </a:solidFill>
+                <a:latin typeface="Tahoma"/>
+              </a:rPr>
+              <a:t>ผลจริง: accuracy 0.69 ≈ ทาย "no" ทุกคน (0.68) — ตัวเลขนี้แทบไม่บอกอะไร</a:t>
+            </a:r>
+          </a:p>
+          <a:p>
+            <a:pPr>
+              <a:spcBef>
+                <a:spcPts val="300"/>
+              </a:spcBef>
+            </a:pPr>
+            <a:r>
+              <a:rPr sz="1300" b="0">
+                <a:solidFill>
+                  <a:srgbClr val="333333"/>
+                </a:solidFill>
+                <a:latin typeface="Tahoma"/>
+              </a:rPr>
+              <a:t>▸ macro F1 0.48 &lt; weighted F1 0.60 = คลาส yes ทำได้แย่ แต่ถูกคลาส no กลบไว้ → ดู recall/F1 ของ yes และ PR-AUC แทน</a:t>
+            </a:r>
+          </a:p>
+        </p:txBody>
+      </p:sp>
+    </p:spTree>
+  </p:cSld>
+  <p:clrMapOvr>
+    <a:masterClrMapping/>
+  </p:clrMapOvr>
+</p:sld>
+</file>
+
+<file path=ppt/slides/slide22.xml><?xml version="1.0" encoding="utf-8"?>
+<p:sld xmlns:a="http://schemas.openxmlformats.org/drawingml/2006/main" xmlns:p="http://schemas.openxmlformats.org/presentationml/2006/main" xmlns:r="http://schemas.openxmlformats.org/officeDocument/2006/relationships">
+  <p:cSld>
+    <p:spTree>
+      <p:nvGrpSpPr>
+        <p:cNvPr id="1" name=""/>
+        <p:cNvGrpSpPr/>
+        <p:nvPr/>
+      </p:nvGrpSpPr>
+      <p:grpSpPr/>
+      <p:sp>
+        <p:nvSpPr>
+          <p:cNvPr id="2" name="Rectangle 1"/>
+          <p:cNvSpPr/>
+          <p:nvPr/>
+        </p:nvSpPr>
+        <p:spPr>
+          <a:xfrm>
+            <a:off x="0" y="0"/>
+            <a:ext cx="12191695" cy="6858000"/>
+          </a:xfrm>
+          <a:prstGeom prst="rect">
+            <a:avLst/>
+          </a:prstGeom>
+          <a:solidFill>
+            <a:srgbClr val="FFFFFF"/>
+          </a:solidFill>
+          <a:ln>
+            <a:noFill/>
+          </a:ln>
+          <a:effectLst/>
+        </p:spPr>
+        <p:style>
+          <a:lnRef idx="1">
+            <a:schemeClr val="accent1"/>
+          </a:lnRef>
+          <a:fillRef idx="3">
+            <a:schemeClr val="accent1"/>
+          </a:fillRef>
+          <a:effectRef idx="2">
+            <a:schemeClr val="accent1"/>
+          </a:effectRef>
+          <a:fontRef idx="minor">
+            <a:schemeClr val="lt1"/>
+          </a:fontRef>
+        </p:style>
+        <p:txBody>
+          <a:bodyPr rtlCol="0" anchor="ctr"/>
+          <a:lstStyle/>
+          <a:p>
+            <a:pPr algn="ctr"/>
+          </a:p>
+        </p:txBody>
+      </p:sp>
+      <p:sp>
+        <p:nvSpPr>
+          <p:cNvPr id="3" name="TextBox 2"/>
+          <p:cNvSpPr txBox="1"/>
+          <p:nvPr/>
+        </p:nvSpPr>
+        <p:spPr>
+          <a:xfrm>
+            <a:off x="548640" y="137160"/>
+            <a:ext cx="7315200" cy="320040"/>
+          </a:xfrm>
+          <a:prstGeom prst="rect">
+            <a:avLst/>
+          </a:prstGeom>
+          <a:noFill/>
+        </p:spPr>
+        <p:txBody>
+          <a:bodyPr wrap="none">
+            <a:spAutoFit/>
+          </a:bodyPr>
+          <a:lstStyle/>
+          <a:p>
+            <a:r>
+              <a:rPr sz="1300" b="1">
+                <a:solidFill>
+                  <a:srgbClr val="009E73"/>
+                </a:solidFill>
+                <a:latin typeface="Tahoma"/>
+              </a:rPr>
+              <a:t>APPENDIX F — EVALUATION</a:t>
+            </a:r>
+          </a:p>
+        </p:txBody>
+      </p:sp>
+      <p:sp>
+        <p:nvSpPr>
+          <p:cNvPr id="4" name="TextBox 3"/>
+          <p:cNvSpPr txBox="1"/>
+          <p:nvPr/>
+        </p:nvSpPr>
+        <p:spPr>
+          <a:xfrm>
+            <a:off x="548640" y="411480"/>
+            <a:ext cx="11094415" cy="822960"/>
+          </a:xfrm>
+          <a:prstGeom prst="rect">
+            <a:avLst/>
+          </a:prstGeom>
+          <a:noFill/>
+        </p:spPr>
+        <p:txBody>
+          <a:bodyPr wrap="square">
+            <a:spAutoFit/>
+          </a:bodyPr>
+          <a:lstStyle/>
+          <a:p>
+            <a:r>
+              <a:rPr sz="3200" b="1">
+                <a:solidFill>
+                  <a:srgbClr val="333333"/>
+                </a:solidFill>
+                <a:latin typeface="Tahoma"/>
+              </a:rPr>
+              <a:t>ROC, PR Curve หรือ Confusion Matrix: ใช้อะไรเมื่อไหร่</a:t>
+            </a:r>
+          </a:p>
+        </p:txBody>
+      </p:sp>
+      <p:sp>
+        <p:nvSpPr>
+          <p:cNvPr id="5" name="Rectangle 4"/>
+          <p:cNvSpPr/>
+          <p:nvPr/>
+        </p:nvSpPr>
+        <p:spPr>
+          <a:xfrm>
+            <a:off x="548640" y="1143000"/>
+            <a:ext cx="1828800" cy="50800"/>
+          </a:xfrm>
+          <a:prstGeom prst="rect">
+            <a:avLst/>
+          </a:prstGeom>
+          <a:solidFill>
+            <a:srgbClr val="009E73"/>
+          </a:solidFill>
+          <a:ln>
+            <a:noFill/>
+          </a:ln>
+          <a:effectLst/>
+        </p:spPr>
+        <p:style>
+          <a:lnRef idx="1">
+            <a:schemeClr val="accent1"/>
+          </a:lnRef>
+          <a:fillRef idx="3">
+            <a:schemeClr val="accent1"/>
+          </a:fillRef>
+          <a:effectRef idx="2">
+            <a:schemeClr val="accent1"/>
+          </a:effectRef>
+          <a:fontRef idx="minor">
+            <a:schemeClr val="lt1"/>
+          </a:fontRef>
+        </p:style>
+        <p:txBody>
+          <a:bodyPr rtlCol="0" anchor="ctr"/>
+          <a:lstStyle/>
+          <a:p>
+            <a:pPr algn="ctr"/>
+          </a:p>
+        </p:txBody>
+      </p:sp>
+      <p:sp>
+        <p:nvSpPr>
+          <p:cNvPr id="6" name="TextBox 5"/>
+          <p:cNvSpPr txBox="1"/>
+          <p:nvPr/>
+        </p:nvSpPr>
+        <p:spPr>
+          <a:xfrm>
+            <a:off x="11002975" y="6446520"/>
+            <a:ext cx="914400" cy="274320"/>
+          </a:xfrm>
+          <a:prstGeom prst="rect">
+            <a:avLst/>
+          </a:prstGeom>
+          <a:noFill/>
+        </p:spPr>
+        <p:txBody>
+          <a:bodyPr wrap="none">
+            <a:spAutoFit/>
+          </a:bodyPr>
+          <a:lstStyle/>
+          <a:p>
+            <a:pPr algn="r"/>
+            <a:r>
+              <a:rPr sz="1100" b="0">
+                <a:solidFill>
+                  <a:srgbClr val="666666"/>
+                </a:solidFill>
+              </a:rPr>
+              <a:t>19 / 22</a:t>
+            </a:r>
+          </a:p>
+        </p:txBody>
+      </p:sp>
+      <p:sp>
+        <p:nvSpPr>
+          <p:cNvPr id="7" name="TextBox 6"/>
+          <p:cNvSpPr txBox="1"/>
+          <p:nvPr/>
+        </p:nvSpPr>
+        <p:spPr>
+          <a:xfrm>
+            <a:off x="548640" y="6446520"/>
+            <a:ext cx="4572000" cy="274320"/>
+          </a:xfrm>
+          <a:prstGeom prst="rect">
+            <a:avLst/>
+          </a:prstGeom>
+          <a:noFill/>
+        </p:spPr>
+        <p:txBody>
+          <a:bodyPr wrap="none">
+            <a:spAutoFit/>
+          </a:bodyPr>
+          <a:lstStyle/>
+          <a:p>
+            <a:r>
+              <a:rPr sz="1100" b="0">
+                <a:solidFill>
+                  <a:srgbClr val="666666"/>
+                </a:solidFill>
+              </a:rPr>
+              <a:t>Bank Marketing — Term Deposit Prediction</a:t>
+            </a:r>
+          </a:p>
+        </p:txBody>
+      </p:sp>
+      <p:graphicFrame>
+        <p:nvGraphicFramePr>
+          <p:cNvPr id="8" name="Table 7"/>
+          <p:cNvGraphicFramePr>
+            <a:graphicFrameLocks noGrp="1"/>
+          </p:cNvGraphicFramePr>
+          <p:nvPr/>
+        </p:nvGraphicFramePr>
+        <p:xfrm>
+          <a:off x="548640" y="1417320"/>
+          <a:ext cx="11064238" cy="2520000"/>
+        </p:xfrm>
+        <a:graphic>
+          <a:graphicData uri="http://schemas.openxmlformats.org/drawingml/2006/table">
+            <a:tbl>
+              <a:tblPr firstRow="1" bandRow="1">
+                <a:tableStyleId>{5C22544A-7EE6-4342-B048-85BDC9FD1C3A}</a:tableStyleId>
+              </a:tblPr>
+              <a:tblGrid>
+                <a:gridCol w="4237368"/>
+                <a:gridCol w="2589502"/>
+                <a:gridCol w="4237368"/>
+              </a:tblGrid>
+              <a:tr h="420000">
+                <a:tc>
+                  <a:txBody>
+                    <a:bodyPr/>
+                    <a:lstStyle/>
+                    <a:p>
+                      <a:pPr algn="ctr"/>
+                      <a:r>
+                        <a:rPr sz="1300" b="1">
+                          <a:solidFill>
+                            <a:srgbClr val="FFFFFF"/>
+                          </a:solidFill>
+                          <a:latin typeface="Tahoma"/>
+                        </a:rPr>
+                        <a:t>สถานการณ์ / ข้อมูล</a:t>
+                      </a:r>
+                    </a:p>
+                  </a:txBody>
+                  <a:tcPr marT="45720" marB="45720" anchor="ctr">
+                    <a:solidFill>
+                      <a:srgbClr val="009E73"/>
+                    </a:solidFill>
+                  </a:tcPr>
+                </a:tc>
+                <a:tc>
+                  <a:txBody>
+                    <a:bodyPr/>
+                    <a:lstStyle/>
+                    <a:p>
+                      <a:pPr algn="ctr"/>
+                      <a:r>
+                        <a:rPr sz="1300" b="1">
+                          <a:solidFill>
+                            <a:srgbClr val="FFFFFF"/>
+                          </a:solidFill>
+                          <a:latin typeface="Tahoma"/>
+                        </a:rPr>
+                        <a:t>ใช้</a:t>
+                      </a:r>
+                    </a:p>
+                  </a:txBody>
+                  <a:tcPr marT="45720" marB="45720" anchor="ctr">
+                    <a:solidFill>
+                      <a:srgbClr val="009E73"/>
+                    </a:solidFill>
+                  </a:tcPr>
+                </a:tc>
+                <a:tc>
+                  <a:txBody>
+                    <a:bodyPr/>
+                    <a:lstStyle/>
+                    <a:p>
+                      <a:pPr algn="ctr"/>
+                      <a:r>
+                        <a:rPr sz="1300" b="1">
+                          <a:solidFill>
+                            <a:srgbClr val="FFFFFF"/>
+                          </a:solidFill>
+                          <a:latin typeface="Tahoma"/>
+                        </a:rPr>
+                        <a:t>เพราะ</a:t>
+                      </a:r>
+                    </a:p>
+                  </a:txBody>
+                  <a:tcPr marT="45720" marB="45720" anchor="ctr">
+                    <a:solidFill>
+                      <a:srgbClr val="009E73"/>
+                    </a:solidFill>
+                  </a:tcPr>
+                </a:tc>
+              </a:tr>
+              <a:tr h="420000">
+                <a:tc>
+                  <a:txBody>
+                    <a:bodyPr/>
+                    <a:lstStyle/>
+                    <a:p>
+                      <a:r>
+                        <a:rPr sz="1300" b="1">
+                          <a:solidFill>
+                            <a:srgbClr val="333333"/>
+                          </a:solidFill>
+                          <a:latin typeface="Tahoma"/>
+                        </a:rPr>
+                        <a:t>ยังไม่เลือก threshold, เทียบโมเดล</a:t>
+                      </a:r>
+                    </a:p>
+                  </a:txBody>
+                  <a:tcPr marT="45720" marB="45720" anchor="ctr">
+                    <a:solidFill>
+                      <a:srgbClr val="FFFFFF"/>
+                    </a:solidFill>
+                  </a:tcPr>
+                </a:tc>
+                <a:tc>
+                  <a:txBody>
+                    <a:bodyPr/>
+                    <a:lstStyle/>
+                    <a:p>
+                      <a:r>
+                        <a:rPr sz="1300" b="0">
+                          <a:solidFill>
+                            <a:srgbClr val="333333"/>
+                          </a:solidFill>
+                          <a:latin typeface="Tahoma"/>
+                        </a:rPr>
+                        <a:t>ROC-AUC</a:t>
+                      </a:r>
+                    </a:p>
+                  </a:txBody>
+                  <a:tcPr marT="45720" marB="45720" anchor="ctr">
+                    <a:solidFill>
+                      <a:srgbClr val="FFFFFF"/>
+                    </a:solidFill>
+                  </a:tcPr>
+                </a:tc>
+                <a:tc>
+                  <a:txBody>
+                    <a:bodyPr/>
+                    <a:lstStyle/>
+                    <a:p>
+                      <a:r>
+                        <a:rPr sz="1300" b="0">
+                          <a:solidFill>
+                            <a:srgbClr val="333333"/>
+                          </a:solidFill>
+                          <a:latin typeface="Tahoma"/>
+                        </a:rPr>
+                        <a:t>ดูทุก threshold, ไม่ขึ้นกับสเกลคะแนน</a:t>
+                      </a:r>
+                    </a:p>
+                  </a:txBody>
+                  <a:tcPr marT="45720" marB="45720" anchor="ctr">
+                    <a:solidFill>
+                      <a:srgbClr val="FFFFFF"/>
+                    </a:solidFill>
+                  </a:tcPr>
+                </a:tc>
+              </a:tr>
+              <a:tr h="420000">
+                <a:tc>
+                  <a:txBody>
+                    <a:bodyPr/>
+                    <a:lstStyle/>
+                    <a:p>
+                      <a:r>
+                        <a:rPr sz="1300" b="1">
+                          <a:solidFill>
+                            <a:srgbClr val="333333"/>
+                          </a:solidFill>
+                          <a:latin typeface="Tahoma"/>
+                        </a:rPr>
+                        <a:t>ไม่สมดุลมาก สนใจคลาสบวก</a:t>
+                      </a:r>
+                    </a:p>
+                  </a:txBody>
+                  <a:tcPr marT="45720" marB="45720" anchor="ctr">
+                    <a:solidFill>
+                      <a:srgbClr val="F7F9F9"/>
+                    </a:solidFill>
+                  </a:tcPr>
+                </a:tc>
+                <a:tc>
+                  <a:txBody>
+                    <a:bodyPr/>
+                    <a:lstStyle/>
+                    <a:p>
+                      <a:r>
+                        <a:rPr sz="1300" b="0">
+                          <a:solidFill>
+                            <a:srgbClr val="333333"/>
+                          </a:solidFill>
+                          <a:latin typeface="Tahoma"/>
+                        </a:rPr>
+                        <a:t>PR-AUC (คู่กับ ROC)</a:t>
+                      </a:r>
+                    </a:p>
+                  </a:txBody>
+                  <a:tcPr marT="45720" marB="45720" anchor="ctr">
+                    <a:solidFill>
+                      <a:srgbClr val="F7F9F9"/>
+                    </a:solidFill>
+                  </a:tcPr>
+                </a:tc>
+                <a:tc>
+                  <a:txBody>
+                    <a:bodyPr/>
+                    <a:lstStyle/>
+                    <a:p>
+                      <a:r>
+                        <a:rPr sz="1300" b="0">
+                          <a:solidFill>
+                            <a:srgbClr val="333333"/>
+                          </a:solidFill>
+                          <a:latin typeface="Tahoma"/>
+                        </a:rPr>
+                        <a:t>ROC ดูดีเกินจริงเพราะ TN เยอะ</a:t>
+                      </a:r>
+                    </a:p>
+                  </a:txBody>
+                  <a:tcPr marT="45720" marB="45720" anchor="ctr">
+                    <a:solidFill>
+                      <a:srgbClr val="F7F9F9"/>
+                    </a:solidFill>
+                  </a:tcPr>
+                </a:tc>
+              </a:tr>
+              <a:tr h="420000">
+                <a:tc>
+                  <a:txBody>
+                    <a:bodyPr/>
+                    <a:lstStyle/>
+                    <a:p>
+                      <a:r>
+                        <a:rPr sz="1300" b="1">
+                          <a:solidFill>
+                            <a:srgbClr val="333333"/>
+                          </a:solidFill>
+                          <a:latin typeface="Tahoma"/>
+                        </a:rPr>
+                        <a:t>สัดส่วนคลาสเปลี่ยนตามเวลา (6.7% → 31.6%)</a:t>
+                      </a:r>
+                    </a:p>
+                  </a:txBody>
+                  <a:tcPr marT="45720" marB="45720" anchor="ctr">
+                    <a:solidFill>
+                      <a:srgbClr val="FFFFFF"/>
+                    </a:solidFill>
+                  </a:tcPr>
+                </a:tc>
+                <a:tc>
+                  <a:txBody>
+                    <a:bodyPr/>
+                    <a:lstStyle/>
+                    <a:p>
+                      <a:r>
+                        <a:rPr sz="1300" b="0">
+                          <a:solidFill>
+                            <a:srgbClr val="333333"/>
+                          </a:solidFill>
+                          <a:latin typeface="Tahoma"/>
+                        </a:rPr>
+                        <a:t>ROC-AUC</a:t>
+                      </a:r>
+                    </a:p>
+                  </a:txBody>
+                  <a:tcPr marT="45720" marB="45720" anchor="ctr">
+                    <a:solidFill>
+                      <a:srgbClr val="FFFFFF"/>
+                    </a:solidFill>
+                  </a:tcPr>
+                </a:tc>
+                <a:tc>
+                  <a:txBody>
+                    <a:bodyPr/>
+                    <a:lstStyle/>
+                    <a:p>
+                      <a:r>
+                        <a:rPr sz="1300" b="0">
+                          <a:solidFill>
+                            <a:srgbClr val="333333"/>
+                          </a:solidFill>
+                          <a:latin typeface="Tahoma"/>
+                        </a:rPr>
+                        <a:t>ไม่ขึ้นกับ prevalence เทียบข้ามช่วงได้</a:t>
+                      </a:r>
+                    </a:p>
+                  </a:txBody>
+                  <a:tcPr marT="45720" marB="45720" anchor="ctr">
+                    <a:solidFill>
+                      <a:srgbClr val="FFFFFF"/>
+                    </a:solidFill>
+                  </a:tcPr>
+                </a:tc>
+              </a:tr>
+              <a:tr h="420000">
+                <a:tc>
+                  <a:txBody>
+                    <a:bodyPr/>
+                    <a:lstStyle/>
+                    <a:p>
+                      <a:r>
+                        <a:rPr sz="1300" b="1">
+                          <a:solidFill>
+                            <a:srgbClr val="333333"/>
+                          </a:solidFill>
+                          <a:latin typeface="Tahoma"/>
+                        </a:rPr>
+                        <a:t>เลือก threshold แล้ว จะ deploy</a:t>
+                      </a:r>
+                    </a:p>
+                  </a:txBody>
+                  <a:tcPr marT="45720" marB="45720" anchor="ctr">
+                    <a:solidFill>
+                      <a:srgbClr val="F7F9F9"/>
+                    </a:solidFill>
+                  </a:tcPr>
+                </a:tc>
+                <a:tc>
+                  <a:txBody>
+                    <a:bodyPr/>
+                    <a:lstStyle/>
+                    <a:p>
+                      <a:r>
+                        <a:rPr sz="1300" b="0">
+                          <a:solidFill>
+                            <a:srgbClr val="333333"/>
+                          </a:solidFill>
+                          <a:latin typeface="Tahoma"/>
+                        </a:rPr>
+                        <a:t>Confusion Matrix</a:t>
+                      </a:r>
+                    </a:p>
+                  </a:txBody>
+                  <a:tcPr marT="45720" marB="45720" anchor="ctr">
+                    <a:solidFill>
+                      <a:srgbClr val="F7F9F9"/>
+                    </a:solidFill>
+                  </a:tcPr>
+                </a:tc>
+                <a:tc>
+                  <a:txBody>
+                    <a:bodyPr/>
+                    <a:lstStyle/>
+                    <a:p>
+                      <a:r>
+                        <a:rPr sz="1300" b="0">
+                          <a:solidFill>
+                            <a:srgbClr val="333333"/>
+                          </a:solidFill>
+                          <a:latin typeface="Tahoma"/>
+                        </a:rPr>
+                        <a:t>เห็นจำนวนคนจริง แปลงเป็นต้นทุนได้</a:t>
+                      </a:r>
+                    </a:p>
+                  </a:txBody>
+                  <a:tcPr marT="45720" marB="45720" anchor="ctr">
+                    <a:solidFill>
+                      <a:srgbClr val="F7F9F9"/>
+                    </a:solidFill>
+                  </a:tcPr>
+                </a:tc>
+              </a:tr>
+              <a:tr h="420000">
+                <a:tc>
+                  <a:txBody>
+                    <a:bodyPr/>
+                    <a:lstStyle/>
+                    <a:p>
+                      <a:r>
+                        <a:rPr sz="1300" b="1">
+                          <a:solidFill>
+                            <a:srgbClr val="333333"/>
+                          </a:solidFill>
+                          <a:latin typeface="Tahoma"/>
+                        </a:rPr>
+                        <a:t>โทรได้จำกัด N สาย</a:t>
+                      </a:r>
+                    </a:p>
+                  </a:txBody>
+                  <a:tcPr marT="45720" marB="45720" anchor="ctr">
+                    <a:solidFill>
+                      <a:srgbClr val="FFFFFF"/>
+                    </a:solidFill>
+                  </a:tcPr>
+                </a:tc>
+                <a:tc>
+                  <a:txBody>
+                    <a:bodyPr/>
+                    <a:lstStyle/>
+                    <a:p>
+                      <a:r>
+                        <a:rPr sz="1300" b="0">
+                          <a:solidFill>
+                            <a:srgbClr val="333333"/>
+                          </a:solidFill>
+                          <a:latin typeface="Tahoma"/>
+                        </a:rPr>
+                        <a:t>Gains / Lift</a:t>
+                      </a:r>
+                    </a:p>
+                  </a:txBody>
+                  <a:tcPr marT="45720" marB="45720" anchor="ctr">
+                    <a:solidFill>
+                      <a:srgbClr val="FFFFFF"/>
+                    </a:solidFill>
+                  </a:tcPr>
+                </a:tc>
+                <a:tc>
+                  <a:txBody>
+                    <a:bodyPr/>
+                    <a:lstStyle/>
+                    <a:p>
+                      <a:r>
+                        <a:rPr sz="1300" b="0">
+                          <a:solidFill>
+                            <a:srgbClr val="333333"/>
+                          </a:solidFill>
+                          <a:latin typeface="Tahoma"/>
+                        </a:rPr>
+                        <a:t>ตอบตรง ๆ ว่า top N% จับได้กี่ %</a:t>
+                      </a:r>
+                    </a:p>
+                  </a:txBody>
+                  <a:tcPr marT="45720" marB="45720" anchor="ctr">
+                    <a:solidFill>
+                      <a:srgbClr val="FFFFFF"/>
+                    </a:solidFill>
+                  </a:tcPr>
+                </a:tc>
+              </a:tr>
+            </a:tbl>
+          </a:graphicData>
+        </a:graphic>
+      </p:graphicFrame>
+      <p:sp>
+        <p:nvSpPr>
+          <p:cNvPr id="9" name="Rounded Rectangle 8"/>
+          <p:cNvSpPr/>
+          <p:nvPr/>
+        </p:nvSpPr>
+        <p:spPr>
+          <a:xfrm>
+            <a:off x="548640" y="4114800"/>
+            <a:ext cx="11064240" cy="1691640"/>
+          </a:xfrm>
+          <a:prstGeom prst="roundRect">
+            <a:avLst>
+              <a:gd name="adj" fmla="val 8000"/>
+            </a:avLst>
+          </a:prstGeom>
+          <a:solidFill>
+            <a:srgbClr val="F7F9F9"/>
+          </a:solidFill>
+          <a:ln w="12700">
+            <a:solidFill>
+              <a:srgbClr val="009E73"/>
+            </a:solidFill>
+          </a:ln>
+          <a:effectLst/>
+        </p:spPr>
+        <p:style>
+          <a:lnRef idx="1">
+            <a:schemeClr val="accent1"/>
+          </a:lnRef>
+          <a:fillRef idx="3">
+            <a:schemeClr val="accent1"/>
+          </a:fillRef>
+          <a:effectRef idx="2">
+            <a:schemeClr val="accent1"/>
+          </a:effectRef>
+          <a:fontRef idx="minor">
+            <a:schemeClr val="lt1"/>
+          </a:fontRef>
+        </p:style>
+        <p:txBody>
+          <a:bodyPr rtlCol="0" anchor="ctr" wrap="square" lIns="228600" rIns="228600"/>
+          <a:lstStyle/>
+          <a:p>
+            <a:pPr algn="ctr"/>
+            <a:r>
+              <a:rPr sz="1400" b="1">
+                <a:solidFill>
+                  <a:srgbClr val="333333"/>
+                </a:solidFill>
+                <a:latin typeface="Tahoma"/>
+              </a:rPr>
+              <a:t>ROC-AUC = P(คะแนนลูกค้าที่ฝากจริง &gt; คะแนนลูกค้าที่ไม่ฝาก)</a:t>
+            </a:r>
+          </a:p>
+          <a:p>
+            <a:pPr>
+              <a:spcBef>
+                <a:spcPts val="300"/>
+              </a:spcBef>
+            </a:pPr>
+            <a:r>
+              <a:rPr sz="1300" b="0">
+                <a:solidFill>
+                  <a:srgbClr val="333333"/>
+                </a:solidFill>
+                <a:latin typeface="Tahoma"/>
+              </a:rPr>
+              <a:t>▸ 0.5 = เดาสุ่ม · 1.0 = แยกสมบูรณ์ (ถ้าเจอ ให้สงสัย leakage ก่อน) · Gini = 2·AUC − 1</a:t>
+            </a:r>
+          </a:p>
+          <a:p>
+            <a:pPr>
+              <a:spcBef>
+                <a:spcPts val="300"/>
+              </a:spcBef>
+            </a:pPr>
+            <a:r>
+              <a:rPr sz="1300" b="0">
+                <a:solidFill>
+                  <a:srgbClr val="333333"/>
+                </a:solidFill>
+                <a:latin typeface="Tahoma"/>
+              </a:rPr>
+              <a:t>▸ ROC curve = TPR เทียบ FPR ทุก threshold — ยิ่งโค้งเข้ามุมซ้ายบนยิ่งดี; โมเดลนี้ AUC 0.68 = จัดอันดับดีกว่าสุ่ม</a:t>
+            </a:r>
+          </a:p>
+          <a:p>
+            <a:pPr>
+              <a:spcBef>
+                <a:spcPts val="300"/>
+              </a:spcBef>
+            </a:pPr>
+            <a:r>
+              <a:rPr sz="1300" b="0">
+                <a:solidFill>
+                  <a:srgbClr val="333333"/>
+                </a:solidFill>
+                <a:latin typeface="Tahoma"/>
+              </a:rPr>
+              <a:t>▸ ไม่วัด calibration และไม่คิดต้นทุน FP/FN → ต้องเลือก threshold ด้วยเหตุผลธุรกิจอีกชั้น</a:t>
             </a:r>
           </a:p>
         </p:txBody>
@@ -8297,7 +12233,7 @@
                   <a:srgbClr val="666666"/>
                 </a:solidFill>
               </a:rPr>
-              <a:t>3 / 18</a:t>
+              <a:t>3 / 22</a:t>
             </a:r>
           </a:p>
         </p:txBody>
@@ -8712,7 +12648,7 @@
                   <a:srgbClr val="666666"/>
                 </a:solidFill>
               </a:rPr>
-              <a:t>4 / 18</a:t>
+              <a:t>4 / 22</a:t>
             </a:r>
           </a:p>
         </p:txBody>
@@ -9267,7 +13203,7 @@
                   <a:srgbClr val="666666"/>
                 </a:solidFill>
               </a:rPr>
-              <a:t>5 / 18</a:t>
+              <a:t>5 / 22</a:t>
             </a:r>
           </a:p>
         </p:txBody>
@@ -9611,7 +13547,7 @@
                   <a:srgbClr val="666666"/>
                 </a:solidFill>
               </a:rPr>
-              <a:t>6 / 18</a:t>
+              <a:t>6 / 22</a:t>
             </a:r>
           </a:p>
         </p:txBody>
@@ -9910,7 +13846,7 @@
                   <a:srgbClr val="666666"/>
                 </a:solidFill>
               </a:rPr>
-              <a:t>7 / 18</a:t>
+              <a:t>7 / 22</a:t>
             </a:r>
           </a:p>
         </p:txBody>
@@ -10549,7 +14485,7 @@
                   <a:srgbClr val="666666"/>
                 </a:solidFill>
               </a:rPr>
-              <a:t>8 / 18</a:t>
+              <a:t>8 / 22</a:t>
             </a:r>
           </a:p>
         </p:txBody>
@@ -11021,7 +14957,7 @@
                   <a:srgbClr val="666666"/>
                 </a:solidFill>
               </a:rPr>
-              <a:t>9 / 18</a:t>
+              <a:t>9 / 22</a:t>
             </a:r>
           </a:p>
         </p:txBody>

--- a/BankMarketing_Presentation.pptx
+++ b/BankMarketing_Presentation.pptx
@@ -16,6 +16,7 @@
     <p:sldId id="264" r:id="rId15"/>
     <p:sldId id="265" r:id="rId16"/>
     <p:sldId id="266" r:id="rId17"/>
+    <p:sldId id="278" r:id="rId29"/>
     <p:sldId id="267" r:id="rId18"/>
     <p:sldId id="268" r:id="rId19"/>
     <p:sldId id="269" r:id="rId20"/>
@@ -126,6 +127,307 @@
     </a:lvl9pPr>
   </p:defaultTextStyle>
 </p:presentation>
+</file>
+
+<file path=ppt/charts/chart1.xml><?xml version="1.0" encoding="utf-8"?>
+<c:chartSpace xmlns:c="http://schemas.openxmlformats.org/drawingml/2006/chart" xmlns:a="http://schemas.openxmlformats.org/drawingml/2006/main" xmlns:r="http://schemas.openxmlformats.org/officeDocument/2006/relationships">
+  <c:date1904 val="0"/>
+  <c:chart>
+    <c:title>
+      <c:tx>
+        <c:rich>
+          <a:bodyPr/>
+          <a:lstStyle/>
+          <a:p>
+            <a:r>
+              <a:rPr sz="1200" b="1">
+                <a:solidFill>
+                  <a:srgbClr val="333333"/>
+                </a:solidFill>
+                <a:latin typeface="Tahoma"/>
+              </a:rPr>
+              <a:t>อัตราฝากของกลุ่มที่โทรเพิ่มทีละ 10% (top → bottom)</a:t>
+            </a:r>
+          </a:p>
+        </c:rich>
+      </c:tx>
+      <c:layout/>
+      <c:overlay val="0"/>
+    </c:title>
+    <c:autoTitleDeleted val="0"/>
+    <c:plotArea>
+      <c:barChart>
+        <c:barDir val="col"/>
+        <c:grouping val="clustered"/>
+        <c:ser>
+          <c:idx val="0"/>
+          <c:order val="0"/>
+          <c:tx>
+            <c:strRef>
+              <c:f>Sheet1!$B$1</c:f>
+              <c:strCache>
+                <c:ptCount val="1"/>
+                <c:pt idx="0">
+                  <c:v>อัตราฝาก (%)</c:v>
+                </c:pt>
+              </c:strCache>
+            </c:strRef>
+          </c:tx>
+          <c:spPr>
+            <a:solidFill>
+              <a:srgbClr val="009E73"/>
+            </a:solidFill>
+          </c:spPr>
+          <c:dPt>
+            <c:idx val="3"/>
+            <c:spPr>
+              <a:solidFill>
+                <a:srgbClr val="9ED9C6"/>
+              </a:solidFill>
+            </c:spPr>
+          </c:dPt>
+          <c:dPt>
+            <c:idx val="4"/>
+            <c:spPr>
+              <a:solidFill>
+                <a:srgbClr val="9ED9C6"/>
+              </a:solidFill>
+            </c:spPr>
+          </c:dPt>
+          <c:dPt>
+            <c:idx val="5"/>
+            <c:spPr>
+              <a:solidFill>
+                <a:srgbClr val="9ED9C6"/>
+              </a:solidFill>
+            </c:spPr>
+          </c:dPt>
+          <c:dPt>
+            <c:idx val="6"/>
+            <c:spPr>
+              <a:solidFill>
+                <a:srgbClr val="9ED9C6"/>
+              </a:solidFill>
+            </c:spPr>
+          </c:dPt>
+          <c:dPt>
+            <c:idx val="7"/>
+            <c:spPr>
+              <a:solidFill>
+                <a:srgbClr val="9ED9C6"/>
+              </a:solidFill>
+            </c:spPr>
+          </c:dPt>
+          <c:dPt>
+            <c:idx val="8"/>
+            <c:spPr>
+              <a:solidFill>
+                <a:srgbClr val="9ED9C6"/>
+              </a:solidFill>
+            </c:spPr>
+          </c:dPt>
+          <c:dPt>
+            <c:idx val="9"/>
+            <c:spPr>
+              <a:solidFill>
+                <a:srgbClr val="9ED9C6"/>
+              </a:solidFill>
+            </c:spPr>
+          </c:dPt>
+          <c:cat>
+            <c:strRef>
+              <c:f>Sheet1!$A$2:$A$11</c:f>
+              <c:strCache>
+                <c:ptCount val="10"/>
+                <c:pt idx="0">
+                  <c:v>0-10</c:v>
+                </c:pt>
+                <c:pt idx="1">
+                  <c:v>10-20</c:v>
+                </c:pt>
+                <c:pt idx="2">
+                  <c:v>20-30</c:v>
+                </c:pt>
+                <c:pt idx="3">
+                  <c:v>30-40</c:v>
+                </c:pt>
+                <c:pt idx="4">
+                  <c:v>40-50</c:v>
+                </c:pt>
+                <c:pt idx="5">
+                  <c:v>50-60</c:v>
+                </c:pt>
+                <c:pt idx="6">
+                  <c:v>60-70</c:v>
+                </c:pt>
+                <c:pt idx="7">
+                  <c:v>70-80</c:v>
+                </c:pt>
+                <c:pt idx="8">
+                  <c:v>80-90</c:v>
+                </c:pt>
+                <c:pt idx="9">
+                  <c:v>90-100</c:v>
+                </c:pt>
+              </c:strCache>
+            </c:strRef>
+          </c:cat>
+          <c:val>
+            <c:numRef>
+              <c:f>Sheet1!$B$2:$B$11</c:f>
+              <c:numCache>
+                <c:formatCode>General</c:formatCode>
+                <c:ptCount val="10"/>
+                <c:pt idx="0">
+                  <c:v>51.492</c:v>
+                </c:pt>
+                <c:pt idx="1">
+                  <c:v>51.881</c:v>
+                </c:pt>
+                <c:pt idx="2">
+                  <c:v>48.119</c:v>
+                </c:pt>
+                <c:pt idx="3">
+                  <c:v>36.575</c:v>
+                </c:pt>
+                <c:pt idx="4">
+                  <c:v>30.088</c:v>
+                </c:pt>
+                <c:pt idx="5">
+                  <c:v>24.115</c:v>
+                </c:pt>
+                <c:pt idx="6">
+                  <c:v>22.541</c:v>
+                </c:pt>
+                <c:pt idx="7">
+                  <c:v>19.027</c:v>
+                </c:pt>
+                <c:pt idx="8">
+                  <c:v>18.473</c:v>
+                </c:pt>
+                <c:pt idx="9">
+                  <c:v>13.496</c:v>
+                </c:pt>
+              </c:numCache>
+            </c:numRef>
+          </c:val>
+        </c:ser>
+        <c:dLbls>
+          <c:numFmt formatCode="0&quot;%&quot;" sourceLinked="0"/>
+          <c:txPr>
+            <a:bodyPr/>
+            <a:lstStyle/>
+            <a:p>
+              <a:pPr>
+                <a:defRPr sz="1000">
+                  <a:solidFill>
+                    <a:srgbClr val="333333"/>
+                  </a:solidFill>
+                </a:defRPr>
+              </a:pPr>
+            </a:p>
+          </c:txPr>
+          <c:dLblPos val="outEnd"/>
+          <c:showLegendKey val="0"/>
+          <c:showVal val="1"/>
+          <c:showCatName val="0"/>
+          <c:showSerName val="0"/>
+          <c:showPercent val="0"/>
+          <c:showBubbleSize val="0"/>
+          <c:showLeaderLines val="1"/>
+        </c:dLbls>
+        <c:gapWidth val="40"/>
+        <c:axId val="-2068027336"/>
+        <c:axId val="-2113994440"/>
+      </c:barChart>
+      <c:catAx>
+        <c:axId val="-2068027336"/>
+        <c:scaling>
+          <c:orientation val="minMax"/>
+        </c:scaling>
+        <c:delete val="0"/>
+        <c:axPos val="b"/>
+        <c:majorTickMark val="out"/>
+        <c:minorTickMark val="none"/>
+        <c:tickLblPos val="nextTo"/>
+        <c:txPr>
+          <a:bodyPr/>
+          <a:lstStyle/>
+          <a:p>
+            <a:pPr>
+              <a:defRPr sz="900">
+                <a:solidFill>
+                  <a:srgbClr val="666666"/>
+                </a:solidFill>
+              </a:defRPr>
+            </a:pPr>
+          </a:p>
+        </c:txPr>
+        <c:crossAx val="-2113994440"/>
+        <c:crosses val="autoZero"/>
+        <c:auto val="1"/>
+        <c:lblAlgn val="ctr"/>
+        <c:lblOffset val="100"/>
+        <c:noMultiLvlLbl val="0"/>
+      </c:catAx>
+      <c:valAx>
+        <c:axId val="-2113994440"/>
+        <c:scaling>
+          <c:max val="60.0"/>
+          <c:min val="0.0"/>
+        </c:scaling>
+        <c:delete val="0"/>
+        <c:axPos val="l"/>
+        <c:majorGridlines>
+          <c:spPr>
+            <a:ln>
+              <a:solidFill>
+                <a:srgbClr val="E5E5E5"/>
+              </a:solidFill>
+            </a:ln>
+          </c:spPr>
+        </c:majorGridlines>
+        <c:majorTickMark val="out"/>
+        <c:minorTickMark val="none"/>
+        <c:tickLblPos val="nextTo"/>
+        <c:spPr>
+          <a:ln>
+            <a:noFill/>
+          </a:ln>
+        </c:spPr>
+        <c:txPr>
+          <a:bodyPr/>
+          <a:lstStyle/>
+          <a:p>
+            <a:pPr>
+              <a:defRPr sz="1000">
+                <a:solidFill>
+                  <a:srgbClr val="666666"/>
+                </a:solidFill>
+              </a:defRPr>
+            </a:pPr>
+          </a:p>
+        </c:txPr>
+        <c:crossAx val="-2068027336"/>
+        <c:crosses val="autoZero"/>
+      </c:valAx>
+    </c:plotArea>
+    <c:dispBlanksAs val="gap"/>
+  </c:chart>
+  <c:txPr>
+    <a:bodyPr/>
+    <a:lstStyle/>
+    <a:p>
+      <a:pPr>
+        <a:defRPr sz="1800"/>
+      </a:pPr>
+      <a:endParaRPr lang="en-US"/>
+    </a:p>
+  </c:txPr>
+  <c:externalData r:id="rId1">
+    <c:autoUpdate val="0"/>
+  </c:externalData>
+</c:chartSpace>
 </file>
 
 <file path=ppt/slideLayouts/slideLayout1.xml><?xml version="1.0" encoding="utf-8"?>
@@ -3892,7 +4194,7 @@
                   <a:srgbClr val="666666"/>
                 </a:solidFill>
               </a:rPr>
-              <a:t>10 / 22</a:t>
+              <a:t>10 / 23</a:t>
             </a:r>
           </a:p>
         </p:txBody>
@@ -4644,7 +4946,7 @@
                   <a:srgbClr val="666666"/>
                 </a:solidFill>
               </a:rPr>
-              <a:t>11 / 22</a:t>
+              <a:t>11 / 23</a:t>
             </a:r>
           </a:p>
         </p:txBody>
@@ -5048,7 +5350,7 @@
                   <a:srgbClr val="666666"/>
                 </a:solidFill>
               </a:rPr>
-              <a:t>12 / 22</a:t>
+              <a:t>13 / 23</a:t>
             </a:r>
           </a:p>
         </p:txBody>
@@ -5463,7 +5765,7 @@
                   <a:srgbClr val="666666"/>
                 </a:solidFill>
               </a:rPr>
-              <a:t>13 / 22</a:t>
+              <a:t>14 / 23</a:t>
             </a:r>
           </a:p>
         </p:txBody>
@@ -5978,7 +6280,7 @@
                   <a:srgbClr val="666666"/>
                 </a:solidFill>
               </a:rPr>
-              <a:t>14 / 22</a:t>
+              <a:t>15 / 23</a:t>
             </a:r>
           </a:p>
         </p:txBody>
@@ -6277,7 +6579,7 @@
                   <a:srgbClr val="666666"/>
                 </a:solidFill>
               </a:rPr>
-              <a:t>15 / 22</a:t>
+              <a:t>16 / 23</a:t>
             </a:r>
           </a:p>
         </p:txBody>
@@ -6406,7 +6708,7 @@
                 </a:solidFill>
                 <a:latin typeface="Tahoma"/>
               </a:rPr>
-              <a:t>สรุป</a:t>
+              <a:t>APPENDIX C — PREPROCESSING</a:t>
             </a:r>
           </a:p>
         </p:txBody>
@@ -6440,7 +6742,7 @@
                 </a:solidFill>
                 <a:latin typeface="Tahoma"/>
               </a:rPr>
-              <a:t>สรุปผลและหลักการสำคัญ</a:t>
+              <a:t>Scaler: ปรับสเกลฟีเจอร์ตัวเลข เลือกแบบไหนดี</a:t>
             </a:r>
           </a:p>
         </p:txBody>
@@ -6497,109 +6799,6 @@
         </p:nvSpPr>
         <p:spPr>
           <a:xfrm>
-            <a:off x="548640" y="1554480"/>
-            <a:ext cx="11064240" cy="4846320"/>
-          </a:xfrm>
-          <a:prstGeom prst="rect">
-            <a:avLst/>
-          </a:prstGeom>
-          <a:noFill/>
-        </p:spPr>
-        <p:txBody>
-          <a:bodyPr wrap="square">
-            <a:spAutoFit/>
-          </a:bodyPr>
-          <a:lstStyle/>
-          <a:p>
-            <a:pPr>
-              <a:spcAft>
-                <a:spcPts val="1400"/>
-              </a:spcAft>
-            </a:pPr>
-            <a:r>
-              <a:rPr sz="1700" b="0">
-                <a:solidFill>
-                  <a:srgbClr val="333333"/>
-                </a:solidFill>
-                <a:latin typeface="Tahoma"/>
-              </a:rPr>
-              <a:t>▸ ข้อมูลไม่สมดุล (~12% deposit=yes) → ใช้ class_weight="balanced" และดู ROC-AUC/PR-AUC/F1 ไม่ใช่ accuracy อย่างเดียว</a:t>
-            </a:r>
-          </a:p>
-          <a:p>
-            <a:pPr>
-              <a:spcAft>
-                <a:spcPts val="1400"/>
-              </a:spcAft>
-            </a:pPr>
-            <a:r>
-              <a:rPr sz="1700" b="0">
-                <a:solidFill>
-                  <a:srgbClr val="333333"/>
-                </a:solidFill>
-                <a:latin typeface="Tahoma"/>
-              </a:rPr>
-              <a:t>▸ ตัด duration ออกเพราะรู้ค่าได้หลังโทรเท่านั้น (ยืนยัน leakage ใน Appendix B: +0.107 ROC-AUC ถ้าใส่กลับเข้าไป)</a:t>
-            </a:r>
-          </a:p>
-          <a:p>
-            <a:pPr>
-              <a:spcAft>
-                <a:spcPts val="1400"/>
-              </a:spcAft>
-            </a:pPr>
-            <a:r>
-              <a:rPr sz="1700" b="0">
-                <a:solidFill>
-                  <a:srgbClr val="333333"/>
-                </a:solidFill>
-                <a:latin typeface="Tahoma"/>
-              </a:rPr>
-              <a:t>▸ แบ่ง train/test แบบ time-based ไม่สลับข้อมูล (random split ให้ตัวเลขดูดีเกินจริงถึง +0.124 ROC-AUC)</a:t>
-            </a:r>
-          </a:p>
-          <a:p>
-            <a:pPr>
-              <a:spcAft>
-                <a:spcPts val="1400"/>
-              </a:spcAft>
-            </a:pPr>
-            <a:r>
-              <a:rPr sz="1700" b="0">
-                <a:solidFill>
-                  <a:srgbClr val="333333"/>
-                </a:solidFill>
-                <a:latin typeface="Tahoma"/>
-              </a:rPr>
-              <a:t>▸ เลือกโมเดลจาก TimeSeriesSplit (scheme สมจริงที่สุด) ไม่ใช่จาก shuffle CV ที่ overfit ต่อช่วงเวลา</a:t>
-            </a:r>
-          </a:p>
-          <a:p>
-            <a:pPr>
-              <a:spcAft>
-                <a:spcPts val="1400"/>
-              </a:spcAft>
-            </a:pPr>
-            <a:r>
-              <a:rPr sz="1700" b="0">
-                <a:solidFill>
-                  <a:srgbClr val="333333"/>
-                </a:solidFill>
-                <a:latin typeface="Tahoma"/>
-              </a:rPr>
-              <a:t>▸ Threshold ที่ tune จาก validation ใช้ตรง ๆ กับอนาคตไม่ได้ เพราะสัดส่วนคลาสเปลี่ยนเร็ว (6.7% → 31.6%) ใช้ gains/lift + เหตุผลธุรกิจแทน</a:t>
-            </a:r>
-          </a:p>
-        </p:txBody>
-      </p:sp>
-      <p:sp>
-        <p:nvSpPr>
-          <p:cNvPr id="7" name="TextBox 6"/>
-          <p:cNvSpPr txBox="1"/>
-          <p:nvPr/>
-        </p:nvSpPr>
-        <p:spPr>
-          <a:xfrm>
             <a:off x="11002975" y="6446520"/>
             <a:ext cx="914400" cy="274320"/>
           </a:xfrm>
@@ -6616,804 +6815,12 @@
           <a:p>
             <a:pPr algn="r"/>
             <a:r>
-              <a:rPr sz="1100">
+              <a:rPr sz="1100" b="0">
                 <a:solidFill>
                   <a:srgbClr val="666666"/>
                 </a:solidFill>
               </a:rPr>
-              <a:t>20 / 22</a:t>
-            </a:r>
-          </a:p>
-        </p:txBody>
-      </p:sp>
-      <p:sp>
-        <p:nvSpPr>
-          <p:cNvPr id="8" name="TextBox 7"/>
-          <p:cNvSpPr txBox="1"/>
-          <p:nvPr/>
-        </p:nvSpPr>
-        <p:spPr>
-          <a:xfrm>
-            <a:off x="548640" y="6446520"/>
-            <a:ext cx="4572000" cy="274320"/>
-          </a:xfrm>
-          <a:prstGeom prst="rect">
-            <a:avLst/>
-          </a:prstGeom>
-          <a:noFill/>
-        </p:spPr>
-        <p:txBody>
-          <a:bodyPr wrap="none">
-            <a:spAutoFit/>
-          </a:bodyPr>
-          <a:lstStyle/>
-          <a:p>
-            <a:r>
-              <a:rPr sz="1100">
-                <a:solidFill>
-                  <a:srgbClr val="666666"/>
-                </a:solidFill>
-              </a:rPr>
-              <a:t>Bank Marketing — Term Deposit Prediction</a:t>
-            </a:r>
-          </a:p>
-        </p:txBody>
-      </p:sp>
-    </p:spTree>
-  </p:cSld>
-  <p:clrMapOvr>
-    <a:masterClrMapping/>
-  </p:clrMapOvr>
-</p:sld>
-</file>
-
-<file path=ppt/slides/slide17.xml><?xml version="1.0" encoding="utf-8"?>
-<p:sld xmlns:a="http://schemas.openxmlformats.org/drawingml/2006/main" xmlns:p="http://schemas.openxmlformats.org/presentationml/2006/main" xmlns:r="http://schemas.openxmlformats.org/officeDocument/2006/relationships">
-  <p:cSld>
-    <p:spTree>
-      <p:nvGrpSpPr>
-        <p:cNvPr id="1" name=""/>
-        <p:cNvGrpSpPr/>
-        <p:nvPr/>
-      </p:nvGrpSpPr>
-      <p:grpSpPr/>
-      <p:sp>
-        <p:nvSpPr>
-          <p:cNvPr id="2" name="Rectangle 1"/>
-          <p:cNvSpPr/>
-          <p:nvPr/>
-        </p:nvSpPr>
-        <p:spPr>
-          <a:xfrm>
-            <a:off x="0" y="0"/>
-            <a:ext cx="12191695" cy="6858000"/>
-          </a:xfrm>
-          <a:prstGeom prst="rect">
-            <a:avLst/>
-          </a:prstGeom>
-          <a:solidFill>
-            <a:srgbClr val="FFFFFF"/>
-          </a:solidFill>
-          <a:ln>
-            <a:noFill/>
-          </a:ln>
-          <a:effectLst/>
-        </p:spPr>
-        <p:style>
-          <a:lnRef idx="1">
-            <a:schemeClr val="accent1"/>
-          </a:lnRef>
-          <a:fillRef idx="3">
-            <a:schemeClr val="accent1"/>
-          </a:fillRef>
-          <a:effectRef idx="2">
-            <a:schemeClr val="accent1"/>
-          </a:effectRef>
-          <a:fontRef idx="minor">
-            <a:schemeClr val="lt1"/>
-          </a:fontRef>
-        </p:style>
-        <p:txBody>
-          <a:bodyPr rtlCol="0" anchor="ctr"/>
-          <a:lstStyle/>
-          <a:p>
-            <a:pPr algn="ctr"/>
-          </a:p>
-        </p:txBody>
-      </p:sp>
-      <p:sp>
-        <p:nvSpPr>
-          <p:cNvPr id="3" name="TextBox 2"/>
-          <p:cNvSpPr txBox="1"/>
-          <p:nvPr/>
-        </p:nvSpPr>
-        <p:spPr>
-          <a:xfrm>
-            <a:off x="548640" y="137160"/>
-            <a:ext cx="7315200" cy="320040"/>
-          </a:xfrm>
-          <a:prstGeom prst="rect">
-            <a:avLst/>
-          </a:prstGeom>
-          <a:noFill/>
-        </p:spPr>
-        <p:txBody>
-          <a:bodyPr wrap="none">
-            <a:spAutoFit/>
-          </a:bodyPr>
-          <a:lstStyle/>
-          <a:p>
-            <a:r>
-              <a:rPr sz="1300" b="1">
-                <a:solidFill>
-                  <a:srgbClr val="009E73"/>
-                </a:solidFill>
-                <a:latin typeface="Tahoma"/>
-              </a:rPr>
-              <a:t>ข้อจำกัด &amp; แนวทางต่อยอด</a:t>
-            </a:r>
-          </a:p>
-        </p:txBody>
-      </p:sp>
-      <p:sp>
-        <p:nvSpPr>
-          <p:cNvPr id="4" name="TextBox 3"/>
-          <p:cNvSpPr txBox="1"/>
-          <p:nvPr/>
-        </p:nvSpPr>
-        <p:spPr>
-          <a:xfrm>
-            <a:off x="548640" y="411480"/>
-            <a:ext cx="11094415" cy="822960"/>
-          </a:xfrm>
-          <a:prstGeom prst="rect">
-            <a:avLst/>
-          </a:prstGeom>
-          <a:noFill/>
-        </p:spPr>
-        <p:txBody>
-          <a:bodyPr wrap="square">
-            <a:spAutoFit/>
-          </a:bodyPr>
-          <a:lstStyle/>
-          <a:p>
-            <a:r>
-              <a:rPr sz="3200" b="1">
-                <a:solidFill>
-                  <a:srgbClr val="333333"/>
-                </a:solidFill>
-                <a:latin typeface="Tahoma"/>
-              </a:rPr>
-              <a:t>สิ่งที่ควรรู้ก่อนใช้งานจริง และก้าวต่อไป</a:t>
-            </a:r>
-          </a:p>
-        </p:txBody>
-      </p:sp>
-      <p:sp>
-        <p:nvSpPr>
-          <p:cNvPr id="5" name="Rectangle 4"/>
-          <p:cNvSpPr/>
-          <p:nvPr/>
-        </p:nvSpPr>
-        <p:spPr>
-          <a:xfrm>
-            <a:off x="548640" y="1143000"/>
-            <a:ext cx="1828800" cy="50800"/>
-          </a:xfrm>
-          <a:prstGeom prst="rect">
-            <a:avLst/>
-          </a:prstGeom>
-          <a:solidFill>
-            <a:srgbClr val="009E73"/>
-          </a:solidFill>
-          <a:ln>
-            <a:noFill/>
-          </a:ln>
-          <a:effectLst/>
-        </p:spPr>
-        <p:style>
-          <a:lnRef idx="1">
-            <a:schemeClr val="accent1"/>
-          </a:lnRef>
-          <a:fillRef idx="3">
-            <a:schemeClr val="accent1"/>
-          </a:fillRef>
-          <a:effectRef idx="2">
-            <a:schemeClr val="accent1"/>
-          </a:effectRef>
-          <a:fontRef idx="minor">
-            <a:schemeClr val="lt1"/>
-          </a:fontRef>
-        </p:style>
-        <p:txBody>
-          <a:bodyPr rtlCol="0" anchor="ctr"/>
-          <a:lstStyle/>
-          <a:p>
-            <a:pPr algn="ctr"/>
-          </a:p>
-        </p:txBody>
-      </p:sp>
-      <p:sp>
-        <p:nvSpPr>
-          <p:cNvPr id="6" name="TextBox 5"/>
-          <p:cNvSpPr txBox="1"/>
-          <p:nvPr/>
-        </p:nvSpPr>
-        <p:spPr>
-          <a:xfrm>
-            <a:off x="548640" y="1463040"/>
-            <a:ext cx="5394960" cy="4846320"/>
-          </a:xfrm>
-          <a:prstGeom prst="rect">
-            <a:avLst/>
-          </a:prstGeom>
-          <a:noFill/>
-        </p:spPr>
-        <p:txBody>
-          <a:bodyPr wrap="square">
-            <a:spAutoFit/>
-          </a:bodyPr>
-          <a:lstStyle/>
-          <a:p>
-            <a:r>
-              <a:rPr sz="1800" b="1">
-                <a:solidFill>
-                  <a:srgbClr val="D55E00"/>
-                </a:solidFill>
-                <a:latin typeface="Tahoma"/>
-              </a:rPr>
-              <a:t>ข้อจำกัด</a:t>
-            </a:r>
-          </a:p>
-          <a:p>
-            <a:pPr>
-              <a:spcAft>
-                <a:spcPts val="1000"/>
-              </a:spcAft>
-            </a:pPr>
-            <a:r>
-              <a:rPr sz="1500">
-                <a:solidFill>
-                  <a:srgbClr val="333333"/>
-                </a:solidFill>
-                <a:latin typeface="Tahoma"/>
-              </a:rPr>
-              <a:t>▸ Concept drift: สัดส่วนลูกค้าเปลี่ยนเร็วตามเวลา ต้อง retrain เป็นระยะ</a:t>
-            </a:r>
-          </a:p>
-          <a:p>
-            <a:pPr>
-              <a:spcAft>
-                <a:spcPts val="1000"/>
-              </a:spcAft>
-            </a:pPr>
-            <a:r>
-              <a:rPr sz="1500">
-                <a:solidFill>
-                  <a:srgbClr val="333333"/>
-                </a:solidFill>
-                <a:latin typeface="Tahoma"/>
-              </a:rPr>
-              <a:t>▸ ROC-AUC ~0.68 ยังไม่สูงมาก — เหมาะใช้จัดลำดับความสำคัญ ไม่ใช่ตัดสิน yes/no เด็ดขาด</a:t>
-            </a:r>
-          </a:p>
-          <a:p>
-            <a:pPr>
-              <a:spcAft>
-                <a:spcPts val="1000"/>
-              </a:spcAft>
-            </a:pPr>
-            <a:r>
-              <a:rPr sz="1500">
-                <a:solidFill>
-                  <a:srgbClr val="333333"/>
-                </a:solidFill>
-                <a:latin typeface="Tahoma"/>
-              </a:rPr>
-              <a:t>▸ Threshold คงที่ใช้กับอนาคตไม่ได้ ต้องอิงกราฟ gains/lift + บริบทธุรกิจทุกครั้ง</a:t>
-            </a:r>
-          </a:p>
-        </p:txBody>
-      </p:sp>
-      <p:sp>
-        <p:nvSpPr>
-          <p:cNvPr id="7" name="TextBox 6"/>
-          <p:cNvSpPr txBox="1"/>
-          <p:nvPr/>
-        </p:nvSpPr>
-        <p:spPr>
-          <a:xfrm>
-            <a:off x="6309360" y="1463040"/>
-            <a:ext cx="5394960" cy="4846320"/>
-          </a:xfrm>
-          <a:prstGeom prst="rect">
-            <a:avLst/>
-          </a:prstGeom>
-          <a:noFill/>
-        </p:spPr>
-        <p:txBody>
-          <a:bodyPr wrap="square">
-            <a:spAutoFit/>
-          </a:bodyPr>
-          <a:lstStyle/>
-          <a:p>
-            <a:r>
-              <a:rPr sz="1800" b="1">
-                <a:solidFill>
-                  <a:srgbClr val="009E73"/>
-                </a:solidFill>
-                <a:latin typeface="Tahoma"/>
-              </a:rPr>
-              <a:t>แนวทางต่อยอด</a:t>
-            </a:r>
-          </a:p>
-          <a:p>
-            <a:pPr>
-              <a:spcAft>
-                <a:spcPts val="1000"/>
-              </a:spcAft>
-            </a:pPr>
-            <a:r>
-              <a:rPr sz="1500">
-                <a:solidFill>
-                  <a:srgbClr val="333333"/>
-                </a:solidFill>
-                <a:latin typeface="Tahoma"/>
-              </a:rPr>
-              <a:t>▸ Calibration (CalibratedClassifierCV) ให้ predict_proba สะท้อนความน่าจะเป็นจริง</a:t>
-            </a:r>
-          </a:p>
-          <a:p>
-            <a:pPr>
-              <a:spcAft>
-                <a:spcPts val="1000"/>
-              </a:spcAft>
-            </a:pPr>
-            <a:r>
-              <a:rPr sz="1500">
-                <a:solidFill>
-                  <a:srgbClr val="333333"/>
-                </a:solidFill>
-                <a:latin typeface="Tahoma"/>
-              </a:rPr>
-              <a:t>▸ เพิ่มฟีเจอร์เชิงเวลา/เศรษฐกิจ เช่น อัตราดอกเบี้ยนโยบาย เพื่ออธิบาย drift</a:t>
-            </a:r>
-          </a:p>
-          <a:p>
-            <a:pPr>
-              <a:spcAft>
-                <a:spcPts val="1000"/>
-              </a:spcAft>
-            </a:pPr>
-            <a:r>
-              <a:rPr sz="1500">
-                <a:solidFill>
-                  <a:srgbClr val="333333"/>
-                </a:solidFill>
-                <a:latin typeface="Tahoma"/>
-              </a:rPr>
-              <a:t>▸ Sliding-window retraining แทนการ train ครั้งเดียวด้วยข้อมูลทั้งหมด</a:t>
-            </a:r>
-          </a:p>
-          <a:p>
-            <a:pPr>
-              <a:spcAft>
-                <a:spcPts val="1000"/>
-              </a:spcAft>
-            </a:pPr>
-            <a:r>
-              <a:rPr sz="1500">
-                <a:solidFill>
-                  <a:srgbClr val="333333"/>
-                </a:solidFill>
-                <a:latin typeface="Tahoma"/>
-              </a:rPr>
-              <a:t>▸ Cost-sensitive threshold ผูกกับต้นทุนโทร (c) และมูลค่าลูกค้า (v) จริง</a:t>
-            </a:r>
-          </a:p>
-        </p:txBody>
-      </p:sp>
-      <p:sp>
-        <p:nvSpPr>
-          <p:cNvPr id="8" name="TextBox 7"/>
-          <p:cNvSpPr txBox="1"/>
-          <p:nvPr/>
-        </p:nvSpPr>
-        <p:spPr>
-          <a:xfrm>
-            <a:off x="11002975" y="6446520"/>
-            <a:ext cx="914400" cy="274320"/>
-          </a:xfrm>
-          <a:prstGeom prst="rect">
-            <a:avLst/>
-          </a:prstGeom>
-          <a:noFill/>
-        </p:spPr>
-        <p:txBody>
-          <a:bodyPr wrap="none">
-            <a:spAutoFit/>
-          </a:bodyPr>
-          <a:lstStyle/>
-          <a:p>
-            <a:pPr algn="r"/>
-            <a:r>
-              <a:rPr sz="1100">
-                <a:solidFill>
-                  <a:srgbClr val="666666"/>
-                </a:solidFill>
-              </a:rPr>
-              <a:t>21 / 22</a:t>
-            </a:r>
-          </a:p>
-        </p:txBody>
-      </p:sp>
-      <p:sp>
-        <p:nvSpPr>
-          <p:cNvPr id="9" name="TextBox 8"/>
-          <p:cNvSpPr txBox="1"/>
-          <p:nvPr/>
-        </p:nvSpPr>
-        <p:spPr>
-          <a:xfrm>
-            <a:off x="548640" y="6446520"/>
-            <a:ext cx="4572000" cy="274320"/>
-          </a:xfrm>
-          <a:prstGeom prst="rect">
-            <a:avLst/>
-          </a:prstGeom>
-          <a:noFill/>
-        </p:spPr>
-        <p:txBody>
-          <a:bodyPr wrap="none">
-            <a:spAutoFit/>
-          </a:bodyPr>
-          <a:lstStyle/>
-          <a:p>
-            <a:r>
-              <a:rPr sz="1100">
-                <a:solidFill>
-                  <a:srgbClr val="666666"/>
-                </a:solidFill>
-              </a:rPr>
-              <a:t>Bank Marketing — Term Deposit Prediction</a:t>
-            </a:r>
-          </a:p>
-        </p:txBody>
-      </p:sp>
-    </p:spTree>
-  </p:cSld>
-  <p:clrMapOvr>
-    <a:masterClrMapping/>
-  </p:clrMapOvr>
-</p:sld>
-</file>
-
-<file path=ppt/slides/slide18.xml><?xml version="1.0" encoding="utf-8"?>
-<p:sld xmlns:a="http://schemas.openxmlformats.org/drawingml/2006/main" xmlns:p="http://schemas.openxmlformats.org/presentationml/2006/main" xmlns:r="http://schemas.openxmlformats.org/officeDocument/2006/relationships">
-  <p:cSld>
-    <p:spTree>
-      <p:nvGrpSpPr>
-        <p:cNvPr id="1" name=""/>
-        <p:cNvGrpSpPr/>
-        <p:nvPr/>
-      </p:nvGrpSpPr>
-      <p:grpSpPr/>
-      <p:sp>
-        <p:nvSpPr>
-          <p:cNvPr id="2" name="Rectangle 1"/>
-          <p:cNvSpPr/>
-          <p:nvPr/>
-        </p:nvSpPr>
-        <p:spPr>
-          <a:xfrm>
-            <a:off x="0" y="0"/>
-            <a:ext cx="12191695" cy="6858000"/>
-          </a:xfrm>
-          <a:prstGeom prst="rect">
-            <a:avLst/>
-          </a:prstGeom>
-          <a:solidFill>
-            <a:srgbClr val="333333"/>
-          </a:solidFill>
-          <a:ln>
-            <a:noFill/>
-          </a:ln>
-          <a:effectLst/>
-        </p:spPr>
-        <p:style>
-          <a:lnRef idx="1">
-            <a:schemeClr val="accent1"/>
-          </a:lnRef>
-          <a:fillRef idx="3">
-            <a:schemeClr val="accent1"/>
-          </a:fillRef>
-          <a:effectRef idx="2">
-            <a:schemeClr val="accent1"/>
-          </a:effectRef>
-          <a:fontRef idx="minor">
-            <a:schemeClr val="lt1"/>
-          </a:fontRef>
-        </p:style>
-        <p:txBody>
-          <a:bodyPr rtlCol="0" anchor="ctr"/>
-          <a:lstStyle/>
-          <a:p>
-            <a:pPr algn="ctr"/>
-          </a:p>
-        </p:txBody>
-      </p:sp>
-      <p:sp>
-        <p:nvSpPr>
-          <p:cNvPr id="3" name="TextBox 2"/>
-          <p:cNvSpPr txBox="1"/>
-          <p:nvPr/>
-        </p:nvSpPr>
-        <p:spPr>
-          <a:xfrm>
-            <a:off x="822960" y="2743200"/>
-            <a:ext cx="10515600" cy="1371600"/>
-          </a:xfrm>
-          <a:prstGeom prst="rect">
-            <a:avLst/>
-          </a:prstGeom>
-          <a:noFill/>
-        </p:spPr>
-        <p:txBody>
-          <a:bodyPr wrap="none">
-            <a:spAutoFit/>
-          </a:bodyPr>
-          <a:lstStyle/>
-          <a:p>
-            <a:r>
-              <a:rPr sz="4400" b="1">
-                <a:solidFill>
-                  <a:srgbClr val="FFFFFF"/>
-                </a:solidFill>
-                <a:latin typeface="Tahoma"/>
-              </a:rPr>
-              <a:t>ขอบคุณครับ</a:t>
-            </a:r>
-          </a:p>
-        </p:txBody>
-      </p:sp>
-      <p:sp>
-        <p:nvSpPr>
-          <p:cNvPr id="4" name="TextBox 3"/>
-          <p:cNvSpPr txBox="1"/>
-          <p:nvPr/>
-        </p:nvSpPr>
-        <p:spPr>
-          <a:xfrm>
-            <a:off x="822960" y="3566160"/>
-            <a:ext cx="10515600" cy="548640"/>
-          </a:xfrm>
-          <a:prstGeom prst="rect">
-            <a:avLst/>
-          </a:prstGeom>
-          <a:noFill/>
-        </p:spPr>
-        <p:txBody>
-          <a:bodyPr wrap="none">
-            <a:spAutoFit/>
-          </a:bodyPr>
-          <a:lstStyle/>
-          <a:p>
-            <a:r>
-              <a:rPr sz="1800">
-                <a:solidFill>
-                  <a:srgbClr val="009E73"/>
-                </a:solidFill>
-                <a:latin typeface="Tahoma"/>
-              </a:rPr>
-              <a:t>Q&amp;A — Bank Marketing: Term Deposit Prediction</a:t>
-            </a:r>
-          </a:p>
-        </p:txBody>
-      </p:sp>
-    </p:spTree>
-  </p:cSld>
-  <p:clrMapOvr>
-    <a:masterClrMapping/>
-  </p:clrMapOvr>
-</p:sld>
-</file>
-
-<file path=ppt/slides/slide19.xml><?xml version="1.0" encoding="utf-8"?>
-<p:sld xmlns:a="http://schemas.openxmlformats.org/drawingml/2006/main" xmlns:p="http://schemas.openxmlformats.org/presentationml/2006/main" xmlns:r="http://schemas.openxmlformats.org/officeDocument/2006/relationships">
-  <p:cSld>
-    <p:spTree>
-      <p:nvGrpSpPr>
-        <p:cNvPr id="1" name=""/>
-        <p:cNvGrpSpPr/>
-        <p:nvPr/>
-      </p:nvGrpSpPr>
-      <p:grpSpPr/>
-      <p:sp>
-        <p:nvSpPr>
-          <p:cNvPr id="2" name="Rectangle 1"/>
-          <p:cNvSpPr/>
-          <p:nvPr/>
-        </p:nvSpPr>
-        <p:spPr>
-          <a:xfrm>
-            <a:off x="0" y="0"/>
-            <a:ext cx="12191695" cy="6858000"/>
-          </a:xfrm>
-          <a:prstGeom prst="rect">
-            <a:avLst/>
-          </a:prstGeom>
-          <a:solidFill>
-            <a:srgbClr val="FFFFFF"/>
-          </a:solidFill>
-          <a:ln>
-            <a:noFill/>
-          </a:ln>
-          <a:effectLst/>
-        </p:spPr>
-        <p:style>
-          <a:lnRef idx="1">
-            <a:schemeClr val="accent1"/>
-          </a:lnRef>
-          <a:fillRef idx="3">
-            <a:schemeClr val="accent1"/>
-          </a:fillRef>
-          <a:effectRef idx="2">
-            <a:schemeClr val="accent1"/>
-          </a:effectRef>
-          <a:fontRef idx="minor">
-            <a:schemeClr val="lt1"/>
-          </a:fontRef>
-        </p:style>
-        <p:txBody>
-          <a:bodyPr rtlCol="0" anchor="ctr"/>
-          <a:lstStyle/>
-          <a:p>
-            <a:pPr algn="ctr"/>
-          </a:p>
-        </p:txBody>
-      </p:sp>
-      <p:sp>
-        <p:nvSpPr>
-          <p:cNvPr id="3" name="TextBox 2"/>
-          <p:cNvSpPr txBox="1"/>
-          <p:nvPr/>
-        </p:nvSpPr>
-        <p:spPr>
-          <a:xfrm>
-            <a:off x="548640" y="137160"/>
-            <a:ext cx="7315200" cy="320040"/>
-          </a:xfrm>
-          <a:prstGeom prst="rect">
-            <a:avLst/>
-          </a:prstGeom>
-          <a:noFill/>
-        </p:spPr>
-        <p:txBody>
-          <a:bodyPr wrap="none">
-            <a:spAutoFit/>
-          </a:bodyPr>
-          <a:lstStyle/>
-          <a:p>
-            <a:r>
-              <a:rPr sz="1300" b="1">
-                <a:solidFill>
-                  <a:srgbClr val="009E73"/>
-                </a:solidFill>
-                <a:latin typeface="Tahoma"/>
-              </a:rPr>
-              <a:t>APPENDIX C — PREPROCESSING</a:t>
-            </a:r>
-          </a:p>
-        </p:txBody>
-      </p:sp>
-      <p:sp>
-        <p:nvSpPr>
-          <p:cNvPr id="4" name="TextBox 3"/>
-          <p:cNvSpPr txBox="1"/>
-          <p:nvPr/>
-        </p:nvSpPr>
-        <p:spPr>
-          <a:xfrm>
-            <a:off x="548640" y="411480"/>
-            <a:ext cx="11094415" cy="822960"/>
-          </a:xfrm>
-          <a:prstGeom prst="rect">
-            <a:avLst/>
-          </a:prstGeom>
-          <a:noFill/>
-        </p:spPr>
-        <p:txBody>
-          <a:bodyPr wrap="square">
-            <a:spAutoFit/>
-          </a:bodyPr>
-          <a:lstStyle/>
-          <a:p>
-            <a:r>
-              <a:rPr sz="3200" b="1">
-                <a:solidFill>
-                  <a:srgbClr val="333333"/>
-                </a:solidFill>
-                <a:latin typeface="Tahoma"/>
-              </a:rPr>
-              <a:t>Scaler: ปรับสเกลฟีเจอร์ตัวเลข เลือกแบบไหนดี</a:t>
-            </a:r>
-          </a:p>
-        </p:txBody>
-      </p:sp>
-      <p:sp>
-        <p:nvSpPr>
-          <p:cNvPr id="5" name="Rectangle 4"/>
-          <p:cNvSpPr/>
-          <p:nvPr/>
-        </p:nvSpPr>
-        <p:spPr>
-          <a:xfrm>
-            <a:off x="548640" y="1143000"/>
-            <a:ext cx="1828800" cy="50800"/>
-          </a:xfrm>
-          <a:prstGeom prst="rect">
-            <a:avLst/>
-          </a:prstGeom>
-          <a:solidFill>
-            <a:srgbClr val="009E73"/>
-          </a:solidFill>
-          <a:ln>
-            <a:noFill/>
-          </a:ln>
-          <a:effectLst/>
-        </p:spPr>
-        <p:style>
-          <a:lnRef idx="1">
-            <a:schemeClr val="accent1"/>
-          </a:lnRef>
-          <a:fillRef idx="3">
-            <a:schemeClr val="accent1"/>
-          </a:fillRef>
-          <a:effectRef idx="2">
-            <a:schemeClr val="accent1"/>
-          </a:effectRef>
-          <a:fontRef idx="minor">
-            <a:schemeClr val="lt1"/>
-          </a:fontRef>
-        </p:style>
-        <p:txBody>
-          <a:bodyPr rtlCol="0" anchor="ctr"/>
-          <a:lstStyle/>
-          <a:p>
-            <a:pPr algn="ctr"/>
-          </a:p>
-        </p:txBody>
-      </p:sp>
-      <p:sp>
-        <p:nvSpPr>
-          <p:cNvPr id="6" name="TextBox 5"/>
-          <p:cNvSpPr txBox="1"/>
-          <p:nvPr/>
-        </p:nvSpPr>
-        <p:spPr>
-          <a:xfrm>
-            <a:off x="11002975" y="6446520"/>
-            <a:ext cx="914400" cy="274320"/>
-          </a:xfrm>
-          <a:prstGeom prst="rect">
-            <a:avLst/>
-          </a:prstGeom>
-          <a:noFill/>
-        </p:spPr>
-        <p:txBody>
-          <a:bodyPr wrap="none">
-            <a:spAutoFit/>
-          </a:bodyPr>
-          <a:lstStyle/>
-          <a:p>
-            <a:pPr algn="r"/>
-            <a:r>
-              <a:rPr sz="1100" b="0">
-                <a:solidFill>
-                  <a:srgbClr val="666666"/>
-                </a:solidFill>
-              </a:rPr>
-              <a:t>16 / 22</a:t>
+              <a:t>17 / 23</a:t>
             </a:r>
           </a:p>
         </p:txBody>
@@ -8120,7 +7527,7 @@
 </p:sld>
 </file>
 
-<file path=ppt/slides/slide2.xml><?xml version="1.0" encoding="utf-8"?>
+<file path=ppt/slides/slide17.xml><?xml version="1.0" encoding="utf-8"?>
 <p:sld xmlns:a="http://schemas.openxmlformats.org/drawingml/2006/main" xmlns:p="http://schemas.openxmlformats.org/presentationml/2006/main" xmlns:r="http://schemas.openxmlformats.org/officeDocument/2006/relationships">
   <p:cSld>
     <p:spTree>
@@ -8203,7 +7610,7 @@
                 </a:solidFill>
                 <a:latin typeface="Tahoma"/>
               </a:rPr>
-              <a:t>ภาพรวมโปรเจกต์</a:t>
+              <a:t>APPENDIX D — PREPROCESSING</a:t>
             </a:r>
           </a:p>
         </p:txBody>
@@ -8237,7 +7644,7 @@
                 </a:solidFill>
                 <a:latin typeface="Tahoma"/>
               </a:rPr>
-              <a:t>เป้าหมาย และ แนวทางการทำงาน</a:t>
+              <a:t>Encoding: แปลงข้อมูลประเภท (categorical) เป็นตัวเลข</a:t>
             </a:r>
           </a:p>
         </p:txBody>
@@ -8294,186 +7701,6 @@
         </p:nvSpPr>
         <p:spPr>
           <a:xfrm>
-            <a:off x="548640" y="1463040"/>
-            <a:ext cx="5120640" cy="1463040"/>
-          </a:xfrm>
-          <a:prstGeom prst="rect">
-            <a:avLst/>
-          </a:prstGeom>
-          <a:noFill/>
-        </p:spPr>
-        <p:txBody>
-          <a:bodyPr wrap="square">
-            <a:spAutoFit/>
-          </a:bodyPr>
-          <a:lstStyle/>
-          <a:p>
-            <a:r>
-              <a:rPr sz="1800" b="1">
-                <a:solidFill>
-                  <a:srgbClr val="009E73"/>
-                </a:solidFill>
-                <a:latin typeface="Tahoma"/>
-              </a:rPr>
-              <a:t>เป้าหมาย</a:t>
-            </a:r>
-          </a:p>
-          <a:p>
-            <a:r>
-              <a:rPr sz="1500">
-                <a:solidFill>
-                  <a:srgbClr val="333333"/>
-                </a:solidFill>
-                <a:latin typeface="Tahoma"/>
-              </a:rPr>
-              <a:t>สร้างโมเดลจำแนก (binary classification) ทำนายว่าลูกค้าคนไหนมีแนวโน้มจะ "ฝากประจำ" จากข้อมูลก่อน/ระหว่างแคมเปญการตลาดทางโทรศัพท์</a:t>
-            </a:r>
-          </a:p>
-        </p:txBody>
-      </p:sp>
-      <p:sp>
-        <p:nvSpPr>
-          <p:cNvPr id="7" name="TextBox 6"/>
-          <p:cNvSpPr txBox="1"/>
-          <p:nvPr/>
-        </p:nvSpPr>
-        <p:spPr>
-          <a:xfrm>
-            <a:off x="6035040" y="1371600"/>
-            <a:ext cx="5577840" cy="4846320"/>
-          </a:xfrm>
-          <a:prstGeom prst="rect">
-            <a:avLst/>
-          </a:prstGeom>
-          <a:noFill/>
-        </p:spPr>
-        <p:txBody>
-          <a:bodyPr wrap="square">
-            <a:spAutoFit/>
-          </a:bodyPr>
-          <a:lstStyle/>
-          <a:p>
-            <a:pPr>
-              <a:spcAft>
-                <a:spcPts val="1400"/>
-              </a:spcAft>
-            </a:pPr>
-            <a:r>
-              <a:rPr sz="1600">
-                <a:solidFill>
-                  <a:srgbClr val="333333"/>
-                </a:solidFill>
-                <a:latin typeface="Tahoma"/>
-              </a:rPr>
-              <a:t>1.  สำรวจข้อมูล (EDA) + ตรวจสอบความไม่สมดุลของคลาส</a:t>
-            </a:r>
-          </a:p>
-          <a:p>
-            <a:pPr>
-              <a:spcAft>
-                <a:spcPts val="1400"/>
-              </a:spcAft>
-            </a:pPr>
-            <a:r>
-              <a:rPr sz="1600">
-                <a:solidFill>
-                  <a:srgbClr val="333333"/>
-                </a:solidFill>
-                <a:latin typeface="Tahoma"/>
-              </a:rPr>
-              <a:t>2.  จัดการฟีเจอร์ที่มีปัญหา data leakage (duration)</a:t>
-            </a:r>
-          </a:p>
-          <a:p>
-            <a:pPr>
-              <a:spcAft>
-                <a:spcPts val="1400"/>
-              </a:spcAft>
-            </a:pPr>
-            <a:r>
-              <a:rPr sz="1600">
-                <a:solidFill>
-                  <a:srgbClr val="333333"/>
-                </a:solidFill>
-                <a:latin typeface="Tahoma"/>
-              </a:rPr>
-              <a:t>3.  แบ่ง train/test แบบ time-based (ไม่สลับข้อมูล)</a:t>
-            </a:r>
-          </a:p>
-          <a:p>
-            <a:pPr>
-              <a:spcAft>
-                <a:spcPts val="1400"/>
-              </a:spcAft>
-            </a:pPr>
-            <a:r>
-              <a:rPr sz="1600">
-                <a:solidFill>
-                  <a:srgbClr val="333333"/>
-                </a:solidFill>
-                <a:latin typeface="Tahoma"/>
-              </a:rPr>
-              <a:t>4.  เทียบ 6 โมเดล × 3 รูปแบบ cross-validation</a:t>
-            </a:r>
-          </a:p>
-          <a:p>
-            <a:pPr>
-              <a:spcAft>
-                <a:spcPts val="1400"/>
-              </a:spcAft>
-            </a:pPr>
-            <a:r>
-              <a:rPr sz="1600">
-                <a:solidFill>
-                  <a:srgbClr val="333333"/>
-                </a:solidFill>
-                <a:latin typeface="Tahoma"/>
-              </a:rPr>
-              <a:t>5.  เลือกโมเดลที่ดีที่สุด → ประเมินบน test set จริง</a:t>
-            </a:r>
-          </a:p>
-          <a:p>
-            <a:pPr>
-              <a:spcAft>
-                <a:spcPts val="1400"/>
-              </a:spcAft>
-            </a:pPr>
-            <a:r>
-              <a:rPr sz="1600">
-                <a:solidFill>
-                  <a:srgbClr val="333333"/>
-                </a:solidFill>
-                <a:latin typeface="Tahoma"/>
-              </a:rPr>
-              <a:t>6.  ปรับ decision threshold ตามเป้าหมายธุรกิจ</a:t>
-            </a:r>
-          </a:p>
-          <a:p>
-            <a:pPr>
-              <a:spcAft>
-                <a:spcPts val="1400"/>
-              </a:spcAft>
-            </a:pPr>
-            <a:r>
-              <a:rPr sz="1600">
-                <a:solidFill>
-                  <a:srgbClr val="333333"/>
-                </a:solidFill>
-                <a:latin typeface="Tahoma"/>
-              </a:rPr>
-              <a:t>7.  ตีความโมเดล (feature importance) + สรุปข้อจำกัด</a:t>
-            </a:r>
-          </a:p>
-        </p:txBody>
-      </p:sp>
-      <p:sp>
-        <p:nvSpPr>
-          <p:cNvPr id="8" name="TextBox 7"/>
-          <p:cNvSpPr txBox="1"/>
-          <p:nvPr/>
-        </p:nvSpPr>
-        <p:spPr>
-          <a:xfrm>
             <a:off x="11002975" y="6446520"/>
             <a:ext cx="914400" cy="274320"/>
           </a:xfrm>
@@ -8490,253 +7717,12 @@
           <a:p>
             <a:pPr algn="r"/>
             <a:r>
-              <a:rPr sz="1100">
+              <a:rPr sz="1100" b="0">
                 <a:solidFill>
                   <a:srgbClr val="666666"/>
                 </a:solidFill>
               </a:rPr>
-              <a:t>2 / 22</a:t>
-            </a:r>
-          </a:p>
-        </p:txBody>
-      </p:sp>
-      <p:sp>
-        <p:nvSpPr>
-          <p:cNvPr id="9" name="TextBox 8"/>
-          <p:cNvSpPr txBox="1"/>
-          <p:nvPr/>
-        </p:nvSpPr>
-        <p:spPr>
-          <a:xfrm>
-            <a:off x="548640" y="6446520"/>
-            <a:ext cx="4572000" cy="274320"/>
-          </a:xfrm>
-          <a:prstGeom prst="rect">
-            <a:avLst/>
-          </a:prstGeom>
-          <a:noFill/>
-        </p:spPr>
-        <p:txBody>
-          <a:bodyPr wrap="none">
-            <a:spAutoFit/>
-          </a:bodyPr>
-          <a:lstStyle/>
-          <a:p>
-            <a:r>
-              <a:rPr sz="1100">
-                <a:solidFill>
-                  <a:srgbClr val="666666"/>
-                </a:solidFill>
-              </a:rPr>
-              <a:t>Bank Marketing — Term Deposit Prediction</a:t>
-            </a:r>
-          </a:p>
-        </p:txBody>
-      </p:sp>
-    </p:spTree>
-  </p:cSld>
-  <p:clrMapOvr>
-    <a:masterClrMapping/>
-  </p:clrMapOvr>
-</p:sld>
-</file>
-
-<file path=ppt/slides/slide20.xml><?xml version="1.0" encoding="utf-8"?>
-<p:sld xmlns:a="http://schemas.openxmlformats.org/drawingml/2006/main" xmlns:p="http://schemas.openxmlformats.org/presentationml/2006/main" xmlns:r="http://schemas.openxmlformats.org/officeDocument/2006/relationships">
-  <p:cSld>
-    <p:spTree>
-      <p:nvGrpSpPr>
-        <p:cNvPr id="1" name=""/>
-        <p:cNvGrpSpPr/>
-        <p:nvPr/>
-      </p:nvGrpSpPr>
-      <p:grpSpPr/>
-      <p:sp>
-        <p:nvSpPr>
-          <p:cNvPr id="2" name="Rectangle 1"/>
-          <p:cNvSpPr/>
-          <p:nvPr/>
-        </p:nvSpPr>
-        <p:spPr>
-          <a:xfrm>
-            <a:off x="0" y="0"/>
-            <a:ext cx="12191695" cy="6858000"/>
-          </a:xfrm>
-          <a:prstGeom prst="rect">
-            <a:avLst/>
-          </a:prstGeom>
-          <a:solidFill>
-            <a:srgbClr val="FFFFFF"/>
-          </a:solidFill>
-          <a:ln>
-            <a:noFill/>
-          </a:ln>
-          <a:effectLst/>
-        </p:spPr>
-        <p:style>
-          <a:lnRef idx="1">
-            <a:schemeClr val="accent1"/>
-          </a:lnRef>
-          <a:fillRef idx="3">
-            <a:schemeClr val="accent1"/>
-          </a:fillRef>
-          <a:effectRef idx="2">
-            <a:schemeClr val="accent1"/>
-          </a:effectRef>
-          <a:fontRef idx="minor">
-            <a:schemeClr val="lt1"/>
-          </a:fontRef>
-        </p:style>
-        <p:txBody>
-          <a:bodyPr rtlCol="0" anchor="ctr"/>
-          <a:lstStyle/>
-          <a:p>
-            <a:pPr algn="ctr"/>
-          </a:p>
-        </p:txBody>
-      </p:sp>
-      <p:sp>
-        <p:nvSpPr>
-          <p:cNvPr id="3" name="TextBox 2"/>
-          <p:cNvSpPr txBox="1"/>
-          <p:nvPr/>
-        </p:nvSpPr>
-        <p:spPr>
-          <a:xfrm>
-            <a:off x="548640" y="137160"/>
-            <a:ext cx="7315200" cy="320040"/>
-          </a:xfrm>
-          <a:prstGeom prst="rect">
-            <a:avLst/>
-          </a:prstGeom>
-          <a:noFill/>
-        </p:spPr>
-        <p:txBody>
-          <a:bodyPr wrap="none">
-            <a:spAutoFit/>
-          </a:bodyPr>
-          <a:lstStyle/>
-          <a:p>
-            <a:r>
-              <a:rPr sz="1300" b="1">
-                <a:solidFill>
-                  <a:srgbClr val="009E73"/>
-                </a:solidFill>
-                <a:latin typeface="Tahoma"/>
-              </a:rPr>
-              <a:t>APPENDIX D — PREPROCESSING</a:t>
-            </a:r>
-          </a:p>
-        </p:txBody>
-      </p:sp>
-      <p:sp>
-        <p:nvSpPr>
-          <p:cNvPr id="4" name="TextBox 3"/>
-          <p:cNvSpPr txBox="1"/>
-          <p:nvPr/>
-        </p:nvSpPr>
-        <p:spPr>
-          <a:xfrm>
-            <a:off x="548640" y="411480"/>
-            <a:ext cx="11094415" cy="822960"/>
-          </a:xfrm>
-          <a:prstGeom prst="rect">
-            <a:avLst/>
-          </a:prstGeom>
-          <a:noFill/>
-        </p:spPr>
-        <p:txBody>
-          <a:bodyPr wrap="square">
-            <a:spAutoFit/>
-          </a:bodyPr>
-          <a:lstStyle/>
-          <a:p>
-            <a:r>
-              <a:rPr sz="3200" b="1">
-                <a:solidFill>
-                  <a:srgbClr val="333333"/>
-                </a:solidFill>
-                <a:latin typeface="Tahoma"/>
-              </a:rPr>
-              <a:t>Encoding: แปลงข้อมูลประเภท (categorical) เป็นตัวเลข</a:t>
-            </a:r>
-          </a:p>
-        </p:txBody>
-      </p:sp>
-      <p:sp>
-        <p:nvSpPr>
-          <p:cNvPr id="5" name="Rectangle 4"/>
-          <p:cNvSpPr/>
-          <p:nvPr/>
-        </p:nvSpPr>
-        <p:spPr>
-          <a:xfrm>
-            <a:off x="548640" y="1143000"/>
-            <a:ext cx="1828800" cy="50800"/>
-          </a:xfrm>
-          <a:prstGeom prst="rect">
-            <a:avLst/>
-          </a:prstGeom>
-          <a:solidFill>
-            <a:srgbClr val="009E73"/>
-          </a:solidFill>
-          <a:ln>
-            <a:noFill/>
-          </a:ln>
-          <a:effectLst/>
-        </p:spPr>
-        <p:style>
-          <a:lnRef idx="1">
-            <a:schemeClr val="accent1"/>
-          </a:lnRef>
-          <a:fillRef idx="3">
-            <a:schemeClr val="accent1"/>
-          </a:fillRef>
-          <a:effectRef idx="2">
-            <a:schemeClr val="accent1"/>
-          </a:effectRef>
-          <a:fontRef idx="minor">
-            <a:schemeClr val="lt1"/>
-          </a:fontRef>
-        </p:style>
-        <p:txBody>
-          <a:bodyPr rtlCol="0" anchor="ctr"/>
-          <a:lstStyle/>
-          <a:p>
-            <a:pPr algn="ctr"/>
-          </a:p>
-        </p:txBody>
-      </p:sp>
-      <p:sp>
-        <p:nvSpPr>
-          <p:cNvPr id="6" name="TextBox 5"/>
-          <p:cNvSpPr txBox="1"/>
-          <p:nvPr/>
-        </p:nvSpPr>
-        <p:spPr>
-          <a:xfrm>
-            <a:off x="11002975" y="6446520"/>
-            <a:ext cx="914400" cy="274320"/>
-          </a:xfrm>
-          <a:prstGeom prst="rect">
-            <a:avLst/>
-          </a:prstGeom>
-          <a:noFill/>
-        </p:spPr>
-        <p:txBody>
-          <a:bodyPr wrap="none">
-            <a:spAutoFit/>
-          </a:bodyPr>
-          <a:lstStyle/>
-          <a:p>
-            <a:pPr algn="r"/>
-            <a:r>
-              <a:rPr sz="1100" b="0">
-                <a:solidFill>
-                  <a:srgbClr val="666666"/>
-                </a:solidFill>
-              </a:rPr>
-              <a:t>17 / 22</a:t>
+              <a:t>18 / 23</a:t>
             </a:r>
           </a:p>
         </p:txBody>
@@ -9533,7 +8519,7 @@
 </p:sld>
 </file>
 
-<file path=ppt/slides/slide21.xml><?xml version="1.0" encoding="utf-8"?>
+<file path=ppt/slides/slide18.xml><?xml version="1.0" encoding="utf-8"?>
 <p:sld xmlns:a="http://schemas.openxmlformats.org/drawingml/2006/main" xmlns:p="http://schemas.openxmlformats.org/presentationml/2006/main" xmlns:r="http://schemas.openxmlformats.org/officeDocument/2006/relationships">
   <p:cSld>
     <p:spTree>
@@ -9728,7 +8714,7 @@
                   <a:srgbClr val="666666"/>
                 </a:solidFill>
               </a:rPr>
-              <a:t>18 / 22</a:t>
+              <a:t>19 / 23</a:t>
             </a:r>
           </a:p>
         </p:txBody>
@@ -10787,7 +9773,7 @@
 </p:sld>
 </file>
 
-<file path=ppt/slides/slide22.xml><?xml version="1.0" encoding="utf-8"?>
+<file path=ppt/slides/slide19.xml><?xml version="1.0" encoding="utf-8"?>
 <p:sld xmlns:a="http://schemas.openxmlformats.org/drawingml/2006/main" xmlns:p="http://schemas.openxmlformats.org/presentationml/2006/main" xmlns:r="http://schemas.openxmlformats.org/officeDocument/2006/relationships">
   <p:cSld>
     <p:spTree>
@@ -10982,7 +9968,7 @@
                   <a:srgbClr val="666666"/>
                 </a:solidFill>
               </a:rPr>
-              <a:t>19 / 22</a:t>
+              <a:t>20 / 23</a:t>
             </a:r>
           </a:p>
         </p:txBody>
@@ -11571,6 +10557,2040 @@
 </p:sld>
 </file>
 
+<file path=ppt/slides/slide2.xml><?xml version="1.0" encoding="utf-8"?>
+<p:sld xmlns:a="http://schemas.openxmlformats.org/drawingml/2006/main" xmlns:p="http://schemas.openxmlformats.org/presentationml/2006/main" xmlns:r="http://schemas.openxmlformats.org/officeDocument/2006/relationships">
+  <p:cSld>
+    <p:spTree>
+      <p:nvGrpSpPr>
+        <p:cNvPr id="1" name=""/>
+        <p:cNvGrpSpPr/>
+        <p:nvPr/>
+      </p:nvGrpSpPr>
+      <p:grpSpPr/>
+      <p:sp>
+        <p:nvSpPr>
+          <p:cNvPr id="2" name="Rectangle 1"/>
+          <p:cNvSpPr/>
+          <p:nvPr/>
+        </p:nvSpPr>
+        <p:spPr>
+          <a:xfrm>
+            <a:off x="0" y="0"/>
+            <a:ext cx="12191695" cy="6858000"/>
+          </a:xfrm>
+          <a:prstGeom prst="rect">
+            <a:avLst/>
+          </a:prstGeom>
+          <a:solidFill>
+            <a:srgbClr val="FFFFFF"/>
+          </a:solidFill>
+          <a:ln>
+            <a:noFill/>
+          </a:ln>
+          <a:effectLst/>
+        </p:spPr>
+        <p:style>
+          <a:lnRef idx="1">
+            <a:schemeClr val="accent1"/>
+          </a:lnRef>
+          <a:fillRef idx="3">
+            <a:schemeClr val="accent1"/>
+          </a:fillRef>
+          <a:effectRef idx="2">
+            <a:schemeClr val="accent1"/>
+          </a:effectRef>
+          <a:fontRef idx="minor">
+            <a:schemeClr val="lt1"/>
+          </a:fontRef>
+        </p:style>
+        <p:txBody>
+          <a:bodyPr rtlCol="0" anchor="ctr"/>
+          <a:lstStyle/>
+          <a:p>
+            <a:pPr algn="ctr"/>
+          </a:p>
+        </p:txBody>
+      </p:sp>
+      <p:sp>
+        <p:nvSpPr>
+          <p:cNvPr id="3" name="TextBox 2"/>
+          <p:cNvSpPr txBox="1"/>
+          <p:nvPr/>
+        </p:nvSpPr>
+        <p:spPr>
+          <a:xfrm>
+            <a:off x="548640" y="137160"/>
+            <a:ext cx="7315200" cy="320040"/>
+          </a:xfrm>
+          <a:prstGeom prst="rect">
+            <a:avLst/>
+          </a:prstGeom>
+          <a:noFill/>
+        </p:spPr>
+        <p:txBody>
+          <a:bodyPr wrap="none">
+            <a:spAutoFit/>
+          </a:bodyPr>
+          <a:lstStyle/>
+          <a:p>
+            <a:r>
+              <a:rPr sz="1300" b="1">
+                <a:solidFill>
+                  <a:srgbClr val="009E73"/>
+                </a:solidFill>
+                <a:latin typeface="Tahoma"/>
+              </a:rPr>
+              <a:t>ภาพรวมโปรเจกต์</a:t>
+            </a:r>
+          </a:p>
+        </p:txBody>
+      </p:sp>
+      <p:sp>
+        <p:nvSpPr>
+          <p:cNvPr id="4" name="TextBox 3"/>
+          <p:cNvSpPr txBox="1"/>
+          <p:nvPr/>
+        </p:nvSpPr>
+        <p:spPr>
+          <a:xfrm>
+            <a:off x="548640" y="411480"/>
+            <a:ext cx="11094415" cy="822960"/>
+          </a:xfrm>
+          <a:prstGeom prst="rect">
+            <a:avLst/>
+          </a:prstGeom>
+          <a:noFill/>
+        </p:spPr>
+        <p:txBody>
+          <a:bodyPr wrap="square">
+            <a:spAutoFit/>
+          </a:bodyPr>
+          <a:lstStyle/>
+          <a:p>
+            <a:r>
+              <a:rPr sz="3200" b="1">
+                <a:solidFill>
+                  <a:srgbClr val="333333"/>
+                </a:solidFill>
+                <a:latin typeface="Tahoma"/>
+              </a:rPr>
+              <a:t>เป้าหมาย และ แนวทางการทำงาน</a:t>
+            </a:r>
+          </a:p>
+        </p:txBody>
+      </p:sp>
+      <p:sp>
+        <p:nvSpPr>
+          <p:cNvPr id="5" name="Rectangle 4"/>
+          <p:cNvSpPr/>
+          <p:nvPr/>
+        </p:nvSpPr>
+        <p:spPr>
+          <a:xfrm>
+            <a:off x="548640" y="1143000"/>
+            <a:ext cx="1828800" cy="50800"/>
+          </a:xfrm>
+          <a:prstGeom prst="rect">
+            <a:avLst/>
+          </a:prstGeom>
+          <a:solidFill>
+            <a:srgbClr val="009E73"/>
+          </a:solidFill>
+          <a:ln>
+            <a:noFill/>
+          </a:ln>
+          <a:effectLst/>
+        </p:spPr>
+        <p:style>
+          <a:lnRef idx="1">
+            <a:schemeClr val="accent1"/>
+          </a:lnRef>
+          <a:fillRef idx="3">
+            <a:schemeClr val="accent1"/>
+          </a:fillRef>
+          <a:effectRef idx="2">
+            <a:schemeClr val="accent1"/>
+          </a:effectRef>
+          <a:fontRef idx="minor">
+            <a:schemeClr val="lt1"/>
+          </a:fontRef>
+        </p:style>
+        <p:txBody>
+          <a:bodyPr rtlCol="0" anchor="ctr"/>
+          <a:lstStyle/>
+          <a:p>
+            <a:pPr algn="ctr"/>
+          </a:p>
+        </p:txBody>
+      </p:sp>
+      <p:sp>
+        <p:nvSpPr>
+          <p:cNvPr id="6" name="TextBox 5"/>
+          <p:cNvSpPr txBox="1"/>
+          <p:nvPr/>
+        </p:nvSpPr>
+        <p:spPr>
+          <a:xfrm>
+            <a:off x="548640" y="1463040"/>
+            <a:ext cx="5120640" cy="1463040"/>
+          </a:xfrm>
+          <a:prstGeom prst="rect">
+            <a:avLst/>
+          </a:prstGeom>
+          <a:noFill/>
+        </p:spPr>
+        <p:txBody>
+          <a:bodyPr wrap="square">
+            <a:spAutoFit/>
+          </a:bodyPr>
+          <a:lstStyle/>
+          <a:p>
+            <a:r>
+              <a:rPr sz="1800" b="1">
+                <a:solidFill>
+                  <a:srgbClr val="009E73"/>
+                </a:solidFill>
+                <a:latin typeface="Tahoma"/>
+              </a:rPr>
+              <a:t>เป้าหมาย</a:t>
+            </a:r>
+          </a:p>
+          <a:p>
+            <a:r>
+              <a:rPr sz="1500">
+                <a:solidFill>
+                  <a:srgbClr val="333333"/>
+                </a:solidFill>
+                <a:latin typeface="Tahoma"/>
+              </a:rPr>
+              <a:t>สร้างโมเดลจำแนก (binary classification) ทำนายว่าลูกค้าคนไหนมีแนวโน้มจะ "ฝากประจำ" จากข้อมูลก่อน/ระหว่างแคมเปญการตลาดทางโทรศัพท์</a:t>
+            </a:r>
+          </a:p>
+        </p:txBody>
+      </p:sp>
+      <p:sp>
+        <p:nvSpPr>
+          <p:cNvPr id="7" name="TextBox 6"/>
+          <p:cNvSpPr txBox="1"/>
+          <p:nvPr/>
+        </p:nvSpPr>
+        <p:spPr>
+          <a:xfrm>
+            <a:off x="6035040" y="1371600"/>
+            <a:ext cx="5577840" cy="4846320"/>
+          </a:xfrm>
+          <a:prstGeom prst="rect">
+            <a:avLst/>
+          </a:prstGeom>
+          <a:noFill/>
+        </p:spPr>
+        <p:txBody>
+          <a:bodyPr wrap="square">
+            <a:spAutoFit/>
+          </a:bodyPr>
+          <a:lstStyle/>
+          <a:p>
+            <a:pPr>
+              <a:spcAft>
+                <a:spcPts val="1400"/>
+              </a:spcAft>
+            </a:pPr>
+            <a:r>
+              <a:rPr sz="1600">
+                <a:solidFill>
+                  <a:srgbClr val="333333"/>
+                </a:solidFill>
+                <a:latin typeface="Tahoma"/>
+              </a:rPr>
+              <a:t>1.  สำรวจข้อมูล (EDA) + ตรวจสอบความไม่สมดุลของคลาส</a:t>
+            </a:r>
+          </a:p>
+          <a:p>
+            <a:pPr>
+              <a:spcAft>
+                <a:spcPts val="1400"/>
+              </a:spcAft>
+            </a:pPr>
+            <a:r>
+              <a:rPr sz="1600">
+                <a:solidFill>
+                  <a:srgbClr val="333333"/>
+                </a:solidFill>
+                <a:latin typeface="Tahoma"/>
+              </a:rPr>
+              <a:t>2.  จัดการฟีเจอร์ที่มีปัญหา data leakage (duration)</a:t>
+            </a:r>
+          </a:p>
+          <a:p>
+            <a:pPr>
+              <a:spcAft>
+                <a:spcPts val="1400"/>
+              </a:spcAft>
+            </a:pPr>
+            <a:r>
+              <a:rPr sz="1600">
+                <a:solidFill>
+                  <a:srgbClr val="333333"/>
+                </a:solidFill>
+                <a:latin typeface="Tahoma"/>
+              </a:rPr>
+              <a:t>3.  แบ่ง train/test แบบ time-based (ไม่สลับข้อมูล)</a:t>
+            </a:r>
+          </a:p>
+          <a:p>
+            <a:pPr>
+              <a:spcAft>
+                <a:spcPts val="1400"/>
+              </a:spcAft>
+            </a:pPr>
+            <a:r>
+              <a:rPr sz="1600">
+                <a:solidFill>
+                  <a:srgbClr val="333333"/>
+                </a:solidFill>
+                <a:latin typeface="Tahoma"/>
+              </a:rPr>
+              <a:t>4.  เทียบ 6 โมเดล × 3 รูปแบบ cross-validation</a:t>
+            </a:r>
+          </a:p>
+          <a:p>
+            <a:pPr>
+              <a:spcAft>
+                <a:spcPts val="1400"/>
+              </a:spcAft>
+            </a:pPr>
+            <a:r>
+              <a:rPr sz="1600">
+                <a:solidFill>
+                  <a:srgbClr val="333333"/>
+                </a:solidFill>
+                <a:latin typeface="Tahoma"/>
+              </a:rPr>
+              <a:t>5.  เลือกโมเดลที่ดีที่สุด → ประเมินบน test set จริง</a:t>
+            </a:r>
+          </a:p>
+          <a:p>
+            <a:pPr>
+              <a:spcAft>
+                <a:spcPts val="1400"/>
+              </a:spcAft>
+            </a:pPr>
+            <a:r>
+              <a:rPr sz="1600">
+                <a:solidFill>
+                  <a:srgbClr val="333333"/>
+                </a:solidFill>
+                <a:latin typeface="Tahoma"/>
+              </a:rPr>
+              <a:t>6.  ปรับ decision threshold ตามเป้าหมายธุรกิจ</a:t>
+            </a:r>
+          </a:p>
+          <a:p>
+            <a:pPr>
+              <a:spcAft>
+                <a:spcPts val="1400"/>
+              </a:spcAft>
+            </a:pPr>
+            <a:r>
+              <a:rPr sz="1600">
+                <a:solidFill>
+                  <a:srgbClr val="333333"/>
+                </a:solidFill>
+                <a:latin typeface="Tahoma"/>
+              </a:rPr>
+              <a:t>7.  ตีความโมเดล (feature importance) + สรุปข้อจำกัด</a:t>
+            </a:r>
+          </a:p>
+        </p:txBody>
+      </p:sp>
+      <p:sp>
+        <p:nvSpPr>
+          <p:cNvPr id="8" name="TextBox 7"/>
+          <p:cNvSpPr txBox="1"/>
+          <p:nvPr/>
+        </p:nvSpPr>
+        <p:spPr>
+          <a:xfrm>
+            <a:off x="11002975" y="6446520"/>
+            <a:ext cx="914400" cy="274320"/>
+          </a:xfrm>
+          <a:prstGeom prst="rect">
+            <a:avLst/>
+          </a:prstGeom>
+          <a:noFill/>
+        </p:spPr>
+        <p:txBody>
+          <a:bodyPr wrap="none">
+            <a:spAutoFit/>
+          </a:bodyPr>
+          <a:lstStyle/>
+          <a:p>
+            <a:pPr algn="r"/>
+            <a:r>
+              <a:rPr sz="1100">
+                <a:solidFill>
+                  <a:srgbClr val="666666"/>
+                </a:solidFill>
+              </a:rPr>
+              <a:t>2 / 23</a:t>
+            </a:r>
+          </a:p>
+        </p:txBody>
+      </p:sp>
+      <p:sp>
+        <p:nvSpPr>
+          <p:cNvPr id="9" name="TextBox 8"/>
+          <p:cNvSpPr txBox="1"/>
+          <p:nvPr/>
+        </p:nvSpPr>
+        <p:spPr>
+          <a:xfrm>
+            <a:off x="548640" y="6446520"/>
+            <a:ext cx="4572000" cy="274320"/>
+          </a:xfrm>
+          <a:prstGeom prst="rect">
+            <a:avLst/>
+          </a:prstGeom>
+          <a:noFill/>
+        </p:spPr>
+        <p:txBody>
+          <a:bodyPr wrap="none">
+            <a:spAutoFit/>
+          </a:bodyPr>
+          <a:lstStyle/>
+          <a:p>
+            <a:r>
+              <a:rPr sz="1100">
+                <a:solidFill>
+                  <a:srgbClr val="666666"/>
+                </a:solidFill>
+              </a:rPr>
+              <a:t>Bank Marketing — Term Deposit Prediction</a:t>
+            </a:r>
+          </a:p>
+        </p:txBody>
+      </p:sp>
+    </p:spTree>
+  </p:cSld>
+  <p:clrMapOvr>
+    <a:masterClrMapping/>
+  </p:clrMapOvr>
+</p:sld>
+</file>
+
+<file path=ppt/slides/slide20.xml><?xml version="1.0" encoding="utf-8"?>
+<p:sld xmlns:a="http://schemas.openxmlformats.org/drawingml/2006/main" xmlns:p="http://schemas.openxmlformats.org/presentationml/2006/main" xmlns:r="http://schemas.openxmlformats.org/officeDocument/2006/relationships">
+  <p:cSld>
+    <p:spTree>
+      <p:nvGrpSpPr>
+        <p:cNvPr id="1" name=""/>
+        <p:cNvGrpSpPr/>
+        <p:nvPr/>
+      </p:nvGrpSpPr>
+      <p:grpSpPr/>
+      <p:sp>
+        <p:nvSpPr>
+          <p:cNvPr id="2" name="Rectangle 1"/>
+          <p:cNvSpPr/>
+          <p:nvPr/>
+        </p:nvSpPr>
+        <p:spPr>
+          <a:xfrm>
+            <a:off x="0" y="0"/>
+            <a:ext cx="12191695" cy="6858000"/>
+          </a:xfrm>
+          <a:prstGeom prst="rect">
+            <a:avLst/>
+          </a:prstGeom>
+          <a:solidFill>
+            <a:srgbClr val="FFFFFF"/>
+          </a:solidFill>
+          <a:ln>
+            <a:noFill/>
+          </a:ln>
+          <a:effectLst/>
+        </p:spPr>
+        <p:style>
+          <a:lnRef idx="1">
+            <a:schemeClr val="accent1"/>
+          </a:lnRef>
+          <a:fillRef idx="3">
+            <a:schemeClr val="accent1"/>
+          </a:fillRef>
+          <a:effectRef idx="2">
+            <a:schemeClr val="accent1"/>
+          </a:effectRef>
+          <a:fontRef idx="minor">
+            <a:schemeClr val="lt1"/>
+          </a:fontRef>
+        </p:style>
+        <p:txBody>
+          <a:bodyPr rtlCol="0" anchor="ctr"/>
+          <a:lstStyle/>
+          <a:p>
+            <a:pPr algn="ctr"/>
+          </a:p>
+        </p:txBody>
+      </p:sp>
+      <p:sp>
+        <p:nvSpPr>
+          <p:cNvPr id="3" name="TextBox 2"/>
+          <p:cNvSpPr txBox="1"/>
+          <p:nvPr/>
+        </p:nvSpPr>
+        <p:spPr>
+          <a:xfrm>
+            <a:off x="548640" y="137160"/>
+            <a:ext cx="7315200" cy="320040"/>
+          </a:xfrm>
+          <a:prstGeom prst="rect">
+            <a:avLst/>
+          </a:prstGeom>
+          <a:noFill/>
+        </p:spPr>
+        <p:txBody>
+          <a:bodyPr wrap="none">
+            <a:spAutoFit/>
+          </a:bodyPr>
+          <a:lstStyle/>
+          <a:p>
+            <a:r>
+              <a:rPr sz="1300" b="1">
+                <a:solidFill>
+                  <a:srgbClr val="009E73"/>
+                </a:solidFill>
+                <a:latin typeface="Tahoma"/>
+              </a:rPr>
+              <a:t>สรุป</a:t>
+            </a:r>
+          </a:p>
+        </p:txBody>
+      </p:sp>
+      <p:sp>
+        <p:nvSpPr>
+          <p:cNvPr id="4" name="TextBox 3"/>
+          <p:cNvSpPr txBox="1"/>
+          <p:nvPr/>
+        </p:nvSpPr>
+        <p:spPr>
+          <a:xfrm>
+            <a:off x="548640" y="411480"/>
+            <a:ext cx="11094415" cy="822960"/>
+          </a:xfrm>
+          <a:prstGeom prst="rect">
+            <a:avLst/>
+          </a:prstGeom>
+          <a:noFill/>
+        </p:spPr>
+        <p:txBody>
+          <a:bodyPr wrap="square">
+            <a:spAutoFit/>
+          </a:bodyPr>
+          <a:lstStyle/>
+          <a:p>
+            <a:r>
+              <a:rPr sz="3200" b="1">
+                <a:solidFill>
+                  <a:srgbClr val="333333"/>
+                </a:solidFill>
+                <a:latin typeface="Tahoma"/>
+              </a:rPr>
+              <a:t>สรุปผลและหลักการสำคัญ</a:t>
+            </a:r>
+          </a:p>
+        </p:txBody>
+      </p:sp>
+      <p:sp>
+        <p:nvSpPr>
+          <p:cNvPr id="5" name="Rectangle 4"/>
+          <p:cNvSpPr/>
+          <p:nvPr/>
+        </p:nvSpPr>
+        <p:spPr>
+          <a:xfrm>
+            <a:off x="548640" y="1143000"/>
+            <a:ext cx="1828800" cy="50800"/>
+          </a:xfrm>
+          <a:prstGeom prst="rect">
+            <a:avLst/>
+          </a:prstGeom>
+          <a:solidFill>
+            <a:srgbClr val="009E73"/>
+          </a:solidFill>
+          <a:ln>
+            <a:noFill/>
+          </a:ln>
+          <a:effectLst/>
+        </p:spPr>
+        <p:style>
+          <a:lnRef idx="1">
+            <a:schemeClr val="accent1"/>
+          </a:lnRef>
+          <a:fillRef idx="3">
+            <a:schemeClr val="accent1"/>
+          </a:fillRef>
+          <a:effectRef idx="2">
+            <a:schemeClr val="accent1"/>
+          </a:effectRef>
+          <a:fontRef idx="minor">
+            <a:schemeClr val="lt1"/>
+          </a:fontRef>
+        </p:style>
+        <p:txBody>
+          <a:bodyPr rtlCol="0" anchor="ctr"/>
+          <a:lstStyle/>
+          <a:p>
+            <a:pPr algn="ctr"/>
+          </a:p>
+        </p:txBody>
+      </p:sp>
+      <p:sp>
+        <p:nvSpPr>
+          <p:cNvPr id="6" name="TextBox 5"/>
+          <p:cNvSpPr txBox="1"/>
+          <p:nvPr/>
+        </p:nvSpPr>
+        <p:spPr>
+          <a:xfrm>
+            <a:off x="548640" y="1554480"/>
+            <a:ext cx="11064240" cy="4846320"/>
+          </a:xfrm>
+          <a:prstGeom prst="rect">
+            <a:avLst/>
+          </a:prstGeom>
+          <a:noFill/>
+        </p:spPr>
+        <p:txBody>
+          <a:bodyPr wrap="square">
+            <a:spAutoFit/>
+          </a:bodyPr>
+          <a:lstStyle/>
+          <a:p>
+            <a:pPr>
+              <a:spcAft>
+                <a:spcPts val="1400"/>
+              </a:spcAft>
+            </a:pPr>
+            <a:r>
+              <a:rPr sz="1700" b="0">
+                <a:solidFill>
+                  <a:srgbClr val="333333"/>
+                </a:solidFill>
+                <a:latin typeface="Tahoma"/>
+              </a:rPr>
+              <a:t>▸ ข้อมูลไม่สมดุล (~12% deposit=yes) → ใช้ class_weight="balanced" และดู ROC-AUC/PR-AUC/F1 ไม่ใช่ accuracy อย่างเดียว</a:t>
+            </a:r>
+          </a:p>
+          <a:p>
+            <a:pPr>
+              <a:spcAft>
+                <a:spcPts val="1400"/>
+              </a:spcAft>
+            </a:pPr>
+            <a:r>
+              <a:rPr sz="1700" b="0">
+                <a:solidFill>
+                  <a:srgbClr val="333333"/>
+                </a:solidFill>
+                <a:latin typeface="Tahoma"/>
+              </a:rPr>
+              <a:t>▸ ตัด duration ออกเพราะรู้ค่าได้หลังโทรเท่านั้น (ยืนยัน leakage ใน Appendix B: +0.107 ROC-AUC ถ้าใส่กลับเข้าไป)</a:t>
+            </a:r>
+          </a:p>
+          <a:p>
+            <a:pPr>
+              <a:spcAft>
+                <a:spcPts val="1400"/>
+              </a:spcAft>
+            </a:pPr>
+            <a:r>
+              <a:rPr sz="1700" b="0">
+                <a:solidFill>
+                  <a:srgbClr val="333333"/>
+                </a:solidFill>
+                <a:latin typeface="Tahoma"/>
+              </a:rPr>
+              <a:t>▸ แบ่ง train/test แบบ time-based ไม่สลับข้อมูล (random split ให้ตัวเลขดูดีเกินจริงถึง +0.124 ROC-AUC)</a:t>
+            </a:r>
+          </a:p>
+          <a:p>
+            <a:pPr>
+              <a:spcAft>
+                <a:spcPts val="1400"/>
+              </a:spcAft>
+            </a:pPr>
+            <a:r>
+              <a:rPr sz="1700" b="0">
+                <a:solidFill>
+                  <a:srgbClr val="333333"/>
+                </a:solidFill>
+                <a:latin typeface="Tahoma"/>
+              </a:rPr>
+              <a:t>▸ เลือกโมเดลจาก TimeSeriesSplit (scheme สมจริงที่สุด) ไม่ใช่จาก shuffle CV ที่ overfit ต่อช่วงเวลา</a:t>
+            </a:r>
+          </a:p>
+          <a:p>
+            <a:pPr>
+              <a:spcAft>
+                <a:spcPts val="1400"/>
+              </a:spcAft>
+            </a:pPr>
+            <a:r>
+              <a:rPr sz="1700" b="0">
+                <a:solidFill>
+                  <a:srgbClr val="333333"/>
+                </a:solidFill>
+                <a:latin typeface="Tahoma"/>
+              </a:rPr>
+              <a:t>▸ Threshold ที่ tune จาก validation ใช้ตรง ๆ กับอนาคตไม่ได้ เพราะสัดส่วนคลาสเปลี่ยนเร็ว (6.7% → 31.6%) ใช้ gains/lift + เหตุผลธุรกิจแทน</a:t>
+            </a:r>
+          </a:p>
+        </p:txBody>
+      </p:sp>
+      <p:sp>
+        <p:nvSpPr>
+          <p:cNvPr id="7" name="TextBox 6"/>
+          <p:cNvSpPr txBox="1"/>
+          <p:nvPr/>
+        </p:nvSpPr>
+        <p:spPr>
+          <a:xfrm>
+            <a:off x="11002975" y="6446520"/>
+            <a:ext cx="914400" cy="274320"/>
+          </a:xfrm>
+          <a:prstGeom prst="rect">
+            <a:avLst/>
+          </a:prstGeom>
+          <a:noFill/>
+        </p:spPr>
+        <p:txBody>
+          <a:bodyPr wrap="none">
+            <a:spAutoFit/>
+          </a:bodyPr>
+          <a:lstStyle/>
+          <a:p>
+            <a:pPr algn="r"/>
+            <a:r>
+              <a:rPr sz="1100">
+                <a:solidFill>
+                  <a:srgbClr val="666666"/>
+                </a:solidFill>
+              </a:rPr>
+              <a:t>21 / 23</a:t>
+            </a:r>
+          </a:p>
+        </p:txBody>
+      </p:sp>
+      <p:sp>
+        <p:nvSpPr>
+          <p:cNvPr id="8" name="TextBox 7"/>
+          <p:cNvSpPr txBox="1"/>
+          <p:nvPr/>
+        </p:nvSpPr>
+        <p:spPr>
+          <a:xfrm>
+            <a:off x="548640" y="6446520"/>
+            <a:ext cx="4572000" cy="274320"/>
+          </a:xfrm>
+          <a:prstGeom prst="rect">
+            <a:avLst/>
+          </a:prstGeom>
+          <a:noFill/>
+        </p:spPr>
+        <p:txBody>
+          <a:bodyPr wrap="none">
+            <a:spAutoFit/>
+          </a:bodyPr>
+          <a:lstStyle/>
+          <a:p>
+            <a:r>
+              <a:rPr sz="1100">
+                <a:solidFill>
+                  <a:srgbClr val="666666"/>
+                </a:solidFill>
+              </a:rPr>
+              <a:t>Bank Marketing — Term Deposit Prediction</a:t>
+            </a:r>
+          </a:p>
+        </p:txBody>
+      </p:sp>
+    </p:spTree>
+  </p:cSld>
+  <p:clrMapOvr>
+    <a:masterClrMapping/>
+  </p:clrMapOvr>
+</p:sld>
+</file>
+
+<file path=ppt/slides/slide21.xml><?xml version="1.0" encoding="utf-8"?>
+<p:sld xmlns:a="http://schemas.openxmlformats.org/drawingml/2006/main" xmlns:p="http://schemas.openxmlformats.org/presentationml/2006/main" xmlns:r="http://schemas.openxmlformats.org/officeDocument/2006/relationships">
+  <p:cSld>
+    <p:spTree>
+      <p:nvGrpSpPr>
+        <p:cNvPr id="1" name=""/>
+        <p:cNvGrpSpPr/>
+        <p:nvPr/>
+      </p:nvGrpSpPr>
+      <p:grpSpPr/>
+      <p:sp>
+        <p:nvSpPr>
+          <p:cNvPr id="2" name="Rectangle 1"/>
+          <p:cNvSpPr/>
+          <p:nvPr/>
+        </p:nvSpPr>
+        <p:spPr>
+          <a:xfrm>
+            <a:off x="0" y="0"/>
+            <a:ext cx="12191695" cy="6858000"/>
+          </a:xfrm>
+          <a:prstGeom prst="rect">
+            <a:avLst/>
+          </a:prstGeom>
+          <a:solidFill>
+            <a:srgbClr val="FFFFFF"/>
+          </a:solidFill>
+          <a:ln>
+            <a:noFill/>
+          </a:ln>
+          <a:effectLst/>
+        </p:spPr>
+        <p:style>
+          <a:lnRef idx="1">
+            <a:schemeClr val="accent1"/>
+          </a:lnRef>
+          <a:fillRef idx="3">
+            <a:schemeClr val="accent1"/>
+          </a:fillRef>
+          <a:effectRef idx="2">
+            <a:schemeClr val="accent1"/>
+          </a:effectRef>
+          <a:fontRef idx="minor">
+            <a:schemeClr val="lt1"/>
+          </a:fontRef>
+        </p:style>
+        <p:txBody>
+          <a:bodyPr rtlCol="0" anchor="ctr"/>
+          <a:lstStyle/>
+          <a:p>
+            <a:pPr algn="ctr"/>
+          </a:p>
+        </p:txBody>
+      </p:sp>
+      <p:sp>
+        <p:nvSpPr>
+          <p:cNvPr id="3" name="TextBox 2"/>
+          <p:cNvSpPr txBox="1"/>
+          <p:nvPr/>
+        </p:nvSpPr>
+        <p:spPr>
+          <a:xfrm>
+            <a:off x="548640" y="137160"/>
+            <a:ext cx="7315200" cy="320040"/>
+          </a:xfrm>
+          <a:prstGeom prst="rect">
+            <a:avLst/>
+          </a:prstGeom>
+          <a:noFill/>
+        </p:spPr>
+        <p:txBody>
+          <a:bodyPr wrap="none">
+            <a:spAutoFit/>
+          </a:bodyPr>
+          <a:lstStyle/>
+          <a:p>
+            <a:r>
+              <a:rPr sz="1300" b="1">
+                <a:solidFill>
+                  <a:srgbClr val="009E73"/>
+                </a:solidFill>
+                <a:latin typeface="Tahoma"/>
+              </a:rPr>
+              <a:t>ข้อจำกัด &amp; แนวทางต่อยอด</a:t>
+            </a:r>
+          </a:p>
+        </p:txBody>
+      </p:sp>
+      <p:sp>
+        <p:nvSpPr>
+          <p:cNvPr id="4" name="TextBox 3"/>
+          <p:cNvSpPr txBox="1"/>
+          <p:nvPr/>
+        </p:nvSpPr>
+        <p:spPr>
+          <a:xfrm>
+            <a:off x="548640" y="411480"/>
+            <a:ext cx="11094415" cy="822960"/>
+          </a:xfrm>
+          <a:prstGeom prst="rect">
+            <a:avLst/>
+          </a:prstGeom>
+          <a:noFill/>
+        </p:spPr>
+        <p:txBody>
+          <a:bodyPr wrap="square">
+            <a:spAutoFit/>
+          </a:bodyPr>
+          <a:lstStyle/>
+          <a:p>
+            <a:r>
+              <a:rPr sz="3200" b="1">
+                <a:solidFill>
+                  <a:srgbClr val="333333"/>
+                </a:solidFill>
+                <a:latin typeface="Tahoma"/>
+              </a:rPr>
+              <a:t>สิ่งที่ควรรู้ก่อนใช้งานจริง และก้าวต่อไป</a:t>
+            </a:r>
+          </a:p>
+        </p:txBody>
+      </p:sp>
+      <p:sp>
+        <p:nvSpPr>
+          <p:cNvPr id="5" name="Rectangle 4"/>
+          <p:cNvSpPr/>
+          <p:nvPr/>
+        </p:nvSpPr>
+        <p:spPr>
+          <a:xfrm>
+            <a:off x="548640" y="1143000"/>
+            <a:ext cx="1828800" cy="50800"/>
+          </a:xfrm>
+          <a:prstGeom prst="rect">
+            <a:avLst/>
+          </a:prstGeom>
+          <a:solidFill>
+            <a:srgbClr val="009E73"/>
+          </a:solidFill>
+          <a:ln>
+            <a:noFill/>
+          </a:ln>
+          <a:effectLst/>
+        </p:spPr>
+        <p:style>
+          <a:lnRef idx="1">
+            <a:schemeClr val="accent1"/>
+          </a:lnRef>
+          <a:fillRef idx="3">
+            <a:schemeClr val="accent1"/>
+          </a:fillRef>
+          <a:effectRef idx="2">
+            <a:schemeClr val="accent1"/>
+          </a:effectRef>
+          <a:fontRef idx="minor">
+            <a:schemeClr val="lt1"/>
+          </a:fontRef>
+        </p:style>
+        <p:txBody>
+          <a:bodyPr rtlCol="0" anchor="ctr"/>
+          <a:lstStyle/>
+          <a:p>
+            <a:pPr algn="ctr"/>
+          </a:p>
+        </p:txBody>
+      </p:sp>
+      <p:sp>
+        <p:nvSpPr>
+          <p:cNvPr id="6" name="TextBox 5"/>
+          <p:cNvSpPr txBox="1"/>
+          <p:nvPr/>
+        </p:nvSpPr>
+        <p:spPr>
+          <a:xfrm>
+            <a:off x="548640" y="1463040"/>
+            <a:ext cx="5394960" cy="4846320"/>
+          </a:xfrm>
+          <a:prstGeom prst="rect">
+            <a:avLst/>
+          </a:prstGeom>
+          <a:noFill/>
+        </p:spPr>
+        <p:txBody>
+          <a:bodyPr wrap="square">
+            <a:spAutoFit/>
+          </a:bodyPr>
+          <a:lstStyle/>
+          <a:p>
+            <a:r>
+              <a:rPr sz="1800" b="1">
+                <a:solidFill>
+                  <a:srgbClr val="D55E00"/>
+                </a:solidFill>
+                <a:latin typeface="Tahoma"/>
+              </a:rPr>
+              <a:t>ข้อจำกัด</a:t>
+            </a:r>
+          </a:p>
+          <a:p>
+            <a:pPr>
+              <a:spcAft>
+                <a:spcPts val="1000"/>
+              </a:spcAft>
+            </a:pPr>
+            <a:r>
+              <a:rPr sz="1500">
+                <a:solidFill>
+                  <a:srgbClr val="333333"/>
+                </a:solidFill>
+                <a:latin typeface="Tahoma"/>
+              </a:rPr>
+              <a:t>▸ Concept drift: สัดส่วนลูกค้าเปลี่ยนเร็วตามเวลา ต้อง retrain เป็นระยะ</a:t>
+            </a:r>
+          </a:p>
+          <a:p>
+            <a:pPr>
+              <a:spcAft>
+                <a:spcPts val="1000"/>
+              </a:spcAft>
+            </a:pPr>
+            <a:r>
+              <a:rPr sz="1500">
+                <a:solidFill>
+                  <a:srgbClr val="333333"/>
+                </a:solidFill>
+                <a:latin typeface="Tahoma"/>
+              </a:rPr>
+              <a:t>▸ ROC-AUC ~0.68 ยังไม่สูงมาก — เหมาะใช้จัดลำดับความสำคัญ ไม่ใช่ตัดสิน yes/no เด็ดขาด</a:t>
+            </a:r>
+          </a:p>
+          <a:p>
+            <a:pPr>
+              <a:spcAft>
+                <a:spcPts val="1000"/>
+              </a:spcAft>
+            </a:pPr>
+            <a:r>
+              <a:rPr sz="1500">
+                <a:solidFill>
+                  <a:srgbClr val="333333"/>
+                </a:solidFill>
+                <a:latin typeface="Tahoma"/>
+              </a:rPr>
+              <a:t>▸ Threshold คงที่ใช้กับอนาคตไม่ได้ ต้องอิงกราฟ gains/lift + บริบทธุรกิจทุกครั้ง</a:t>
+            </a:r>
+          </a:p>
+        </p:txBody>
+      </p:sp>
+      <p:sp>
+        <p:nvSpPr>
+          <p:cNvPr id="7" name="TextBox 6"/>
+          <p:cNvSpPr txBox="1"/>
+          <p:nvPr/>
+        </p:nvSpPr>
+        <p:spPr>
+          <a:xfrm>
+            <a:off x="6309360" y="1463040"/>
+            <a:ext cx="5394960" cy="4846320"/>
+          </a:xfrm>
+          <a:prstGeom prst="rect">
+            <a:avLst/>
+          </a:prstGeom>
+          <a:noFill/>
+        </p:spPr>
+        <p:txBody>
+          <a:bodyPr wrap="square">
+            <a:spAutoFit/>
+          </a:bodyPr>
+          <a:lstStyle/>
+          <a:p>
+            <a:r>
+              <a:rPr sz="1800" b="1">
+                <a:solidFill>
+                  <a:srgbClr val="009E73"/>
+                </a:solidFill>
+                <a:latin typeface="Tahoma"/>
+              </a:rPr>
+              <a:t>แนวทางต่อยอด</a:t>
+            </a:r>
+          </a:p>
+          <a:p>
+            <a:pPr>
+              <a:spcAft>
+                <a:spcPts val="1000"/>
+              </a:spcAft>
+            </a:pPr>
+            <a:r>
+              <a:rPr sz="1500">
+                <a:solidFill>
+                  <a:srgbClr val="333333"/>
+                </a:solidFill>
+                <a:latin typeface="Tahoma"/>
+              </a:rPr>
+              <a:t>▸ Calibration (CalibratedClassifierCV) ให้ predict_proba สะท้อนความน่าจะเป็นจริง</a:t>
+            </a:r>
+          </a:p>
+          <a:p>
+            <a:pPr>
+              <a:spcAft>
+                <a:spcPts val="1000"/>
+              </a:spcAft>
+            </a:pPr>
+            <a:r>
+              <a:rPr sz="1500">
+                <a:solidFill>
+                  <a:srgbClr val="333333"/>
+                </a:solidFill>
+                <a:latin typeface="Tahoma"/>
+              </a:rPr>
+              <a:t>▸ เพิ่มฟีเจอร์เชิงเวลา/เศรษฐกิจ เช่น อัตราดอกเบี้ยนโยบาย เพื่ออธิบาย drift</a:t>
+            </a:r>
+          </a:p>
+          <a:p>
+            <a:pPr>
+              <a:spcAft>
+                <a:spcPts val="1000"/>
+              </a:spcAft>
+            </a:pPr>
+            <a:r>
+              <a:rPr sz="1500">
+                <a:solidFill>
+                  <a:srgbClr val="333333"/>
+                </a:solidFill>
+                <a:latin typeface="Tahoma"/>
+              </a:rPr>
+              <a:t>▸ Sliding-window retraining แทนการ train ครั้งเดียวด้วยข้อมูลทั้งหมด</a:t>
+            </a:r>
+          </a:p>
+          <a:p>
+            <a:pPr>
+              <a:spcAft>
+                <a:spcPts val="1000"/>
+              </a:spcAft>
+            </a:pPr>
+            <a:r>
+              <a:rPr sz="1500">
+                <a:solidFill>
+                  <a:srgbClr val="333333"/>
+                </a:solidFill>
+                <a:latin typeface="Tahoma"/>
+              </a:rPr>
+              <a:t>▸ Cost-sensitive threshold ผูกกับต้นทุนโทร (c) และมูลค่าลูกค้า (v) จริง</a:t>
+            </a:r>
+          </a:p>
+        </p:txBody>
+      </p:sp>
+      <p:sp>
+        <p:nvSpPr>
+          <p:cNvPr id="8" name="TextBox 7"/>
+          <p:cNvSpPr txBox="1"/>
+          <p:nvPr/>
+        </p:nvSpPr>
+        <p:spPr>
+          <a:xfrm>
+            <a:off x="11002975" y="6446520"/>
+            <a:ext cx="914400" cy="274320"/>
+          </a:xfrm>
+          <a:prstGeom prst="rect">
+            <a:avLst/>
+          </a:prstGeom>
+          <a:noFill/>
+        </p:spPr>
+        <p:txBody>
+          <a:bodyPr wrap="none">
+            <a:spAutoFit/>
+          </a:bodyPr>
+          <a:lstStyle/>
+          <a:p>
+            <a:pPr algn="r"/>
+            <a:r>
+              <a:rPr sz="1100">
+                <a:solidFill>
+                  <a:srgbClr val="666666"/>
+                </a:solidFill>
+              </a:rPr>
+              <a:t>22 / 23</a:t>
+            </a:r>
+          </a:p>
+        </p:txBody>
+      </p:sp>
+      <p:sp>
+        <p:nvSpPr>
+          <p:cNvPr id="9" name="TextBox 8"/>
+          <p:cNvSpPr txBox="1"/>
+          <p:nvPr/>
+        </p:nvSpPr>
+        <p:spPr>
+          <a:xfrm>
+            <a:off x="548640" y="6446520"/>
+            <a:ext cx="4572000" cy="274320"/>
+          </a:xfrm>
+          <a:prstGeom prst="rect">
+            <a:avLst/>
+          </a:prstGeom>
+          <a:noFill/>
+        </p:spPr>
+        <p:txBody>
+          <a:bodyPr wrap="none">
+            <a:spAutoFit/>
+          </a:bodyPr>
+          <a:lstStyle/>
+          <a:p>
+            <a:r>
+              <a:rPr sz="1100">
+                <a:solidFill>
+                  <a:srgbClr val="666666"/>
+                </a:solidFill>
+              </a:rPr>
+              <a:t>Bank Marketing — Term Deposit Prediction</a:t>
+            </a:r>
+          </a:p>
+        </p:txBody>
+      </p:sp>
+    </p:spTree>
+  </p:cSld>
+  <p:clrMapOvr>
+    <a:masterClrMapping/>
+  </p:clrMapOvr>
+</p:sld>
+</file>
+
+<file path=ppt/slides/slide22.xml><?xml version="1.0" encoding="utf-8"?>
+<p:sld xmlns:a="http://schemas.openxmlformats.org/drawingml/2006/main" xmlns:p="http://schemas.openxmlformats.org/presentationml/2006/main" xmlns:r="http://schemas.openxmlformats.org/officeDocument/2006/relationships">
+  <p:cSld>
+    <p:spTree>
+      <p:nvGrpSpPr>
+        <p:cNvPr id="1" name=""/>
+        <p:cNvGrpSpPr/>
+        <p:nvPr/>
+      </p:nvGrpSpPr>
+      <p:grpSpPr/>
+      <p:sp>
+        <p:nvSpPr>
+          <p:cNvPr id="2" name="Rectangle 1"/>
+          <p:cNvSpPr/>
+          <p:nvPr/>
+        </p:nvSpPr>
+        <p:spPr>
+          <a:xfrm>
+            <a:off x="0" y="0"/>
+            <a:ext cx="12191695" cy="6858000"/>
+          </a:xfrm>
+          <a:prstGeom prst="rect">
+            <a:avLst/>
+          </a:prstGeom>
+          <a:solidFill>
+            <a:srgbClr val="333333"/>
+          </a:solidFill>
+          <a:ln>
+            <a:noFill/>
+          </a:ln>
+          <a:effectLst/>
+        </p:spPr>
+        <p:style>
+          <a:lnRef idx="1">
+            <a:schemeClr val="accent1"/>
+          </a:lnRef>
+          <a:fillRef idx="3">
+            <a:schemeClr val="accent1"/>
+          </a:fillRef>
+          <a:effectRef idx="2">
+            <a:schemeClr val="accent1"/>
+          </a:effectRef>
+          <a:fontRef idx="minor">
+            <a:schemeClr val="lt1"/>
+          </a:fontRef>
+        </p:style>
+        <p:txBody>
+          <a:bodyPr rtlCol="0" anchor="ctr"/>
+          <a:lstStyle/>
+          <a:p>
+            <a:pPr algn="ctr"/>
+          </a:p>
+        </p:txBody>
+      </p:sp>
+      <p:sp>
+        <p:nvSpPr>
+          <p:cNvPr id="3" name="TextBox 2"/>
+          <p:cNvSpPr txBox="1"/>
+          <p:nvPr/>
+        </p:nvSpPr>
+        <p:spPr>
+          <a:xfrm>
+            <a:off x="822960" y="2743200"/>
+            <a:ext cx="10515600" cy="1371600"/>
+          </a:xfrm>
+          <a:prstGeom prst="rect">
+            <a:avLst/>
+          </a:prstGeom>
+          <a:noFill/>
+        </p:spPr>
+        <p:txBody>
+          <a:bodyPr wrap="none">
+            <a:spAutoFit/>
+          </a:bodyPr>
+          <a:lstStyle/>
+          <a:p>
+            <a:r>
+              <a:rPr sz="4400" b="1">
+                <a:solidFill>
+                  <a:srgbClr val="FFFFFF"/>
+                </a:solidFill>
+                <a:latin typeface="Tahoma"/>
+              </a:rPr>
+              <a:t>ขอบคุณครับ</a:t>
+            </a:r>
+          </a:p>
+        </p:txBody>
+      </p:sp>
+      <p:sp>
+        <p:nvSpPr>
+          <p:cNvPr id="4" name="TextBox 3"/>
+          <p:cNvSpPr txBox="1"/>
+          <p:nvPr/>
+        </p:nvSpPr>
+        <p:spPr>
+          <a:xfrm>
+            <a:off x="822960" y="3566160"/>
+            <a:ext cx="10515600" cy="548640"/>
+          </a:xfrm>
+          <a:prstGeom prst="rect">
+            <a:avLst/>
+          </a:prstGeom>
+          <a:noFill/>
+        </p:spPr>
+        <p:txBody>
+          <a:bodyPr wrap="none">
+            <a:spAutoFit/>
+          </a:bodyPr>
+          <a:lstStyle/>
+          <a:p>
+            <a:r>
+              <a:rPr sz="1800">
+                <a:solidFill>
+                  <a:srgbClr val="009E73"/>
+                </a:solidFill>
+                <a:latin typeface="Tahoma"/>
+              </a:rPr>
+              <a:t>Q&amp;A — Bank Marketing: Term Deposit Prediction</a:t>
+            </a:r>
+          </a:p>
+        </p:txBody>
+      </p:sp>
+    </p:spTree>
+  </p:cSld>
+  <p:clrMapOvr>
+    <a:masterClrMapping/>
+  </p:clrMapOvr>
+</p:sld>
+</file>
+
+<file path=ppt/slides/slide23.xml><?xml version="1.0" encoding="utf-8"?>
+<p:sld xmlns:a="http://schemas.openxmlformats.org/drawingml/2006/main" xmlns:p="http://schemas.openxmlformats.org/presentationml/2006/main" xmlns:r="http://schemas.openxmlformats.org/officeDocument/2006/relationships">
+  <p:cSld>
+    <p:spTree>
+      <p:nvGrpSpPr>
+        <p:cNvPr id="1" name=""/>
+        <p:cNvGrpSpPr/>
+        <p:nvPr/>
+      </p:nvGrpSpPr>
+      <p:grpSpPr/>
+      <p:sp>
+        <p:nvSpPr>
+          <p:cNvPr id="2" name="Rectangle 1"/>
+          <p:cNvSpPr/>
+          <p:nvPr/>
+        </p:nvSpPr>
+        <p:spPr>
+          <a:xfrm>
+            <a:off x="0" y="0"/>
+            <a:ext cx="12191695" cy="6858000"/>
+          </a:xfrm>
+          <a:prstGeom prst="rect">
+            <a:avLst/>
+          </a:prstGeom>
+          <a:solidFill>
+            <a:srgbClr val="FFFFFF"/>
+          </a:solidFill>
+          <a:ln>
+            <a:noFill/>
+          </a:ln>
+          <a:effectLst/>
+        </p:spPr>
+        <p:style>
+          <a:lnRef idx="1">
+            <a:schemeClr val="accent1"/>
+          </a:lnRef>
+          <a:fillRef idx="3">
+            <a:schemeClr val="accent1"/>
+          </a:fillRef>
+          <a:effectRef idx="2">
+            <a:schemeClr val="accent1"/>
+          </a:effectRef>
+          <a:fontRef idx="minor">
+            <a:schemeClr val="lt1"/>
+          </a:fontRef>
+        </p:style>
+        <p:txBody>
+          <a:bodyPr rtlCol="0" anchor="ctr"/>
+          <a:lstStyle/>
+          <a:p>
+            <a:pPr algn="ctr"/>
+          </a:p>
+        </p:txBody>
+      </p:sp>
+      <p:sp>
+        <p:nvSpPr>
+          <p:cNvPr id="3" name="TextBox 2"/>
+          <p:cNvSpPr txBox="1"/>
+          <p:nvPr/>
+        </p:nvSpPr>
+        <p:spPr>
+          <a:xfrm>
+            <a:off x="548640" y="137160"/>
+            <a:ext cx="7315200" cy="320040"/>
+          </a:xfrm>
+          <a:prstGeom prst="rect">
+            <a:avLst/>
+          </a:prstGeom>
+          <a:noFill/>
+        </p:spPr>
+        <p:txBody>
+          <a:bodyPr wrap="none">
+            <a:spAutoFit/>
+          </a:bodyPr>
+          <a:lstStyle/>
+          <a:p>
+            <a:r>
+              <a:rPr sz="1300" b="1">
+                <a:solidFill>
+                  <a:srgbClr val="009E73"/>
+                </a:solidFill>
+                <a:latin typeface="Tahoma"/>
+              </a:rPr>
+              <a:t>7. กลยุทธ์ธุรกิจ</a:t>
+            </a:r>
+          </a:p>
+        </p:txBody>
+      </p:sp>
+      <p:sp>
+        <p:nvSpPr>
+          <p:cNvPr id="4" name="TextBox 3"/>
+          <p:cNvSpPr txBox="1"/>
+          <p:nvPr/>
+        </p:nvSpPr>
+        <p:spPr>
+          <a:xfrm>
+            <a:off x="548640" y="411480"/>
+            <a:ext cx="11094415" cy="822960"/>
+          </a:xfrm>
+          <a:prstGeom prst="rect">
+            <a:avLst/>
+          </a:prstGeom>
+          <a:noFill/>
+        </p:spPr>
+        <p:txBody>
+          <a:bodyPr wrap="square">
+            <a:spAutoFit/>
+          </a:bodyPr>
+          <a:lstStyle/>
+          <a:p>
+            <a:r>
+              <a:rPr sz="3200" b="1">
+                <a:solidFill>
+                  <a:srgbClr val="333333"/>
+                </a:solidFill>
+                <a:latin typeface="Tahoma"/>
+              </a:rPr>
+              <a:t>เลือกโทร Top กี่% ตามเคสธุรกิจ</a:t>
+            </a:r>
+          </a:p>
+        </p:txBody>
+      </p:sp>
+      <p:sp>
+        <p:nvSpPr>
+          <p:cNvPr id="5" name="Rectangle 4"/>
+          <p:cNvSpPr/>
+          <p:nvPr/>
+        </p:nvSpPr>
+        <p:spPr>
+          <a:xfrm>
+            <a:off x="548640" y="1143000"/>
+            <a:ext cx="1828800" cy="50800"/>
+          </a:xfrm>
+          <a:prstGeom prst="rect">
+            <a:avLst/>
+          </a:prstGeom>
+          <a:solidFill>
+            <a:srgbClr val="009E73"/>
+          </a:solidFill>
+          <a:ln>
+            <a:noFill/>
+          </a:ln>
+          <a:effectLst/>
+        </p:spPr>
+        <p:style>
+          <a:lnRef idx="1">
+            <a:schemeClr val="accent1"/>
+          </a:lnRef>
+          <a:fillRef idx="3">
+            <a:schemeClr val="accent1"/>
+          </a:fillRef>
+          <a:effectRef idx="2">
+            <a:schemeClr val="accent1"/>
+          </a:effectRef>
+          <a:fontRef idx="minor">
+            <a:schemeClr val="lt1"/>
+          </a:fontRef>
+        </p:style>
+        <p:txBody>
+          <a:bodyPr rtlCol="0" anchor="ctr"/>
+          <a:lstStyle/>
+          <a:p>
+            <a:pPr algn="ctr"/>
+          </a:p>
+        </p:txBody>
+      </p:sp>
+      <p:sp>
+        <p:nvSpPr>
+          <p:cNvPr id="6" name="TextBox 5"/>
+          <p:cNvSpPr txBox="1"/>
+          <p:nvPr/>
+        </p:nvSpPr>
+        <p:spPr>
+          <a:xfrm>
+            <a:off x="11002975" y="6446520"/>
+            <a:ext cx="914400" cy="274320"/>
+          </a:xfrm>
+          <a:prstGeom prst="rect">
+            <a:avLst/>
+          </a:prstGeom>
+          <a:noFill/>
+        </p:spPr>
+        <p:txBody>
+          <a:bodyPr wrap="none">
+            <a:spAutoFit/>
+          </a:bodyPr>
+          <a:lstStyle/>
+          <a:p>
+            <a:pPr algn="r"/>
+            <a:r>
+              <a:rPr sz="1100" b="0">
+                <a:solidFill>
+                  <a:srgbClr val="666666"/>
+                </a:solidFill>
+              </a:rPr>
+              <a:t>12 / 23</a:t>
+            </a:r>
+          </a:p>
+        </p:txBody>
+      </p:sp>
+      <p:sp>
+        <p:nvSpPr>
+          <p:cNvPr id="7" name="TextBox 6"/>
+          <p:cNvSpPr txBox="1"/>
+          <p:nvPr/>
+        </p:nvSpPr>
+        <p:spPr>
+          <a:xfrm>
+            <a:off x="548640" y="6446520"/>
+            <a:ext cx="4572000" cy="274320"/>
+          </a:xfrm>
+          <a:prstGeom prst="rect">
+            <a:avLst/>
+          </a:prstGeom>
+          <a:noFill/>
+        </p:spPr>
+        <p:txBody>
+          <a:bodyPr wrap="none">
+            <a:spAutoFit/>
+          </a:bodyPr>
+          <a:lstStyle/>
+          <a:p>
+            <a:r>
+              <a:rPr sz="1100" b="0">
+                <a:solidFill>
+                  <a:srgbClr val="666666"/>
+                </a:solidFill>
+              </a:rPr>
+              <a:t>Bank Marketing — Term Deposit Prediction</a:t>
+            </a:r>
+          </a:p>
+        </p:txBody>
+      </p:sp>
+      <p:graphicFrame>
+        <p:nvGraphicFramePr>
+          <p:cNvPr id="8" name="Chart 7"/>
+          <p:cNvGraphicFramePr>
+            <a:graphicFrameLocks noGrp="1"/>
+          </p:cNvGraphicFramePr>
+          <p:nvPr/>
+        </p:nvGraphicFramePr>
+        <p:xfrm>
+          <a:off x="548640" y="1325880"/>
+          <a:ext cx="5303520" cy="3017520"/>
+        </p:xfrm>
+        <a:graphic>
+          <a:graphicData uri="http://schemas.openxmlformats.org/drawingml/2006/chart">
+            <c:chart xmlns:c="http://schemas.openxmlformats.org/drawingml/2006/chart" r:id="rId2"/>
+          </a:graphicData>
+        </a:graphic>
+      </p:graphicFrame>
+      <p:sp>
+        <p:nvSpPr>
+          <p:cNvPr id="9" name="TextBox 8"/>
+          <p:cNvSpPr txBox="1"/>
+          <p:nvPr/>
+        </p:nvSpPr>
+        <p:spPr>
+          <a:xfrm>
+            <a:off x="548640" y="4389120"/>
+            <a:ext cx="5303520" cy="548640"/>
+          </a:xfrm>
+          <a:prstGeom prst="rect">
+            <a:avLst/>
+          </a:prstGeom>
+          <a:noFill/>
+        </p:spPr>
+        <p:txBody>
+          <a:bodyPr wrap="square">
+            <a:spAutoFit/>
+          </a:bodyPr>
+          <a:lstStyle/>
+          <a:p>
+            <a:r>
+              <a:rPr sz="1200" b="0">
+                <a:solidFill>
+                  <a:srgbClr val="333333"/>
+                </a:solidFill>
+                <a:latin typeface="Tahoma"/>
+              </a:rPr>
+              <a:t>top 30% แรกฝาก ~50% คงที่ (สุ่มโทร = 31.6%) — หลังจากนั้นแต่ละสายที่โทรเพิ่มคุ้มน้อยลงเรื่อย ๆ</a:t>
+            </a:r>
+          </a:p>
+        </p:txBody>
+      </p:sp>
+      <p:sp>
+        <p:nvSpPr>
+          <p:cNvPr id="10" name="Rounded Rectangle 9"/>
+          <p:cNvSpPr/>
+          <p:nvPr/>
+        </p:nvSpPr>
+        <p:spPr>
+          <a:xfrm>
+            <a:off x="6126480" y="1325880"/>
+            <a:ext cx="2651760" cy="1554480"/>
+          </a:xfrm>
+          <a:prstGeom prst="roundRect">
+            <a:avLst>
+              <a:gd name="adj" fmla="val 8000"/>
+            </a:avLst>
+          </a:prstGeom>
+          <a:solidFill>
+            <a:srgbClr val="F7F9F9"/>
+          </a:solidFill>
+          <a:ln w="12700">
+            <a:solidFill>
+              <a:srgbClr val="009E73"/>
+            </a:solidFill>
+          </a:ln>
+          <a:effectLst/>
+        </p:spPr>
+        <p:style>
+          <a:lnRef idx="1">
+            <a:schemeClr val="accent1"/>
+          </a:lnRef>
+          <a:fillRef idx="3">
+            <a:schemeClr val="accent1"/>
+          </a:fillRef>
+          <a:effectRef idx="2">
+            <a:schemeClr val="accent1"/>
+          </a:effectRef>
+          <a:fontRef idx="minor">
+            <a:schemeClr val="lt1"/>
+          </a:fontRef>
+        </p:style>
+        <p:txBody>
+          <a:bodyPr rtlCol="0" anchor="ctr" wrap="square" lIns="137160" rIns="137160"/>
+          <a:lstStyle/>
+          <a:p>
+            <a:pPr algn="l"/>
+            <a:r>
+              <a:rPr sz="1200" b="1">
+                <a:solidFill>
+                  <a:srgbClr val="666666"/>
+                </a:solidFill>
+                <a:latin typeface="Tahoma"/>
+              </a:rPr>
+              <a:t>1. โควต้าจำกัด ~2,700 สาย</a:t>
+            </a:r>
+          </a:p>
+          <a:p>
+            <a:pPr algn="l">
+              <a:spcBef>
+                <a:spcPts val="400"/>
+              </a:spcBef>
+            </a:pPr>
+            <a:r>
+              <a:rPr sz="2200" b="1">
+                <a:solidFill>
+                  <a:srgbClr val="009E73"/>
+                </a:solidFill>
+                <a:latin typeface="Tahoma"/>
+              </a:rPr>
+              <a:t>top 30%</a:t>
+            </a:r>
+          </a:p>
+          <a:p>
+            <a:pPr algn="l"/>
+            <a:r>
+              <a:rPr sz="1200" b="0">
+                <a:solidFill>
+                  <a:srgbClr val="333333"/>
+                </a:solidFill>
+                <a:latin typeface="Tahoma"/>
+              </a:rPr>
+              <a:t>ได้ลูกค้า 1,370 คน (48%)</a:t>
+            </a:r>
+          </a:p>
+        </p:txBody>
+      </p:sp>
+      <p:sp>
+        <p:nvSpPr>
+          <p:cNvPr id="11" name="Rounded Rectangle 10"/>
+          <p:cNvSpPr/>
+          <p:nvPr/>
+        </p:nvSpPr>
+        <p:spPr>
+          <a:xfrm>
+            <a:off x="8961120" y="1325880"/>
+            <a:ext cx="2651760" cy="1554480"/>
+          </a:xfrm>
+          <a:prstGeom prst="roundRect">
+            <a:avLst>
+              <a:gd name="adj" fmla="val 8000"/>
+            </a:avLst>
+          </a:prstGeom>
+          <a:solidFill>
+            <a:srgbClr val="F7F9F9"/>
+          </a:solidFill>
+          <a:ln w="12700">
+            <a:solidFill>
+              <a:srgbClr val="009E73"/>
+            </a:solidFill>
+          </a:ln>
+          <a:effectLst/>
+        </p:spPr>
+        <p:style>
+          <a:lnRef idx="1">
+            <a:schemeClr val="accent1"/>
+          </a:lnRef>
+          <a:fillRef idx="3">
+            <a:schemeClr val="accent1"/>
+          </a:fillRef>
+          <a:effectRef idx="2">
+            <a:schemeClr val="accent1"/>
+          </a:effectRef>
+          <a:fontRef idx="minor">
+            <a:schemeClr val="lt1"/>
+          </a:fontRef>
+        </p:style>
+        <p:txBody>
+          <a:bodyPr rtlCol="0" anchor="ctr" wrap="square" lIns="137160" rIns="137160"/>
+          <a:lstStyle/>
+          <a:p>
+            <a:pPr algn="l"/>
+            <a:r>
+              <a:rPr sz="1200" b="1">
+                <a:solidFill>
+                  <a:srgbClr val="666666"/>
+                </a:solidFill>
+                <a:latin typeface="Tahoma"/>
+              </a:rPr>
+              <a:t>2. โทรแพง (precision-first)</a:t>
+            </a:r>
+          </a:p>
+          <a:p>
+            <a:pPr algn="l">
+              <a:spcBef>
+                <a:spcPts val="400"/>
+              </a:spcBef>
+            </a:pPr>
+            <a:r>
+              <a:rPr sz="2200" b="1">
+                <a:solidFill>
+                  <a:srgbClr val="009E73"/>
+                </a:solidFill>
+                <a:latin typeface="Tahoma"/>
+              </a:rPr>
+              <a:t>top 10–30%</a:t>
+            </a:r>
+          </a:p>
+          <a:p>
+            <a:pPr algn="l"/>
+            <a:r>
+              <a:rPr sz="1200" b="0">
+                <a:solidFill>
+                  <a:srgbClr val="333333"/>
+                </a:solidFill>
+                <a:latin typeface="Tahoma"/>
+              </a:rPr>
+              <a:t>อัตราฝาก ~51% สูงสุด</a:t>
+            </a:r>
+          </a:p>
+        </p:txBody>
+      </p:sp>
+      <p:sp>
+        <p:nvSpPr>
+          <p:cNvPr id="12" name="Rounded Rectangle 11"/>
+          <p:cNvSpPr/>
+          <p:nvPr/>
+        </p:nvSpPr>
+        <p:spPr>
+          <a:xfrm>
+            <a:off x="6126480" y="3063240"/>
+            <a:ext cx="2651760" cy="1554480"/>
+          </a:xfrm>
+          <a:prstGeom prst="roundRect">
+            <a:avLst>
+              <a:gd name="adj" fmla="val 8000"/>
+            </a:avLst>
+          </a:prstGeom>
+          <a:solidFill>
+            <a:srgbClr val="F7F9F9"/>
+          </a:solidFill>
+          <a:ln w="12700">
+            <a:solidFill>
+              <a:srgbClr val="009E73"/>
+            </a:solidFill>
+          </a:ln>
+          <a:effectLst/>
+        </p:spPr>
+        <p:style>
+          <a:lnRef idx="1">
+            <a:schemeClr val="accent1"/>
+          </a:lnRef>
+          <a:fillRef idx="3">
+            <a:schemeClr val="accent1"/>
+          </a:fillRef>
+          <a:effectRef idx="2">
+            <a:schemeClr val="accent1"/>
+          </a:effectRef>
+          <a:fontRef idx="minor">
+            <a:schemeClr val="lt1"/>
+          </a:fontRef>
+        </p:style>
+        <p:txBody>
+          <a:bodyPr rtlCol="0" anchor="ctr" wrap="square" lIns="137160" rIns="137160"/>
+          <a:lstStyle/>
+          <a:p>
+            <a:pPr algn="l"/>
+            <a:r>
+              <a:rPr sz="1200" b="1">
+                <a:solidFill>
+                  <a:srgbClr val="666666"/>
+                </a:solidFill>
+                <a:latin typeface="Tahoma"/>
+              </a:rPr>
+              <a:t>3. ห้ามพลาด ≥ 80%</a:t>
+            </a:r>
+          </a:p>
+          <a:p>
+            <a:pPr algn="l">
+              <a:spcBef>
+                <a:spcPts val="400"/>
+              </a:spcBef>
+            </a:pPr>
+            <a:r>
+              <a:rPr sz="2200" b="1">
+                <a:solidFill>
+                  <a:srgbClr val="009E73"/>
+                </a:solidFill>
+                <a:latin typeface="Tahoma"/>
+              </a:rPr>
+              <a:t>~top 65%</a:t>
+            </a:r>
+          </a:p>
+          <a:p>
+            <a:pPr algn="l"/>
+            <a:r>
+              <a:rPr sz="1200" b="0">
+                <a:solidFill>
+                  <a:srgbClr val="333333"/>
+                </a:solidFill>
+                <a:latin typeface="Tahoma"/>
+              </a:rPr>
+              <a:t>SMS / auto-dialer ต้นทุนต่ำ</a:t>
+            </a:r>
+          </a:p>
+        </p:txBody>
+      </p:sp>
+      <p:sp>
+        <p:nvSpPr>
+          <p:cNvPr id="13" name="Rounded Rectangle 12"/>
+          <p:cNvSpPr/>
+          <p:nvPr/>
+        </p:nvSpPr>
+        <p:spPr>
+          <a:xfrm>
+            <a:off x="8961120" y="3063240"/>
+            <a:ext cx="2651760" cy="1554480"/>
+          </a:xfrm>
+          <a:prstGeom prst="roundRect">
+            <a:avLst>
+              <a:gd name="adj" fmla="val 8000"/>
+            </a:avLst>
+          </a:prstGeom>
+          <a:solidFill>
+            <a:srgbClr val="F7F9F9"/>
+          </a:solidFill>
+          <a:ln w="12700">
+            <a:solidFill>
+              <a:srgbClr val="009E73"/>
+            </a:solidFill>
+          </a:ln>
+          <a:effectLst/>
+        </p:spPr>
+        <p:style>
+          <a:lnRef idx="1">
+            <a:schemeClr val="accent1"/>
+          </a:lnRef>
+          <a:fillRef idx="3">
+            <a:schemeClr val="accent1"/>
+          </a:fillRef>
+          <a:effectRef idx="2">
+            <a:schemeClr val="accent1"/>
+          </a:effectRef>
+          <a:fontRef idx="minor">
+            <a:schemeClr val="lt1"/>
+          </a:fontRef>
+        </p:style>
+        <p:txBody>
+          <a:bodyPr rtlCol="0" anchor="ctr" wrap="square" lIns="137160" rIns="137160"/>
+          <a:lstStyle/>
+          <a:p>
+            <a:pPr algn="l"/>
+            <a:r>
+              <a:rPr sz="1200" b="1">
+                <a:solidFill>
+                  <a:srgbClr val="666666"/>
+                </a:solidFill>
+                <a:latin typeface="Tahoma"/>
+              </a:rPr>
+              <a:t>4. กำไรสูงสุด</a:t>
+            </a:r>
+          </a:p>
+          <a:p>
+            <a:pPr algn="l">
+              <a:spcBef>
+                <a:spcPts val="400"/>
+              </a:spcBef>
+            </a:pPr>
+            <a:r>
+              <a:rPr sz="2200" b="1">
+                <a:solidFill>
+                  <a:srgbClr val="009E73"/>
+                </a:solidFill>
+                <a:latin typeface="Tahoma"/>
+              </a:rPr>
+              <a:t>โทรถ้า % &gt; c/v</a:t>
+            </a:r>
+          </a:p>
+          <a:p>
+            <a:pPr algn="l"/>
+            <a:r>
+              <a:rPr sz="1200" b="0">
+                <a:solidFill>
+                  <a:srgbClr val="333333"/>
+                </a:solidFill>
+                <a:latin typeface="Tahoma"/>
+              </a:rPr>
+              <a:t>c/v 0.25 → top 52%</a:t>
+            </a:r>
+          </a:p>
+          <a:p>
+            <a:pPr algn="l"/>
+            <a:r>
+              <a:rPr sz="1200" b="0">
+                <a:solidFill>
+                  <a:srgbClr val="333333"/>
+                </a:solidFill>
+                <a:latin typeface="Tahoma"/>
+              </a:rPr>
+              <a:t>c/v 0.40 → top 29%</a:t>
+            </a:r>
+          </a:p>
+        </p:txBody>
+      </p:sp>
+      <p:sp>
+        <p:nvSpPr>
+          <p:cNvPr id="14" name="Rounded Rectangle 13"/>
+          <p:cNvSpPr/>
+          <p:nvPr/>
+        </p:nvSpPr>
+        <p:spPr>
+          <a:xfrm>
+            <a:off x="548640" y="5029200"/>
+            <a:ext cx="11064240" cy="1188720"/>
+          </a:xfrm>
+          <a:prstGeom prst="roundRect">
+            <a:avLst>
+              <a:gd name="adj" fmla="val 8000"/>
+            </a:avLst>
+          </a:prstGeom>
+          <a:solidFill>
+            <a:srgbClr val="F7F9F9"/>
+          </a:solidFill>
+          <a:ln w="12700">
+            <a:solidFill>
+              <a:srgbClr val="009E73"/>
+            </a:solidFill>
+          </a:ln>
+          <a:effectLst/>
+        </p:spPr>
+        <p:style>
+          <a:lnRef idx="1">
+            <a:schemeClr val="accent1"/>
+          </a:lnRef>
+          <a:fillRef idx="3">
+            <a:schemeClr val="accent1"/>
+          </a:fillRef>
+          <a:effectRef idx="2">
+            <a:schemeClr val="accent1"/>
+          </a:effectRef>
+          <a:fontRef idx="minor">
+            <a:schemeClr val="lt1"/>
+          </a:fontRef>
+        </p:style>
+        <p:txBody>
+          <a:bodyPr rtlCol="0" anchor="ctr" wrap="square" lIns="228600" rIns="228600"/>
+          <a:lstStyle/>
+          <a:p>
+            <a:pPr algn="ctr"/>
+            <a:r>
+              <a:rPr sz="1400" b="1">
+                <a:solidFill>
+                  <a:srgbClr val="333333"/>
+                </a:solidFill>
+                <a:latin typeface="Tahoma"/>
+              </a:rPr>
+              <a:t>กฎง่าย ๆ: โทรต่อ ตราบใดที่อัตราฝากของกลุ่มถัดไป &gt; ต้นทุนต่อสาย ÷ มูลค่าลูกค้า (c/v)</a:t>
+            </a:r>
+          </a:p>
+          <a:p>
+            <a:pPr>
+              <a:spcBef>
+                <a:spcPts val="300"/>
+              </a:spcBef>
+            </a:pPr>
+            <a:r>
+              <a:rPr sz="1300" b="0">
+                <a:solidFill>
+                  <a:srgbClr val="333333"/>
+                </a:solidFill>
+                <a:latin typeface="Tahoma"/>
+              </a:rPr>
+              <a:t>▸ c/v &lt; 0.13 → โทรทุกคนยังคุ้ม  ·  c/v 0.2–0.4 → ตัดเหลือ top 30–55% (โมเดลสร้างมูลค่าสูงสุด)  ·  c/v &gt; 0.5 → ไม่คุ้มแม้กลุ่มบนสุด</a:t>
+            </a:r>
+          </a:p>
+        </p:txBody>
+      </p:sp>
+    </p:spTree>
+  </p:cSld>
+  <p:clrMapOvr>
+    <a:masterClrMapping/>
+  </p:clrMapOvr>
+</p:sld>
+</file>
+
 <file path=ppt/slides/slide3.xml><?xml version="1.0" encoding="utf-8"?>
 <p:sld xmlns:a="http://schemas.openxmlformats.org/drawingml/2006/main" xmlns:p="http://schemas.openxmlformats.org/presentationml/2006/main" xmlns:r="http://schemas.openxmlformats.org/officeDocument/2006/relationships">
   <p:cSld>
@@ -12233,7 +13253,7 @@
                   <a:srgbClr val="666666"/>
                 </a:solidFill>
               </a:rPr>
-              <a:t>3 / 22</a:t>
+              <a:t>3 / 23</a:t>
             </a:r>
           </a:p>
         </p:txBody>
@@ -12648,7 +13668,7 @@
                   <a:srgbClr val="666666"/>
                 </a:solidFill>
               </a:rPr>
-              <a:t>4 / 22</a:t>
+              <a:t>4 / 23</a:t>
             </a:r>
           </a:p>
         </p:txBody>
@@ -13203,7 +14223,7 @@
                   <a:srgbClr val="666666"/>
                 </a:solidFill>
               </a:rPr>
-              <a:t>5 / 22</a:t>
+              <a:t>5 / 23</a:t>
             </a:r>
           </a:p>
         </p:txBody>
@@ -13547,7 +14567,7 @@
                   <a:srgbClr val="666666"/>
                 </a:solidFill>
               </a:rPr>
-              <a:t>6 / 22</a:t>
+              <a:t>6 / 23</a:t>
             </a:r>
           </a:p>
         </p:txBody>
@@ -13846,7 +14866,7 @@
                   <a:srgbClr val="666666"/>
                 </a:solidFill>
               </a:rPr>
-              <a:t>7 / 22</a:t>
+              <a:t>7 / 23</a:t>
             </a:r>
           </a:p>
         </p:txBody>
@@ -14485,7 +15505,7 @@
                   <a:srgbClr val="666666"/>
                 </a:solidFill>
               </a:rPr>
-              <a:t>8 / 22</a:t>
+              <a:t>8 / 23</a:t>
             </a:r>
           </a:p>
         </p:txBody>
@@ -14957,7 +15977,7 @@
                   <a:srgbClr val="666666"/>
                 </a:solidFill>
               </a:rPr>
-              <a:t>9 / 22</a:t>
+              <a:t>9 / 23</a:t>
             </a:r>
           </a:p>
         </p:txBody>
